--- a/documents/Flu_Vaccination_Predictor_Presentation.pptx
+++ b/documents/Flu_Vaccination_Predictor_Presentation.pptx
@@ -4,14 +4,24 @@
   <p:sldMasterIdLst>
     <p:sldMasterId id="2147483648" r:id="rId1"/>
   </p:sldMasterIdLst>
+  <p:notesMasterIdLst>
+    <p:notesMasterId r:id="rId13"/>
+  </p:notesMasterIdLst>
+  <p:handoutMasterIdLst>
+    <p:handoutMasterId r:id="rId14"/>
+  </p:handoutMasterIdLst>
   <p:sldIdLst>
     <p:sldId id="256" r:id="rId2"/>
     <p:sldId id="257" r:id="rId3"/>
     <p:sldId id="258" r:id="rId4"/>
-    <p:sldId id="259" r:id="rId5"/>
-    <p:sldId id="263" r:id="rId6"/>
-    <p:sldId id="260" r:id="rId7"/>
-    <p:sldId id="261" r:id="rId8"/>
+    <p:sldId id="264" r:id="rId5"/>
+    <p:sldId id="266" r:id="rId6"/>
+    <p:sldId id="259" r:id="rId7"/>
+    <p:sldId id="263" r:id="rId8"/>
+    <p:sldId id="269" r:id="rId9"/>
+    <p:sldId id="267" r:id="rId10"/>
+    <p:sldId id="260" r:id="rId11"/>
+    <p:sldId id="261" r:id="rId12"/>
   </p:sldIdLst>
   <p:sldSz cx="9144000" cy="6858000" type="screen4x3"/>
   <p:notesSz cx="6858000" cy="9144000"/>
@@ -129,6 +139,1447 @@
 </p:presentation>
 </file>
 
+<file path=ppt/handoutMasters/handoutMaster1.xml><?xml version="1.0" encoding="utf-8"?>
+<p:handoutMaster xmlns:a="http://schemas.openxmlformats.org/drawingml/2006/main" xmlns:r="http://schemas.openxmlformats.org/officeDocument/2006/relationships" xmlns:p="http://schemas.openxmlformats.org/presentationml/2006/main">
+  <p:cSld>
+    <p:bg>
+      <p:bgRef idx="1001">
+        <a:schemeClr val="bg1"/>
+      </p:bgRef>
+    </p:bg>
+    <p:spTree>
+      <p:nvGrpSpPr>
+        <p:cNvPr id="1" name=""/>
+        <p:cNvGrpSpPr/>
+        <p:nvPr/>
+      </p:nvGrpSpPr>
+      <p:grpSpPr>
+        <a:xfrm>
+          <a:off x="0" y="0"/>
+          <a:ext cx="0" cy="0"/>
+          <a:chOff x="0" y="0"/>
+          <a:chExt cx="0" cy="0"/>
+        </a:xfrm>
+      </p:grpSpPr>
+      <p:sp>
+        <p:nvSpPr>
+          <p:cNvPr id="2" name="Header Placeholder 1"/>
+          <p:cNvSpPr>
+            <a:spLocks noGrp="1"/>
+          </p:cNvSpPr>
+          <p:nvPr>
+            <p:ph type="hdr" sz="quarter"/>
+          </p:nvPr>
+        </p:nvSpPr>
+        <p:spPr>
+          <a:xfrm>
+            <a:off x="0" y="0"/>
+            <a:ext cx="2971800" cy="458788"/>
+          </a:xfrm>
+          <a:prstGeom prst="rect">
+            <a:avLst/>
+          </a:prstGeom>
+        </p:spPr>
+        <p:txBody>
+          <a:bodyPr vert="horz" lIns="91440" tIns="45720" rIns="91440" bIns="45720" rtlCol="0"/>
+          <a:lstStyle>
+            <a:lvl1pPr algn="l">
+              <a:defRPr sz="1200"/>
+            </a:lvl1pPr>
+          </a:lstStyle>
+          <a:p>
+            <a:endParaRPr lang="en-US"/>
+          </a:p>
+        </p:txBody>
+      </p:sp>
+      <p:sp>
+        <p:nvSpPr>
+          <p:cNvPr id="3" name="Date Placeholder 2"/>
+          <p:cNvSpPr>
+            <a:spLocks noGrp="1"/>
+          </p:cNvSpPr>
+          <p:nvPr>
+            <p:ph type="dt" sz="quarter" idx="1"/>
+          </p:nvPr>
+        </p:nvSpPr>
+        <p:spPr>
+          <a:xfrm>
+            <a:off x="3884613" y="0"/>
+            <a:ext cx="2971800" cy="458788"/>
+          </a:xfrm>
+          <a:prstGeom prst="rect">
+            <a:avLst/>
+          </a:prstGeom>
+        </p:spPr>
+        <p:txBody>
+          <a:bodyPr vert="horz" lIns="91440" tIns="45720" rIns="91440" bIns="45720" rtlCol="0"/>
+          <a:lstStyle>
+            <a:lvl1pPr algn="r">
+              <a:defRPr sz="1200"/>
+            </a:lvl1pPr>
+          </a:lstStyle>
+          <a:p>
+            <a:fld id="{3E3C3102-AD2F-4E66-8055-0D08D7E10047}" type="datetimeFigureOut">
+              <a:rPr lang="en-US" smtClean="0"/>
+              <a:t>4/15/2025</a:t>
+            </a:fld>
+            <a:endParaRPr lang="en-US"/>
+          </a:p>
+        </p:txBody>
+      </p:sp>
+      <p:sp>
+        <p:nvSpPr>
+          <p:cNvPr id="4" name="Footer Placeholder 3"/>
+          <p:cNvSpPr>
+            <a:spLocks noGrp="1"/>
+          </p:cNvSpPr>
+          <p:nvPr>
+            <p:ph type="ftr" sz="quarter" idx="2"/>
+          </p:nvPr>
+        </p:nvSpPr>
+        <p:spPr>
+          <a:xfrm>
+            <a:off x="0" y="8685213"/>
+            <a:ext cx="2971800" cy="458787"/>
+          </a:xfrm>
+          <a:prstGeom prst="rect">
+            <a:avLst/>
+          </a:prstGeom>
+        </p:spPr>
+        <p:txBody>
+          <a:bodyPr vert="horz" lIns="91440" tIns="45720" rIns="91440" bIns="45720" rtlCol="0" anchor="b"/>
+          <a:lstStyle>
+            <a:lvl1pPr algn="l">
+              <a:defRPr sz="1200"/>
+            </a:lvl1pPr>
+          </a:lstStyle>
+          <a:p>
+            <a:endParaRPr lang="en-US"/>
+          </a:p>
+        </p:txBody>
+      </p:sp>
+      <p:sp>
+        <p:nvSpPr>
+          <p:cNvPr id="5" name="Slide Number Placeholder 4"/>
+          <p:cNvSpPr>
+            <a:spLocks noGrp="1"/>
+          </p:cNvSpPr>
+          <p:nvPr>
+            <p:ph type="sldNum" sz="quarter" idx="3"/>
+          </p:nvPr>
+        </p:nvSpPr>
+        <p:spPr>
+          <a:xfrm>
+            <a:off x="3884613" y="8685213"/>
+            <a:ext cx="2971800" cy="458787"/>
+          </a:xfrm>
+          <a:prstGeom prst="rect">
+            <a:avLst/>
+          </a:prstGeom>
+        </p:spPr>
+        <p:txBody>
+          <a:bodyPr vert="horz" lIns="91440" tIns="45720" rIns="91440" bIns="45720" rtlCol="0" anchor="b"/>
+          <a:lstStyle>
+            <a:lvl1pPr algn="r">
+              <a:defRPr sz="1200"/>
+            </a:lvl1pPr>
+          </a:lstStyle>
+          <a:p>
+            <a:fld id="{113C15C9-2F3E-47EB-AFB1-8E7C7C9BAAF5}" type="slidenum">
+              <a:rPr lang="en-US" smtClean="0"/>
+              <a:t>‹#›</a:t>
+            </a:fld>
+            <a:endParaRPr lang="en-US"/>
+          </a:p>
+        </p:txBody>
+      </p:sp>
+    </p:spTree>
+    <p:extLst>
+      <p:ext uri="{BB962C8B-B14F-4D97-AF65-F5344CB8AC3E}">
+        <p14:creationId xmlns:p14="http://schemas.microsoft.com/office/powerpoint/2010/main" val="1266057099"/>
+      </p:ext>
+    </p:extLst>
+  </p:cSld>
+  <p:clrMap bg1="lt1" tx1="dk1" bg2="lt2" tx2="dk2" accent1="accent1" accent2="accent2" accent3="accent3" accent4="accent4" accent5="accent5" accent6="accent6" hlink="hlink" folHlink="folHlink"/>
+  <p:hf hdr="0" ftr="0" dt="0"/>
+</p:handoutMaster>
+</file>
+
+<file path=ppt/notesMasters/notesMaster1.xml><?xml version="1.0" encoding="utf-8"?>
+<p:notesMaster xmlns:a="http://schemas.openxmlformats.org/drawingml/2006/main" xmlns:r="http://schemas.openxmlformats.org/officeDocument/2006/relationships" xmlns:p="http://schemas.openxmlformats.org/presentationml/2006/main">
+  <p:cSld>
+    <p:bg>
+      <p:bgRef idx="1001">
+        <a:schemeClr val="bg1"/>
+      </p:bgRef>
+    </p:bg>
+    <p:spTree>
+      <p:nvGrpSpPr>
+        <p:cNvPr id="1" name=""/>
+        <p:cNvGrpSpPr/>
+        <p:nvPr/>
+      </p:nvGrpSpPr>
+      <p:grpSpPr>
+        <a:xfrm>
+          <a:off x="0" y="0"/>
+          <a:ext cx="0" cy="0"/>
+          <a:chOff x="0" y="0"/>
+          <a:chExt cx="0" cy="0"/>
+        </a:xfrm>
+      </p:grpSpPr>
+      <p:sp>
+        <p:nvSpPr>
+          <p:cNvPr id="2" name="Header Placeholder 1"/>
+          <p:cNvSpPr>
+            <a:spLocks noGrp="1"/>
+          </p:cNvSpPr>
+          <p:nvPr>
+            <p:ph type="hdr" sz="quarter"/>
+          </p:nvPr>
+        </p:nvSpPr>
+        <p:spPr>
+          <a:xfrm>
+            <a:off x="0" y="0"/>
+            <a:ext cx="2971800" cy="458788"/>
+          </a:xfrm>
+          <a:prstGeom prst="rect">
+            <a:avLst/>
+          </a:prstGeom>
+        </p:spPr>
+        <p:txBody>
+          <a:bodyPr vert="horz" lIns="91440" tIns="45720" rIns="91440" bIns="45720" rtlCol="0"/>
+          <a:lstStyle>
+            <a:lvl1pPr algn="l">
+              <a:defRPr sz="1200"/>
+            </a:lvl1pPr>
+          </a:lstStyle>
+          <a:p>
+            <a:endParaRPr lang="en-US"/>
+          </a:p>
+        </p:txBody>
+      </p:sp>
+      <p:sp>
+        <p:nvSpPr>
+          <p:cNvPr id="3" name="Date Placeholder 2"/>
+          <p:cNvSpPr>
+            <a:spLocks noGrp="1"/>
+          </p:cNvSpPr>
+          <p:nvPr>
+            <p:ph type="dt" idx="1"/>
+          </p:nvPr>
+        </p:nvSpPr>
+        <p:spPr>
+          <a:xfrm>
+            <a:off x="3884613" y="0"/>
+            <a:ext cx="2971800" cy="458788"/>
+          </a:xfrm>
+          <a:prstGeom prst="rect">
+            <a:avLst/>
+          </a:prstGeom>
+        </p:spPr>
+        <p:txBody>
+          <a:bodyPr vert="horz" lIns="91440" tIns="45720" rIns="91440" bIns="45720" rtlCol="0"/>
+          <a:lstStyle>
+            <a:lvl1pPr algn="r">
+              <a:defRPr sz="1200"/>
+            </a:lvl1pPr>
+          </a:lstStyle>
+          <a:p>
+            <a:fld id="{523F1AA3-C030-4792-80AA-E2866697A738}" type="datetimeFigureOut">
+              <a:rPr lang="en-US" smtClean="0"/>
+              <a:t>4/15/2025</a:t>
+            </a:fld>
+            <a:endParaRPr lang="en-US"/>
+          </a:p>
+        </p:txBody>
+      </p:sp>
+      <p:sp>
+        <p:nvSpPr>
+          <p:cNvPr id="4" name="Slide Image Placeholder 3"/>
+          <p:cNvSpPr>
+            <a:spLocks noGrp="1" noRot="1" noChangeAspect="1"/>
+          </p:cNvSpPr>
+          <p:nvPr>
+            <p:ph type="sldImg" idx="2"/>
+          </p:nvPr>
+        </p:nvSpPr>
+        <p:spPr>
+          <a:xfrm>
+            <a:off x="1371600" y="1143000"/>
+            <a:ext cx="4114800" cy="3086100"/>
+          </a:xfrm>
+          <a:prstGeom prst="rect">
+            <a:avLst/>
+          </a:prstGeom>
+          <a:noFill/>
+          <a:ln w="12700">
+            <a:solidFill>
+              <a:prstClr val="black"/>
+            </a:solidFill>
+          </a:ln>
+        </p:spPr>
+        <p:txBody>
+          <a:bodyPr vert="horz" lIns="91440" tIns="45720" rIns="91440" bIns="45720" rtlCol="0" anchor="ctr"/>
+          <a:lstStyle/>
+          <a:p>
+            <a:endParaRPr lang="en-US"/>
+          </a:p>
+        </p:txBody>
+      </p:sp>
+      <p:sp>
+        <p:nvSpPr>
+          <p:cNvPr id="5" name="Notes Placeholder 4"/>
+          <p:cNvSpPr>
+            <a:spLocks noGrp="1"/>
+          </p:cNvSpPr>
+          <p:nvPr>
+            <p:ph type="body" sz="quarter" idx="3"/>
+          </p:nvPr>
+        </p:nvSpPr>
+        <p:spPr>
+          <a:xfrm>
+            <a:off x="685800" y="4400550"/>
+            <a:ext cx="5486400" cy="3600450"/>
+          </a:xfrm>
+          <a:prstGeom prst="rect">
+            <a:avLst/>
+          </a:prstGeom>
+        </p:spPr>
+        <p:txBody>
+          <a:bodyPr vert="horz" lIns="91440" tIns="45720" rIns="91440" bIns="45720" rtlCol="0"/>
+          <a:lstStyle/>
+          <a:p>
+            <a:pPr lvl="0"/>
+            <a:r>
+              <a:rPr lang="en-US" smtClean="0"/>
+              <a:t>Click to edit Master text styles</a:t>
+            </a:r>
+          </a:p>
+          <a:p>
+            <a:pPr lvl="1"/>
+            <a:r>
+              <a:rPr lang="en-US" smtClean="0"/>
+              <a:t>Second level</a:t>
+            </a:r>
+          </a:p>
+          <a:p>
+            <a:pPr lvl="2"/>
+            <a:r>
+              <a:rPr lang="en-US" smtClean="0"/>
+              <a:t>Third level</a:t>
+            </a:r>
+          </a:p>
+          <a:p>
+            <a:pPr lvl="3"/>
+            <a:r>
+              <a:rPr lang="en-US" smtClean="0"/>
+              <a:t>Fourth level</a:t>
+            </a:r>
+          </a:p>
+          <a:p>
+            <a:pPr lvl="4"/>
+            <a:r>
+              <a:rPr lang="en-US" smtClean="0"/>
+              <a:t>Fifth level</a:t>
+            </a:r>
+            <a:endParaRPr lang="en-US"/>
+          </a:p>
+        </p:txBody>
+      </p:sp>
+      <p:sp>
+        <p:nvSpPr>
+          <p:cNvPr id="6" name="Footer Placeholder 5"/>
+          <p:cNvSpPr>
+            <a:spLocks noGrp="1"/>
+          </p:cNvSpPr>
+          <p:nvPr>
+            <p:ph type="ftr" sz="quarter" idx="4"/>
+          </p:nvPr>
+        </p:nvSpPr>
+        <p:spPr>
+          <a:xfrm>
+            <a:off x="0" y="8685213"/>
+            <a:ext cx="2971800" cy="458787"/>
+          </a:xfrm>
+          <a:prstGeom prst="rect">
+            <a:avLst/>
+          </a:prstGeom>
+        </p:spPr>
+        <p:txBody>
+          <a:bodyPr vert="horz" lIns="91440" tIns="45720" rIns="91440" bIns="45720" rtlCol="0" anchor="b"/>
+          <a:lstStyle>
+            <a:lvl1pPr algn="l">
+              <a:defRPr sz="1200"/>
+            </a:lvl1pPr>
+          </a:lstStyle>
+          <a:p>
+            <a:endParaRPr lang="en-US"/>
+          </a:p>
+        </p:txBody>
+      </p:sp>
+      <p:sp>
+        <p:nvSpPr>
+          <p:cNvPr id="7" name="Slide Number Placeholder 6"/>
+          <p:cNvSpPr>
+            <a:spLocks noGrp="1"/>
+          </p:cNvSpPr>
+          <p:nvPr>
+            <p:ph type="sldNum" sz="quarter" idx="5"/>
+          </p:nvPr>
+        </p:nvSpPr>
+        <p:spPr>
+          <a:xfrm>
+            <a:off x="3884613" y="8685213"/>
+            <a:ext cx="2971800" cy="458787"/>
+          </a:xfrm>
+          <a:prstGeom prst="rect">
+            <a:avLst/>
+          </a:prstGeom>
+        </p:spPr>
+        <p:txBody>
+          <a:bodyPr vert="horz" lIns="91440" tIns="45720" rIns="91440" bIns="45720" rtlCol="0" anchor="b"/>
+          <a:lstStyle>
+            <a:lvl1pPr algn="r">
+              <a:defRPr sz="1200"/>
+            </a:lvl1pPr>
+          </a:lstStyle>
+          <a:p>
+            <a:fld id="{825A8758-86F8-4A31-AD42-BD270808CD0B}" type="slidenum">
+              <a:rPr lang="en-US" smtClean="0"/>
+              <a:t>‹#›</a:t>
+            </a:fld>
+            <a:endParaRPr lang="en-US"/>
+          </a:p>
+        </p:txBody>
+      </p:sp>
+    </p:spTree>
+    <p:extLst>
+      <p:ext uri="{BB962C8B-B14F-4D97-AF65-F5344CB8AC3E}">
+        <p14:creationId xmlns:p14="http://schemas.microsoft.com/office/powerpoint/2010/main" val="3429755411"/>
+      </p:ext>
+    </p:extLst>
+  </p:cSld>
+  <p:clrMap bg1="lt1" tx1="dk1" bg2="lt2" tx2="dk2" accent1="accent1" accent2="accent2" accent3="accent3" accent4="accent4" accent5="accent5" accent6="accent6" hlink="hlink" folHlink="folHlink"/>
+  <p:hf hdr="0" ftr="0" dt="0"/>
+  <p:notesStyle>
+    <a:lvl1pPr marL="0" algn="l" defTabSz="914400" rtl="0" eaLnBrk="1" latinLnBrk="0" hangingPunct="1">
+      <a:defRPr sz="1200" kern="1200">
+        <a:solidFill>
+          <a:schemeClr val="tx1"/>
+        </a:solidFill>
+        <a:latin typeface="+mn-lt"/>
+        <a:ea typeface="+mn-ea"/>
+        <a:cs typeface="+mn-cs"/>
+      </a:defRPr>
+    </a:lvl1pPr>
+    <a:lvl2pPr marL="457200" algn="l" defTabSz="914400" rtl="0" eaLnBrk="1" latinLnBrk="0" hangingPunct="1">
+      <a:defRPr sz="1200" kern="1200">
+        <a:solidFill>
+          <a:schemeClr val="tx1"/>
+        </a:solidFill>
+        <a:latin typeface="+mn-lt"/>
+        <a:ea typeface="+mn-ea"/>
+        <a:cs typeface="+mn-cs"/>
+      </a:defRPr>
+    </a:lvl2pPr>
+    <a:lvl3pPr marL="914400" algn="l" defTabSz="914400" rtl="0" eaLnBrk="1" latinLnBrk="0" hangingPunct="1">
+      <a:defRPr sz="1200" kern="1200">
+        <a:solidFill>
+          <a:schemeClr val="tx1"/>
+        </a:solidFill>
+        <a:latin typeface="+mn-lt"/>
+        <a:ea typeface="+mn-ea"/>
+        <a:cs typeface="+mn-cs"/>
+      </a:defRPr>
+    </a:lvl3pPr>
+    <a:lvl4pPr marL="1371600" algn="l" defTabSz="914400" rtl="0" eaLnBrk="1" latinLnBrk="0" hangingPunct="1">
+      <a:defRPr sz="1200" kern="1200">
+        <a:solidFill>
+          <a:schemeClr val="tx1"/>
+        </a:solidFill>
+        <a:latin typeface="+mn-lt"/>
+        <a:ea typeface="+mn-ea"/>
+        <a:cs typeface="+mn-cs"/>
+      </a:defRPr>
+    </a:lvl4pPr>
+    <a:lvl5pPr marL="1828800" algn="l" defTabSz="914400" rtl="0" eaLnBrk="1" latinLnBrk="0" hangingPunct="1">
+      <a:defRPr sz="1200" kern="1200">
+        <a:solidFill>
+          <a:schemeClr val="tx1"/>
+        </a:solidFill>
+        <a:latin typeface="+mn-lt"/>
+        <a:ea typeface="+mn-ea"/>
+        <a:cs typeface="+mn-cs"/>
+      </a:defRPr>
+    </a:lvl5pPr>
+    <a:lvl6pPr marL="2286000" algn="l" defTabSz="914400" rtl="0" eaLnBrk="1" latinLnBrk="0" hangingPunct="1">
+      <a:defRPr sz="1200" kern="1200">
+        <a:solidFill>
+          <a:schemeClr val="tx1"/>
+        </a:solidFill>
+        <a:latin typeface="+mn-lt"/>
+        <a:ea typeface="+mn-ea"/>
+        <a:cs typeface="+mn-cs"/>
+      </a:defRPr>
+    </a:lvl6pPr>
+    <a:lvl7pPr marL="2743200" algn="l" defTabSz="914400" rtl="0" eaLnBrk="1" latinLnBrk="0" hangingPunct="1">
+      <a:defRPr sz="1200" kern="1200">
+        <a:solidFill>
+          <a:schemeClr val="tx1"/>
+        </a:solidFill>
+        <a:latin typeface="+mn-lt"/>
+        <a:ea typeface="+mn-ea"/>
+        <a:cs typeface="+mn-cs"/>
+      </a:defRPr>
+    </a:lvl7pPr>
+    <a:lvl8pPr marL="3200400" algn="l" defTabSz="914400" rtl="0" eaLnBrk="1" latinLnBrk="0" hangingPunct="1">
+      <a:defRPr sz="1200" kern="1200">
+        <a:solidFill>
+          <a:schemeClr val="tx1"/>
+        </a:solidFill>
+        <a:latin typeface="+mn-lt"/>
+        <a:ea typeface="+mn-ea"/>
+        <a:cs typeface="+mn-cs"/>
+      </a:defRPr>
+    </a:lvl8pPr>
+    <a:lvl9pPr marL="3657600" algn="l" defTabSz="914400" rtl="0" eaLnBrk="1" latinLnBrk="0" hangingPunct="1">
+      <a:defRPr sz="1200" kern="1200">
+        <a:solidFill>
+          <a:schemeClr val="tx1"/>
+        </a:solidFill>
+        <a:latin typeface="+mn-lt"/>
+        <a:ea typeface="+mn-ea"/>
+        <a:cs typeface="+mn-cs"/>
+      </a:defRPr>
+    </a:lvl9pPr>
+  </p:notesStyle>
+</p:notesMaster>
+</file>
+
+<file path=ppt/notesSlides/notesSlide1.xml><?xml version="1.0" encoding="utf-8"?>
+<p:notes xmlns:a="http://schemas.openxmlformats.org/drawingml/2006/main" xmlns:r="http://schemas.openxmlformats.org/officeDocument/2006/relationships" xmlns:p="http://schemas.openxmlformats.org/presentationml/2006/main">
+  <p:cSld>
+    <p:spTree>
+      <p:nvGrpSpPr>
+        <p:cNvPr id="1" name=""/>
+        <p:cNvGrpSpPr/>
+        <p:nvPr/>
+      </p:nvGrpSpPr>
+      <p:grpSpPr>
+        <a:xfrm>
+          <a:off x="0" y="0"/>
+          <a:ext cx="0" cy="0"/>
+          <a:chOff x="0" y="0"/>
+          <a:chExt cx="0" cy="0"/>
+        </a:xfrm>
+      </p:grpSpPr>
+      <p:sp>
+        <p:nvSpPr>
+          <p:cNvPr id="2" name="Slide Image Placeholder 1"/>
+          <p:cNvSpPr>
+            <a:spLocks noGrp="1" noRot="1" noChangeAspect="1"/>
+          </p:cNvSpPr>
+          <p:nvPr>
+            <p:ph type="sldImg"/>
+          </p:nvPr>
+        </p:nvSpPr>
+        <p:spPr/>
+      </p:sp>
+      <p:sp>
+        <p:nvSpPr>
+          <p:cNvPr id="3" name="Notes Placeholder 2"/>
+          <p:cNvSpPr>
+            <a:spLocks noGrp="1"/>
+          </p:cNvSpPr>
+          <p:nvPr>
+            <p:ph type="body" idx="1"/>
+          </p:nvPr>
+        </p:nvSpPr>
+        <p:spPr/>
+        <p:txBody>
+          <a:bodyPr/>
+          <a:lstStyle/>
+          <a:p>
+            <a:endParaRPr lang="en-US"/>
+          </a:p>
+        </p:txBody>
+      </p:sp>
+      <p:sp>
+        <p:nvSpPr>
+          <p:cNvPr id="4" name="Slide Number Placeholder 3"/>
+          <p:cNvSpPr>
+            <a:spLocks noGrp="1"/>
+          </p:cNvSpPr>
+          <p:nvPr>
+            <p:ph type="sldNum" sz="quarter" idx="10"/>
+          </p:nvPr>
+        </p:nvSpPr>
+        <p:spPr/>
+        <p:txBody>
+          <a:bodyPr/>
+          <a:lstStyle/>
+          <a:p>
+            <a:fld id="{825A8758-86F8-4A31-AD42-BD270808CD0B}" type="slidenum">
+              <a:rPr lang="en-US" smtClean="0"/>
+              <a:t>1</a:t>
+            </a:fld>
+            <a:endParaRPr lang="en-US"/>
+          </a:p>
+        </p:txBody>
+      </p:sp>
+    </p:spTree>
+    <p:extLst>
+      <p:ext uri="{BB962C8B-B14F-4D97-AF65-F5344CB8AC3E}">
+        <p14:creationId xmlns:p14="http://schemas.microsoft.com/office/powerpoint/2010/main" val="895567887"/>
+      </p:ext>
+    </p:extLst>
+  </p:cSld>
+  <p:clrMapOvr>
+    <a:masterClrMapping/>
+  </p:clrMapOvr>
+</p:notes>
+</file>
+
+<file path=ppt/notesSlides/notesSlide10.xml><?xml version="1.0" encoding="utf-8"?>
+<p:notes xmlns:a="http://schemas.openxmlformats.org/drawingml/2006/main" xmlns:r="http://schemas.openxmlformats.org/officeDocument/2006/relationships" xmlns:p="http://schemas.openxmlformats.org/presentationml/2006/main">
+  <p:cSld>
+    <p:spTree>
+      <p:nvGrpSpPr>
+        <p:cNvPr id="1" name=""/>
+        <p:cNvGrpSpPr/>
+        <p:nvPr/>
+      </p:nvGrpSpPr>
+      <p:grpSpPr>
+        <a:xfrm>
+          <a:off x="0" y="0"/>
+          <a:ext cx="0" cy="0"/>
+          <a:chOff x="0" y="0"/>
+          <a:chExt cx="0" cy="0"/>
+        </a:xfrm>
+      </p:grpSpPr>
+      <p:sp>
+        <p:nvSpPr>
+          <p:cNvPr id="2" name="Slide Image Placeholder 1"/>
+          <p:cNvSpPr>
+            <a:spLocks noGrp="1" noRot="1" noChangeAspect="1"/>
+          </p:cNvSpPr>
+          <p:nvPr>
+            <p:ph type="sldImg"/>
+          </p:nvPr>
+        </p:nvSpPr>
+        <p:spPr/>
+      </p:sp>
+      <p:sp>
+        <p:nvSpPr>
+          <p:cNvPr id="3" name="Notes Placeholder 2"/>
+          <p:cNvSpPr>
+            <a:spLocks noGrp="1"/>
+          </p:cNvSpPr>
+          <p:nvPr>
+            <p:ph type="body" idx="1"/>
+          </p:nvPr>
+        </p:nvSpPr>
+        <p:spPr/>
+        <p:txBody>
+          <a:bodyPr/>
+          <a:lstStyle/>
+          <a:p>
+            <a:endParaRPr lang="en-US"/>
+          </a:p>
+        </p:txBody>
+      </p:sp>
+      <p:sp>
+        <p:nvSpPr>
+          <p:cNvPr id="4" name="Slide Number Placeholder 3"/>
+          <p:cNvSpPr>
+            <a:spLocks noGrp="1"/>
+          </p:cNvSpPr>
+          <p:nvPr>
+            <p:ph type="sldNum" sz="quarter" idx="10"/>
+          </p:nvPr>
+        </p:nvSpPr>
+        <p:spPr/>
+        <p:txBody>
+          <a:bodyPr/>
+          <a:lstStyle/>
+          <a:p>
+            <a:fld id="{825A8758-86F8-4A31-AD42-BD270808CD0B}" type="slidenum">
+              <a:rPr lang="en-US" smtClean="0"/>
+              <a:t>10</a:t>
+            </a:fld>
+            <a:endParaRPr lang="en-US"/>
+          </a:p>
+        </p:txBody>
+      </p:sp>
+    </p:spTree>
+    <p:extLst>
+      <p:ext uri="{BB962C8B-B14F-4D97-AF65-F5344CB8AC3E}">
+        <p14:creationId xmlns:p14="http://schemas.microsoft.com/office/powerpoint/2010/main" val="356096755"/>
+      </p:ext>
+    </p:extLst>
+  </p:cSld>
+  <p:clrMapOvr>
+    <a:masterClrMapping/>
+  </p:clrMapOvr>
+</p:notes>
+</file>
+
+<file path=ppt/notesSlides/notesSlide11.xml><?xml version="1.0" encoding="utf-8"?>
+<p:notes xmlns:a="http://schemas.openxmlformats.org/drawingml/2006/main" xmlns:r="http://schemas.openxmlformats.org/officeDocument/2006/relationships" xmlns:p="http://schemas.openxmlformats.org/presentationml/2006/main">
+  <p:cSld>
+    <p:spTree>
+      <p:nvGrpSpPr>
+        <p:cNvPr id="1" name=""/>
+        <p:cNvGrpSpPr/>
+        <p:nvPr/>
+      </p:nvGrpSpPr>
+      <p:grpSpPr>
+        <a:xfrm>
+          <a:off x="0" y="0"/>
+          <a:ext cx="0" cy="0"/>
+          <a:chOff x="0" y="0"/>
+          <a:chExt cx="0" cy="0"/>
+        </a:xfrm>
+      </p:grpSpPr>
+      <p:sp>
+        <p:nvSpPr>
+          <p:cNvPr id="2" name="Slide Image Placeholder 1"/>
+          <p:cNvSpPr>
+            <a:spLocks noGrp="1" noRot="1" noChangeAspect="1"/>
+          </p:cNvSpPr>
+          <p:nvPr>
+            <p:ph type="sldImg"/>
+          </p:nvPr>
+        </p:nvSpPr>
+        <p:spPr/>
+      </p:sp>
+      <p:sp>
+        <p:nvSpPr>
+          <p:cNvPr id="3" name="Notes Placeholder 2"/>
+          <p:cNvSpPr>
+            <a:spLocks noGrp="1"/>
+          </p:cNvSpPr>
+          <p:nvPr>
+            <p:ph type="body" idx="1"/>
+          </p:nvPr>
+        </p:nvSpPr>
+        <p:spPr/>
+        <p:txBody>
+          <a:bodyPr/>
+          <a:lstStyle/>
+          <a:p>
+            <a:endParaRPr lang="en-US"/>
+          </a:p>
+        </p:txBody>
+      </p:sp>
+      <p:sp>
+        <p:nvSpPr>
+          <p:cNvPr id="4" name="Slide Number Placeholder 3"/>
+          <p:cNvSpPr>
+            <a:spLocks noGrp="1"/>
+          </p:cNvSpPr>
+          <p:nvPr>
+            <p:ph type="sldNum" sz="quarter" idx="10"/>
+          </p:nvPr>
+        </p:nvSpPr>
+        <p:spPr/>
+        <p:txBody>
+          <a:bodyPr/>
+          <a:lstStyle/>
+          <a:p>
+            <a:fld id="{825A8758-86F8-4A31-AD42-BD270808CD0B}" type="slidenum">
+              <a:rPr lang="en-US" smtClean="0"/>
+              <a:t>11</a:t>
+            </a:fld>
+            <a:endParaRPr lang="en-US"/>
+          </a:p>
+        </p:txBody>
+      </p:sp>
+    </p:spTree>
+    <p:extLst>
+      <p:ext uri="{BB962C8B-B14F-4D97-AF65-F5344CB8AC3E}">
+        <p14:creationId xmlns:p14="http://schemas.microsoft.com/office/powerpoint/2010/main" val="2538341230"/>
+      </p:ext>
+    </p:extLst>
+  </p:cSld>
+  <p:clrMapOvr>
+    <a:masterClrMapping/>
+  </p:clrMapOvr>
+</p:notes>
+</file>
+
+<file path=ppt/notesSlides/notesSlide2.xml><?xml version="1.0" encoding="utf-8"?>
+<p:notes xmlns:a="http://schemas.openxmlformats.org/drawingml/2006/main" xmlns:r="http://schemas.openxmlformats.org/officeDocument/2006/relationships" xmlns:p="http://schemas.openxmlformats.org/presentationml/2006/main">
+  <p:cSld>
+    <p:spTree>
+      <p:nvGrpSpPr>
+        <p:cNvPr id="1" name=""/>
+        <p:cNvGrpSpPr/>
+        <p:nvPr/>
+      </p:nvGrpSpPr>
+      <p:grpSpPr>
+        <a:xfrm>
+          <a:off x="0" y="0"/>
+          <a:ext cx="0" cy="0"/>
+          <a:chOff x="0" y="0"/>
+          <a:chExt cx="0" cy="0"/>
+        </a:xfrm>
+      </p:grpSpPr>
+      <p:sp>
+        <p:nvSpPr>
+          <p:cNvPr id="2" name="Slide Image Placeholder 1"/>
+          <p:cNvSpPr>
+            <a:spLocks noGrp="1" noRot="1" noChangeAspect="1"/>
+          </p:cNvSpPr>
+          <p:nvPr>
+            <p:ph type="sldImg"/>
+          </p:nvPr>
+        </p:nvSpPr>
+        <p:spPr/>
+      </p:sp>
+      <p:sp>
+        <p:nvSpPr>
+          <p:cNvPr id="3" name="Notes Placeholder 2"/>
+          <p:cNvSpPr>
+            <a:spLocks noGrp="1"/>
+          </p:cNvSpPr>
+          <p:nvPr>
+            <p:ph type="body" idx="1"/>
+          </p:nvPr>
+        </p:nvSpPr>
+        <p:spPr/>
+        <p:txBody>
+          <a:bodyPr/>
+          <a:lstStyle/>
+          <a:p>
+            <a:endParaRPr lang="en-US"/>
+          </a:p>
+        </p:txBody>
+      </p:sp>
+      <p:sp>
+        <p:nvSpPr>
+          <p:cNvPr id="4" name="Slide Number Placeholder 3"/>
+          <p:cNvSpPr>
+            <a:spLocks noGrp="1"/>
+          </p:cNvSpPr>
+          <p:nvPr>
+            <p:ph type="sldNum" sz="quarter" idx="10"/>
+          </p:nvPr>
+        </p:nvSpPr>
+        <p:spPr/>
+        <p:txBody>
+          <a:bodyPr/>
+          <a:lstStyle/>
+          <a:p>
+            <a:fld id="{825A8758-86F8-4A31-AD42-BD270808CD0B}" type="slidenum">
+              <a:rPr lang="en-US" smtClean="0"/>
+              <a:t>2</a:t>
+            </a:fld>
+            <a:endParaRPr lang="en-US"/>
+          </a:p>
+        </p:txBody>
+      </p:sp>
+    </p:spTree>
+    <p:extLst>
+      <p:ext uri="{BB962C8B-B14F-4D97-AF65-F5344CB8AC3E}">
+        <p14:creationId xmlns:p14="http://schemas.microsoft.com/office/powerpoint/2010/main" val="1227018257"/>
+      </p:ext>
+    </p:extLst>
+  </p:cSld>
+  <p:clrMapOvr>
+    <a:masterClrMapping/>
+  </p:clrMapOvr>
+</p:notes>
+</file>
+
+<file path=ppt/notesSlides/notesSlide3.xml><?xml version="1.0" encoding="utf-8"?>
+<p:notes xmlns:a="http://schemas.openxmlformats.org/drawingml/2006/main" xmlns:r="http://schemas.openxmlformats.org/officeDocument/2006/relationships" xmlns:p="http://schemas.openxmlformats.org/presentationml/2006/main">
+  <p:cSld>
+    <p:spTree>
+      <p:nvGrpSpPr>
+        <p:cNvPr id="1" name=""/>
+        <p:cNvGrpSpPr/>
+        <p:nvPr/>
+      </p:nvGrpSpPr>
+      <p:grpSpPr>
+        <a:xfrm>
+          <a:off x="0" y="0"/>
+          <a:ext cx="0" cy="0"/>
+          <a:chOff x="0" y="0"/>
+          <a:chExt cx="0" cy="0"/>
+        </a:xfrm>
+      </p:grpSpPr>
+      <p:sp>
+        <p:nvSpPr>
+          <p:cNvPr id="2" name="Slide Image Placeholder 1"/>
+          <p:cNvSpPr>
+            <a:spLocks noGrp="1" noRot="1" noChangeAspect="1"/>
+          </p:cNvSpPr>
+          <p:nvPr>
+            <p:ph type="sldImg"/>
+          </p:nvPr>
+        </p:nvSpPr>
+        <p:spPr/>
+      </p:sp>
+      <p:sp>
+        <p:nvSpPr>
+          <p:cNvPr id="3" name="Notes Placeholder 2"/>
+          <p:cNvSpPr>
+            <a:spLocks noGrp="1"/>
+          </p:cNvSpPr>
+          <p:nvPr>
+            <p:ph type="body" idx="1"/>
+          </p:nvPr>
+        </p:nvSpPr>
+        <p:spPr/>
+        <p:txBody>
+          <a:bodyPr/>
+          <a:lstStyle/>
+          <a:p>
+            <a:endParaRPr lang="en-US"/>
+          </a:p>
+        </p:txBody>
+      </p:sp>
+      <p:sp>
+        <p:nvSpPr>
+          <p:cNvPr id="4" name="Slide Number Placeholder 3"/>
+          <p:cNvSpPr>
+            <a:spLocks noGrp="1"/>
+          </p:cNvSpPr>
+          <p:nvPr>
+            <p:ph type="sldNum" sz="quarter" idx="10"/>
+          </p:nvPr>
+        </p:nvSpPr>
+        <p:spPr/>
+        <p:txBody>
+          <a:bodyPr/>
+          <a:lstStyle/>
+          <a:p>
+            <a:fld id="{825A8758-86F8-4A31-AD42-BD270808CD0B}" type="slidenum">
+              <a:rPr lang="en-US" smtClean="0"/>
+              <a:t>3</a:t>
+            </a:fld>
+            <a:endParaRPr lang="en-US"/>
+          </a:p>
+        </p:txBody>
+      </p:sp>
+    </p:spTree>
+    <p:extLst>
+      <p:ext uri="{BB962C8B-B14F-4D97-AF65-F5344CB8AC3E}">
+        <p14:creationId xmlns:p14="http://schemas.microsoft.com/office/powerpoint/2010/main" val="3505562075"/>
+      </p:ext>
+    </p:extLst>
+  </p:cSld>
+  <p:clrMapOvr>
+    <a:masterClrMapping/>
+  </p:clrMapOvr>
+</p:notes>
+</file>
+
+<file path=ppt/notesSlides/notesSlide4.xml><?xml version="1.0" encoding="utf-8"?>
+<p:notes xmlns:a="http://schemas.openxmlformats.org/drawingml/2006/main" xmlns:r="http://schemas.openxmlformats.org/officeDocument/2006/relationships" xmlns:p="http://schemas.openxmlformats.org/presentationml/2006/main">
+  <p:cSld>
+    <p:spTree>
+      <p:nvGrpSpPr>
+        <p:cNvPr id="1" name=""/>
+        <p:cNvGrpSpPr/>
+        <p:nvPr/>
+      </p:nvGrpSpPr>
+      <p:grpSpPr>
+        <a:xfrm>
+          <a:off x="0" y="0"/>
+          <a:ext cx="0" cy="0"/>
+          <a:chOff x="0" y="0"/>
+          <a:chExt cx="0" cy="0"/>
+        </a:xfrm>
+      </p:grpSpPr>
+      <p:sp>
+        <p:nvSpPr>
+          <p:cNvPr id="2" name="Slide Image Placeholder 1"/>
+          <p:cNvSpPr>
+            <a:spLocks noGrp="1" noRot="1" noChangeAspect="1"/>
+          </p:cNvSpPr>
+          <p:nvPr>
+            <p:ph type="sldImg"/>
+          </p:nvPr>
+        </p:nvSpPr>
+        <p:spPr/>
+      </p:sp>
+      <p:sp>
+        <p:nvSpPr>
+          <p:cNvPr id="3" name="Notes Placeholder 2"/>
+          <p:cNvSpPr>
+            <a:spLocks noGrp="1"/>
+          </p:cNvSpPr>
+          <p:nvPr>
+            <p:ph type="body" idx="1"/>
+          </p:nvPr>
+        </p:nvSpPr>
+        <p:spPr/>
+        <p:txBody>
+          <a:bodyPr/>
+          <a:lstStyle/>
+          <a:p>
+            <a:endParaRPr lang="en-US"/>
+          </a:p>
+        </p:txBody>
+      </p:sp>
+      <p:sp>
+        <p:nvSpPr>
+          <p:cNvPr id="4" name="Slide Number Placeholder 3"/>
+          <p:cNvSpPr>
+            <a:spLocks noGrp="1"/>
+          </p:cNvSpPr>
+          <p:nvPr>
+            <p:ph type="sldNum" sz="quarter" idx="10"/>
+          </p:nvPr>
+        </p:nvSpPr>
+        <p:spPr/>
+        <p:txBody>
+          <a:bodyPr/>
+          <a:lstStyle/>
+          <a:p>
+            <a:fld id="{825A8758-86F8-4A31-AD42-BD270808CD0B}" type="slidenum">
+              <a:rPr lang="en-US" smtClean="0"/>
+              <a:t>4</a:t>
+            </a:fld>
+            <a:endParaRPr lang="en-US"/>
+          </a:p>
+        </p:txBody>
+      </p:sp>
+    </p:spTree>
+    <p:extLst>
+      <p:ext uri="{BB962C8B-B14F-4D97-AF65-F5344CB8AC3E}">
+        <p14:creationId xmlns:p14="http://schemas.microsoft.com/office/powerpoint/2010/main" val="1530777725"/>
+      </p:ext>
+    </p:extLst>
+  </p:cSld>
+  <p:clrMapOvr>
+    <a:masterClrMapping/>
+  </p:clrMapOvr>
+</p:notes>
+</file>
+
+<file path=ppt/notesSlides/notesSlide5.xml><?xml version="1.0" encoding="utf-8"?>
+<p:notes xmlns:a="http://schemas.openxmlformats.org/drawingml/2006/main" xmlns:r="http://schemas.openxmlformats.org/officeDocument/2006/relationships" xmlns:p="http://schemas.openxmlformats.org/presentationml/2006/main">
+  <p:cSld>
+    <p:spTree>
+      <p:nvGrpSpPr>
+        <p:cNvPr id="1" name=""/>
+        <p:cNvGrpSpPr/>
+        <p:nvPr/>
+      </p:nvGrpSpPr>
+      <p:grpSpPr>
+        <a:xfrm>
+          <a:off x="0" y="0"/>
+          <a:ext cx="0" cy="0"/>
+          <a:chOff x="0" y="0"/>
+          <a:chExt cx="0" cy="0"/>
+        </a:xfrm>
+      </p:grpSpPr>
+      <p:sp>
+        <p:nvSpPr>
+          <p:cNvPr id="2" name="Slide Image Placeholder 1"/>
+          <p:cNvSpPr>
+            <a:spLocks noGrp="1" noRot="1" noChangeAspect="1"/>
+          </p:cNvSpPr>
+          <p:nvPr>
+            <p:ph type="sldImg"/>
+          </p:nvPr>
+        </p:nvSpPr>
+        <p:spPr/>
+      </p:sp>
+      <p:sp>
+        <p:nvSpPr>
+          <p:cNvPr id="3" name="Notes Placeholder 2"/>
+          <p:cNvSpPr>
+            <a:spLocks noGrp="1"/>
+          </p:cNvSpPr>
+          <p:nvPr>
+            <p:ph type="body" idx="1"/>
+          </p:nvPr>
+        </p:nvSpPr>
+        <p:spPr/>
+        <p:txBody>
+          <a:bodyPr/>
+          <a:lstStyle/>
+          <a:p>
+            <a:endParaRPr lang="en-US"/>
+          </a:p>
+        </p:txBody>
+      </p:sp>
+      <p:sp>
+        <p:nvSpPr>
+          <p:cNvPr id="4" name="Slide Number Placeholder 3"/>
+          <p:cNvSpPr>
+            <a:spLocks noGrp="1"/>
+          </p:cNvSpPr>
+          <p:nvPr>
+            <p:ph type="sldNum" sz="quarter" idx="10"/>
+          </p:nvPr>
+        </p:nvSpPr>
+        <p:spPr/>
+        <p:txBody>
+          <a:bodyPr/>
+          <a:lstStyle/>
+          <a:p>
+            <a:fld id="{825A8758-86F8-4A31-AD42-BD270808CD0B}" type="slidenum">
+              <a:rPr lang="en-US" smtClean="0"/>
+              <a:t>5</a:t>
+            </a:fld>
+            <a:endParaRPr lang="en-US"/>
+          </a:p>
+        </p:txBody>
+      </p:sp>
+    </p:spTree>
+    <p:extLst>
+      <p:ext uri="{BB962C8B-B14F-4D97-AF65-F5344CB8AC3E}">
+        <p14:creationId xmlns:p14="http://schemas.microsoft.com/office/powerpoint/2010/main" val="1644170154"/>
+      </p:ext>
+    </p:extLst>
+  </p:cSld>
+  <p:clrMapOvr>
+    <a:masterClrMapping/>
+  </p:clrMapOvr>
+</p:notes>
+</file>
+
+<file path=ppt/notesSlides/notesSlide6.xml><?xml version="1.0" encoding="utf-8"?>
+<p:notes xmlns:a="http://schemas.openxmlformats.org/drawingml/2006/main" xmlns:r="http://schemas.openxmlformats.org/officeDocument/2006/relationships" xmlns:p="http://schemas.openxmlformats.org/presentationml/2006/main">
+  <p:cSld>
+    <p:spTree>
+      <p:nvGrpSpPr>
+        <p:cNvPr id="1" name=""/>
+        <p:cNvGrpSpPr/>
+        <p:nvPr/>
+      </p:nvGrpSpPr>
+      <p:grpSpPr>
+        <a:xfrm>
+          <a:off x="0" y="0"/>
+          <a:ext cx="0" cy="0"/>
+          <a:chOff x="0" y="0"/>
+          <a:chExt cx="0" cy="0"/>
+        </a:xfrm>
+      </p:grpSpPr>
+      <p:sp>
+        <p:nvSpPr>
+          <p:cNvPr id="2" name="Slide Image Placeholder 1"/>
+          <p:cNvSpPr>
+            <a:spLocks noGrp="1" noRot="1" noChangeAspect="1"/>
+          </p:cNvSpPr>
+          <p:nvPr>
+            <p:ph type="sldImg"/>
+          </p:nvPr>
+        </p:nvSpPr>
+        <p:spPr/>
+      </p:sp>
+      <p:sp>
+        <p:nvSpPr>
+          <p:cNvPr id="3" name="Notes Placeholder 2"/>
+          <p:cNvSpPr>
+            <a:spLocks noGrp="1"/>
+          </p:cNvSpPr>
+          <p:nvPr>
+            <p:ph type="body" idx="1"/>
+          </p:nvPr>
+        </p:nvSpPr>
+        <p:spPr/>
+        <p:txBody>
+          <a:bodyPr/>
+          <a:lstStyle/>
+          <a:p>
+            <a:endParaRPr lang="en-US"/>
+          </a:p>
+        </p:txBody>
+      </p:sp>
+      <p:sp>
+        <p:nvSpPr>
+          <p:cNvPr id="4" name="Slide Number Placeholder 3"/>
+          <p:cNvSpPr>
+            <a:spLocks noGrp="1"/>
+          </p:cNvSpPr>
+          <p:nvPr>
+            <p:ph type="sldNum" sz="quarter" idx="10"/>
+          </p:nvPr>
+        </p:nvSpPr>
+        <p:spPr/>
+        <p:txBody>
+          <a:bodyPr/>
+          <a:lstStyle/>
+          <a:p>
+            <a:fld id="{825A8758-86F8-4A31-AD42-BD270808CD0B}" type="slidenum">
+              <a:rPr lang="en-US" smtClean="0"/>
+              <a:t>6</a:t>
+            </a:fld>
+            <a:endParaRPr lang="en-US"/>
+          </a:p>
+        </p:txBody>
+      </p:sp>
+    </p:spTree>
+    <p:extLst>
+      <p:ext uri="{BB962C8B-B14F-4D97-AF65-F5344CB8AC3E}">
+        <p14:creationId xmlns:p14="http://schemas.microsoft.com/office/powerpoint/2010/main" val="432269854"/>
+      </p:ext>
+    </p:extLst>
+  </p:cSld>
+  <p:clrMapOvr>
+    <a:masterClrMapping/>
+  </p:clrMapOvr>
+</p:notes>
+</file>
+
+<file path=ppt/notesSlides/notesSlide7.xml><?xml version="1.0" encoding="utf-8"?>
+<p:notes xmlns:a="http://schemas.openxmlformats.org/drawingml/2006/main" xmlns:r="http://schemas.openxmlformats.org/officeDocument/2006/relationships" xmlns:p="http://schemas.openxmlformats.org/presentationml/2006/main">
+  <p:cSld>
+    <p:spTree>
+      <p:nvGrpSpPr>
+        <p:cNvPr id="1" name=""/>
+        <p:cNvGrpSpPr/>
+        <p:nvPr/>
+      </p:nvGrpSpPr>
+      <p:grpSpPr>
+        <a:xfrm>
+          <a:off x="0" y="0"/>
+          <a:ext cx="0" cy="0"/>
+          <a:chOff x="0" y="0"/>
+          <a:chExt cx="0" cy="0"/>
+        </a:xfrm>
+      </p:grpSpPr>
+      <p:sp>
+        <p:nvSpPr>
+          <p:cNvPr id="2" name="Slide Image Placeholder 1"/>
+          <p:cNvSpPr>
+            <a:spLocks noGrp="1" noRot="1" noChangeAspect="1"/>
+          </p:cNvSpPr>
+          <p:nvPr>
+            <p:ph type="sldImg"/>
+          </p:nvPr>
+        </p:nvSpPr>
+        <p:spPr/>
+      </p:sp>
+      <p:sp>
+        <p:nvSpPr>
+          <p:cNvPr id="3" name="Notes Placeholder 2"/>
+          <p:cNvSpPr>
+            <a:spLocks noGrp="1"/>
+          </p:cNvSpPr>
+          <p:nvPr>
+            <p:ph type="body" idx="1"/>
+          </p:nvPr>
+        </p:nvSpPr>
+        <p:spPr/>
+        <p:txBody>
+          <a:bodyPr/>
+          <a:lstStyle/>
+          <a:p>
+            <a:endParaRPr lang="en-US"/>
+          </a:p>
+        </p:txBody>
+      </p:sp>
+      <p:sp>
+        <p:nvSpPr>
+          <p:cNvPr id="4" name="Slide Number Placeholder 3"/>
+          <p:cNvSpPr>
+            <a:spLocks noGrp="1"/>
+          </p:cNvSpPr>
+          <p:nvPr>
+            <p:ph type="sldNum" sz="quarter" idx="10"/>
+          </p:nvPr>
+        </p:nvSpPr>
+        <p:spPr/>
+        <p:txBody>
+          <a:bodyPr/>
+          <a:lstStyle/>
+          <a:p>
+            <a:fld id="{825A8758-86F8-4A31-AD42-BD270808CD0B}" type="slidenum">
+              <a:rPr lang="en-US" smtClean="0"/>
+              <a:t>7</a:t>
+            </a:fld>
+            <a:endParaRPr lang="en-US"/>
+          </a:p>
+        </p:txBody>
+      </p:sp>
+    </p:spTree>
+    <p:extLst>
+      <p:ext uri="{BB962C8B-B14F-4D97-AF65-F5344CB8AC3E}">
+        <p14:creationId xmlns:p14="http://schemas.microsoft.com/office/powerpoint/2010/main" val="1166499339"/>
+      </p:ext>
+    </p:extLst>
+  </p:cSld>
+  <p:clrMapOvr>
+    <a:masterClrMapping/>
+  </p:clrMapOvr>
+</p:notes>
+</file>
+
+<file path=ppt/notesSlides/notesSlide8.xml><?xml version="1.0" encoding="utf-8"?>
+<p:notes xmlns:a="http://schemas.openxmlformats.org/drawingml/2006/main" xmlns:r="http://schemas.openxmlformats.org/officeDocument/2006/relationships" xmlns:p="http://schemas.openxmlformats.org/presentationml/2006/main">
+  <p:cSld>
+    <p:spTree>
+      <p:nvGrpSpPr>
+        <p:cNvPr id="1" name=""/>
+        <p:cNvGrpSpPr/>
+        <p:nvPr/>
+      </p:nvGrpSpPr>
+      <p:grpSpPr>
+        <a:xfrm>
+          <a:off x="0" y="0"/>
+          <a:ext cx="0" cy="0"/>
+          <a:chOff x="0" y="0"/>
+          <a:chExt cx="0" cy="0"/>
+        </a:xfrm>
+      </p:grpSpPr>
+      <p:sp>
+        <p:nvSpPr>
+          <p:cNvPr id="2" name="Slide Image Placeholder 1"/>
+          <p:cNvSpPr>
+            <a:spLocks noGrp="1" noRot="1" noChangeAspect="1"/>
+          </p:cNvSpPr>
+          <p:nvPr>
+            <p:ph type="sldImg"/>
+          </p:nvPr>
+        </p:nvSpPr>
+        <p:spPr/>
+      </p:sp>
+      <p:sp>
+        <p:nvSpPr>
+          <p:cNvPr id="3" name="Notes Placeholder 2"/>
+          <p:cNvSpPr>
+            <a:spLocks noGrp="1"/>
+          </p:cNvSpPr>
+          <p:nvPr>
+            <p:ph type="body" idx="1"/>
+          </p:nvPr>
+        </p:nvSpPr>
+        <p:spPr/>
+        <p:txBody>
+          <a:bodyPr/>
+          <a:lstStyle/>
+          <a:p>
+            <a:endParaRPr lang="en-US"/>
+          </a:p>
+        </p:txBody>
+      </p:sp>
+      <p:sp>
+        <p:nvSpPr>
+          <p:cNvPr id="4" name="Slide Number Placeholder 3"/>
+          <p:cNvSpPr>
+            <a:spLocks noGrp="1"/>
+          </p:cNvSpPr>
+          <p:nvPr>
+            <p:ph type="sldNum" sz="quarter" idx="10"/>
+          </p:nvPr>
+        </p:nvSpPr>
+        <p:spPr/>
+        <p:txBody>
+          <a:bodyPr/>
+          <a:lstStyle/>
+          <a:p>
+            <a:fld id="{825A8758-86F8-4A31-AD42-BD270808CD0B}" type="slidenum">
+              <a:rPr lang="en-US" smtClean="0"/>
+              <a:t>8</a:t>
+            </a:fld>
+            <a:endParaRPr lang="en-US"/>
+          </a:p>
+        </p:txBody>
+      </p:sp>
+    </p:spTree>
+    <p:extLst>
+      <p:ext uri="{BB962C8B-B14F-4D97-AF65-F5344CB8AC3E}">
+        <p14:creationId xmlns:p14="http://schemas.microsoft.com/office/powerpoint/2010/main" val="3160959481"/>
+      </p:ext>
+    </p:extLst>
+  </p:cSld>
+  <p:clrMapOvr>
+    <a:masterClrMapping/>
+  </p:clrMapOvr>
+</p:notes>
+</file>
+
+<file path=ppt/notesSlides/notesSlide9.xml><?xml version="1.0" encoding="utf-8"?>
+<p:notes xmlns:a="http://schemas.openxmlformats.org/drawingml/2006/main" xmlns:r="http://schemas.openxmlformats.org/officeDocument/2006/relationships" xmlns:p="http://schemas.openxmlformats.org/presentationml/2006/main">
+  <p:cSld>
+    <p:spTree>
+      <p:nvGrpSpPr>
+        <p:cNvPr id="1" name=""/>
+        <p:cNvGrpSpPr/>
+        <p:nvPr/>
+      </p:nvGrpSpPr>
+      <p:grpSpPr>
+        <a:xfrm>
+          <a:off x="0" y="0"/>
+          <a:ext cx="0" cy="0"/>
+          <a:chOff x="0" y="0"/>
+          <a:chExt cx="0" cy="0"/>
+        </a:xfrm>
+      </p:grpSpPr>
+      <p:sp>
+        <p:nvSpPr>
+          <p:cNvPr id="2" name="Slide Image Placeholder 1"/>
+          <p:cNvSpPr>
+            <a:spLocks noGrp="1" noRot="1" noChangeAspect="1"/>
+          </p:cNvSpPr>
+          <p:nvPr>
+            <p:ph type="sldImg"/>
+          </p:nvPr>
+        </p:nvSpPr>
+        <p:spPr/>
+      </p:sp>
+      <p:sp>
+        <p:nvSpPr>
+          <p:cNvPr id="3" name="Notes Placeholder 2"/>
+          <p:cNvSpPr>
+            <a:spLocks noGrp="1"/>
+          </p:cNvSpPr>
+          <p:nvPr>
+            <p:ph type="body" idx="1"/>
+          </p:nvPr>
+        </p:nvSpPr>
+        <p:spPr/>
+        <p:txBody>
+          <a:bodyPr/>
+          <a:lstStyle/>
+          <a:p>
+            <a:endParaRPr lang="en-US"/>
+          </a:p>
+        </p:txBody>
+      </p:sp>
+      <p:sp>
+        <p:nvSpPr>
+          <p:cNvPr id="4" name="Slide Number Placeholder 3"/>
+          <p:cNvSpPr>
+            <a:spLocks noGrp="1"/>
+          </p:cNvSpPr>
+          <p:nvPr>
+            <p:ph type="sldNum" sz="quarter" idx="10"/>
+          </p:nvPr>
+        </p:nvSpPr>
+        <p:spPr/>
+        <p:txBody>
+          <a:bodyPr/>
+          <a:lstStyle/>
+          <a:p>
+            <a:fld id="{825A8758-86F8-4A31-AD42-BD270808CD0B}" type="slidenum">
+              <a:rPr lang="en-US" smtClean="0"/>
+              <a:t>9</a:t>
+            </a:fld>
+            <a:endParaRPr lang="en-US"/>
+          </a:p>
+        </p:txBody>
+      </p:sp>
+    </p:spTree>
+    <p:extLst>
+      <p:ext uri="{BB962C8B-B14F-4D97-AF65-F5344CB8AC3E}">
+        <p14:creationId xmlns:p14="http://schemas.microsoft.com/office/powerpoint/2010/main" val="1040475690"/>
+      </p:ext>
+    </p:extLst>
+  </p:cSld>
+  <p:clrMapOvr>
+    <a:masterClrMapping/>
+  </p:clrMapOvr>
+</p:notes>
+</file>
+
 <file path=ppt/slideLayouts/slideLayout1.xml><?xml version="1.0" encoding="utf-8"?>
 <p:sldLayout xmlns:a="http://schemas.openxmlformats.org/drawingml/2006/main" xmlns:r="http://schemas.openxmlformats.org/officeDocument/2006/relationships" xmlns:p="http://schemas.openxmlformats.org/presentationml/2006/main" type="title" preserve="1">
   <p:cSld name="Title Slide">
@@ -167,10 +1618,9 @@
           <a:lstStyle/>
           <a:p>
             <a:r>
-              <a:rPr lang="en-US" smtClean="0"/>
+              <a:rPr lang="en-US"/>
               <a:t>Click to edit Master title style</a:t>
             </a:r>
-            <a:endParaRPr lang="en-US"/>
           </a:p>
         </p:txBody>
       </p:sp>
@@ -286,51 +1736,54 @@
           </a:lstStyle>
           <a:p>
             <a:r>
+              <a:rPr lang="en-US"/>
+              <a:t>Click to edit Master subtitle style</a:t>
+            </a:r>
+          </a:p>
+        </p:txBody>
+      </p:sp>
+      <p:sp>
+        <p:nvSpPr>
+          <p:cNvPr id="4" name="Date Placeholder 3"/>
+          <p:cNvSpPr>
+            <a:spLocks noGrp="1"/>
+          </p:cNvSpPr>
+          <p:nvPr>
+            <p:ph type="dt" sz="half" idx="10"/>
+          </p:nvPr>
+        </p:nvSpPr>
+        <p:spPr/>
+        <p:txBody>
+          <a:bodyPr/>
+          <a:lstStyle/>
+          <a:p>
+            <a:fld id="{B62C60D6-4635-422E-A751-28379BDC1291}" type="datetime1">
               <a:rPr lang="en-US" smtClean="0"/>
-              <a:t>Click to edit Master subtitle style</a:t>
-            </a:r>
-            <a:endParaRPr lang="en-US"/>
-          </a:p>
-        </p:txBody>
-      </p:sp>
-      <p:sp>
-        <p:nvSpPr>
-          <p:cNvPr id="4" name="Date Placeholder 3"/>
-          <p:cNvSpPr>
-            <a:spLocks noGrp="1"/>
-          </p:cNvSpPr>
-          <p:nvPr>
-            <p:ph type="dt" sz="half" idx="10"/>
-          </p:nvPr>
-        </p:nvSpPr>
-        <p:spPr/>
-        <p:txBody>
-          <a:bodyPr/>
-          <a:lstStyle/>
-          <a:p>
-            <a:fld id="{5BCAD085-E8A6-8845-BD4E-CB4CCA059FC4}" type="datetimeFigureOut">
+              <a:t>4/15/2025</a:t>
+            </a:fld>
+            <a:endParaRPr lang="en-US"/>
+          </a:p>
+        </p:txBody>
+      </p:sp>
+      <p:sp>
+        <p:nvSpPr>
+          <p:cNvPr id="5" name="Footer Placeholder 4"/>
+          <p:cNvSpPr>
+            <a:spLocks noGrp="1"/>
+          </p:cNvSpPr>
+          <p:nvPr>
+            <p:ph type="ftr" sz="quarter" idx="11"/>
+          </p:nvPr>
+        </p:nvSpPr>
+        <p:spPr/>
+        <p:txBody>
+          <a:bodyPr/>
+          <a:lstStyle/>
+          <a:p>
+            <a:r>
               <a:rPr lang="en-US" smtClean="0"/>
-              <a:t>4/14/2025</a:t>
-            </a:fld>
-            <a:endParaRPr lang="en-US"/>
-          </a:p>
-        </p:txBody>
-      </p:sp>
-      <p:sp>
-        <p:nvSpPr>
-          <p:cNvPr id="5" name="Footer Placeholder 4"/>
-          <p:cNvSpPr>
-            <a:spLocks noGrp="1"/>
-          </p:cNvSpPr>
-          <p:nvPr>
-            <p:ph type="ftr" sz="quarter" idx="11"/>
-          </p:nvPr>
-        </p:nvSpPr>
-        <p:spPr/>
-        <p:txBody>
-          <a:bodyPr/>
-          <a:lstStyle/>
-          <a:p>
+              <a:t>1-10</a:t>
+            </a:r>
             <a:endParaRPr lang="en-US"/>
           </a:p>
         </p:txBody>
@@ -404,103 +1857,105 @@
           <a:lstStyle/>
           <a:p>
             <a:r>
+              <a:rPr lang="en-US"/>
+              <a:t>Click to edit Master title style</a:t>
+            </a:r>
+          </a:p>
+        </p:txBody>
+      </p:sp>
+      <p:sp>
+        <p:nvSpPr>
+          <p:cNvPr id="3" name="Vertical Text Placeholder 2"/>
+          <p:cNvSpPr>
+            <a:spLocks noGrp="1"/>
+          </p:cNvSpPr>
+          <p:nvPr>
+            <p:ph type="body" orient="vert" idx="1"/>
+          </p:nvPr>
+        </p:nvSpPr>
+        <p:spPr/>
+        <p:txBody>
+          <a:bodyPr vert="eaVert"/>
+          <a:lstStyle/>
+          <a:p>
+            <a:pPr lvl="0"/>
+            <a:r>
+              <a:rPr lang="en-US"/>
+              <a:t>Click to edit Master text styles</a:t>
+            </a:r>
+          </a:p>
+          <a:p>
+            <a:pPr lvl="1"/>
+            <a:r>
+              <a:rPr lang="en-US"/>
+              <a:t>Second level</a:t>
+            </a:r>
+          </a:p>
+          <a:p>
+            <a:pPr lvl="2"/>
+            <a:r>
+              <a:rPr lang="en-US"/>
+              <a:t>Third level</a:t>
+            </a:r>
+          </a:p>
+          <a:p>
+            <a:pPr lvl="3"/>
+            <a:r>
+              <a:rPr lang="en-US"/>
+              <a:t>Fourth level</a:t>
+            </a:r>
+          </a:p>
+          <a:p>
+            <a:pPr lvl="4"/>
+            <a:r>
+              <a:rPr lang="en-US"/>
+              <a:t>Fifth level</a:t>
+            </a:r>
+          </a:p>
+        </p:txBody>
+      </p:sp>
+      <p:sp>
+        <p:nvSpPr>
+          <p:cNvPr id="4" name="Date Placeholder 3"/>
+          <p:cNvSpPr>
+            <a:spLocks noGrp="1"/>
+          </p:cNvSpPr>
+          <p:nvPr>
+            <p:ph type="dt" sz="half" idx="10"/>
+          </p:nvPr>
+        </p:nvSpPr>
+        <p:spPr/>
+        <p:txBody>
+          <a:bodyPr/>
+          <a:lstStyle/>
+          <a:p>
+            <a:fld id="{F6CB1E93-D350-4085-A602-742D0F64D08A}" type="datetime1">
               <a:rPr lang="en-US" smtClean="0"/>
-              <a:t>Click to edit Master title style</a:t>
-            </a:r>
-            <a:endParaRPr lang="en-US"/>
-          </a:p>
-        </p:txBody>
-      </p:sp>
-      <p:sp>
-        <p:nvSpPr>
-          <p:cNvPr id="3" name="Vertical Text Placeholder 2"/>
-          <p:cNvSpPr>
-            <a:spLocks noGrp="1"/>
-          </p:cNvSpPr>
-          <p:nvPr>
-            <p:ph type="body" orient="vert" idx="1"/>
-          </p:nvPr>
-        </p:nvSpPr>
-        <p:spPr/>
-        <p:txBody>
-          <a:bodyPr vert="eaVert"/>
-          <a:lstStyle/>
-          <a:p>
-            <a:pPr lvl="0"/>
+              <a:t>4/15/2025</a:t>
+            </a:fld>
+            <a:endParaRPr lang="en-US"/>
+          </a:p>
+        </p:txBody>
+      </p:sp>
+      <p:sp>
+        <p:nvSpPr>
+          <p:cNvPr id="5" name="Footer Placeholder 4"/>
+          <p:cNvSpPr>
+            <a:spLocks noGrp="1"/>
+          </p:cNvSpPr>
+          <p:nvPr>
+            <p:ph type="ftr" sz="quarter" idx="11"/>
+          </p:nvPr>
+        </p:nvSpPr>
+        <p:spPr/>
+        <p:txBody>
+          <a:bodyPr/>
+          <a:lstStyle/>
+          <a:p>
             <a:r>
               <a:rPr lang="en-US" smtClean="0"/>
-              <a:t>Click to edit Master text styles</a:t>
-            </a:r>
-          </a:p>
-          <a:p>
-            <a:pPr lvl="1"/>
-            <a:r>
-              <a:rPr lang="en-US" smtClean="0"/>
-              <a:t>Second level</a:t>
-            </a:r>
-          </a:p>
-          <a:p>
-            <a:pPr lvl="2"/>
-            <a:r>
-              <a:rPr lang="en-US" smtClean="0"/>
-              <a:t>Third level</a:t>
-            </a:r>
-          </a:p>
-          <a:p>
-            <a:pPr lvl="3"/>
-            <a:r>
-              <a:rPr lang="en-US" smtClean="0"/>
-              <a:t>Fourth level</a:t>
-            </a:r>
-          </a:p>
-          <a:p>
-            <a:pPr lvl="4"/>
-            <a:r>
-              <a:rPr lang="en-US" smtClean="0"/>
-              <a:t>Fifth level</a:t>
-            </a:r>
-            <a:endParaRPr lang="en-US"/>
-          </a:p>
-        </p:txBody>
-      </p:sp>
-      <p:sp>
-        <p:nvSpPr>
-          <p:cNvPr id="4" name="Date Placeholder 3"/>
-          <p:cNvSpPr>
-            <a:spLocks noGrp="1"/>
-          </p:cNvSpPr>
-          <p:nvPr>
-            <p:ph type="dt" sz="half" idx="10"/>
-          </p:nvPr>
-        </p:nvSpPr>
-        <p:spPr/>
-        <p:txBody>
-          <a:bodyPr/>
-          <a:lstStyle/>
-          <a:p>
-            <a:fld id="{5BCAD085-E8A6-8845-BD4E-CB4CCA059FC4}" type="datetimeFigureOut">
-              <a:rPr lang="en-US" smtClean="0"/>
-              <a:t>4/14/2025</a:t>
-            </a:fld>
-            <a:endParaRPr lang="en-US"/>
-          </a:p>
-        </p:txBody>
-      </p:sp>
-      <p:sp>
-        <p:nvSpPr>
-          <p:cNvPr id="5" name="Footer Placeholder 4"/>
-          <p:cNvSpPr>
-            <a:spLocks noGrp="1"/>
-          </p:cNvSpPr>
-          <p:nvPr>
-            <p:ph type="ftr" sz="quarter" idx="11"/>
-          </p:nvPr>
-        </p:nvSpPr>
-        <p:spPr/>
-        <p:txBody>
-          <a:bodyPr/>
-          <a:lstStyle/>
-          <a:p>
+              <a:t>1-10</a:t>
+            </a:r>
             <a:endParaRPr lang="en-US"/>
           </a:p>
         </p:txBody>
@@ -579,10 +2034,9 @@
           <a:lstStyle/>
           <a:p>
             <a:r>
-              <a:rPr lang="en-US" smtClean="0"/>
+              <a:rPr lang="en-US"/>
               <a:t>Click to edit Master title style</a:t>
             </a:r>
-            <a:endParaRPr lang="en-US"/>
           </a:p>
         </p:txBody>
       </p:sp>
@@ -608,79 +2062,82 @@
           <a:p>
             <a:pPr lvl="0"/>
             <a:r>
+              <a:rPr lang="en-US"/>
+              <a:t>Click to edit Master text styles</a:t>
+            </a:r>
+          </a:p>
+          <a:p>
+            <a:pPr lvl="1"/>
+            <a:r>
+              <a:rPr lang="en-US"/>
+              <a:t>Second level</a:t>
+            </a:r>
+          </a:p>
+          <a:p>
+            <a:pPr lvl="2"/>
+            <a:r>
+              <a:rPr lang="en-US"/>
+              <a:t>Third level</a:t>
+            </a:r>
+          </a:p>
+          <a:p>
+            <a:pPr lvl="3"/>
+            <a:r>
+              <a:rPr lang="en-US"/>
+              <a:t>Fourth level</a:t>
+            </a:r>
+          </a:p>
+          <a:p>
+            <a:pPr lvl="4"/>
+            <a:r>
+              <a:rPr lang="en-US"/>
+              <a:t>Fifth level</a:t>
+            </a:r>
+          </a:p>
+        </p:txBody>
+      </p:sp>
+      <p:sp>
+        <p:nvSpPr>
+          <p:cNvPr id="4" name="Date Placeholder 3"/>
+          <p:cNvSpPr>
+            <a:spLocks noGrp="1"/>
+          </p:cNvSpPr>
+          <p:nvPr>
+            <p:ph type="dt" sz="half" idx="10"/>
+          </p:nvPr>
+        </p:nvSpPr>
+        <p:spPr/>
+        <p:txBody>
+          <a:bodyPr/>
+          <a:lstStyle/>
+          <a:p>
+            <a:fld id="{27C59E59-A96A-4DFD-A28A-C0CBA52E13B9}" type="datetime1">
               <a:rPr lang="en-US" smtClean="0"/>
-              <a:t>Click to edit Master text styles</a:t>
-            </a:r>
-          </a:p>
-          <a:p>
-            <a:pPr lvl="1"/>
+              <a:t>4/15/2025</a:t>
+            </a:fld>
+            <a:endParaRPr lang="en-US"/>
+          </a:p>
+        </p:txBody>
+      </p:sp>
+      <p:sp>
+        <p:nvSpPr>
+          <p:cNvPr id="5" name="Footer Placeholder 4"/>
+          <p:cNvSpPr>
+            <a:spLocks noGrp="1"/>
+          </p:cNvSpPr>
+          <p:nvPr>
+            <p:ph type="ftr" sz="quarter" idx="11"/>
+          </p:nvPr>
+        </p:nvSpPr>
+        <p:spPr/>
+        <p:txBody>
+          <a:bodyPr/>
+          <a:lstStyle/>
+          <a:p>
             <a:r>
               <a:rPr lang="en-US" smtClean="0"/>
-              <a:t>Second level</a:t>
-            </a:r>
-          </a:p>
-          <a:p>
-            <a:pPr lvl="2"/>
-            <a:r>
-              <a:rPr lang="en-US" smtClean="0"/>
-              <a:t>Third level</a:t>
-            </a:r>
-          </a:p>
-          <a:p>
-            <a:pPr lvl="3"/>
-            <a:r>
-              <a:rPr lang="en-US" smtClean="0"/>
-              <a:t>Fourth level</a:t>
-            </a:r>
-          </a:p>
-          <a:p>
-            <a:pPr lvl="4"/>
-            <a:r>
-              <a:rPr lang="en-US" smtClean="0"/>
-              <a:t>Fifth level</a:t>
-            </a:r>
-            <a:endParaRPr lang="en-US"/>
-          </a:p>
-        </p:txBody>
-      </p:sp>
-      <p:sp>
-        <p:nvSpPr>
-          <p:cNvPr id="4" name="Date Placeholder 3"/>
-          <p:cNvSpPr>
-            <a:spLocks noGrp="1"/>
-          </p:cNvSpPr>
-          <p:nvPr>
-            <p:ph type="dt" sz="half" idx="10"/>
-          </p:nvPr>
-        </p:nvSpPr>
-        <p:spPr/>
-        <p:txBody>
-          <a:bodyPr/>
-          <a:lstStyle/>
-          <a:p>
-            <a:fld id="{5BCAD085-E8A6-8845-BD4E-CB4CCA059FC4}" type="datetimeFigureOut">
-              <a:rPr lang="en-US" smtClean="0"/>
-              <a:t>4/14/2025</a:t>
-            </a:fld>
-            <a:endParaRPr lang="en-US"/>
-          </a:p>
-        </p:txBody>
-      </p:sp>
-      <p:sp>
-        <p:nvSpPr>
-          <p:cNvPr id="5" name="Footer Placeholder 4"/>
-          <p:cNvSpPr>
-            <a:spLocks noGrp="1"/>
-          </p:cNvSpPr>
-          <p:nvPr>
-            <p:ph type="ftr" sz="quarter" idx="11"/>
-          </p:nvPr>
-        </p:nvSpPr>
-        <p:spPr/>
-        <p:txBody>
-          <a:bodyPr/>
-          <a:lstStyle/>
-          <a:p>
+              <a:t>1-10</a:t>
+            </a:r>
             <a:endParaRPr lang="en-US"/>
           </a:p>
         </p:txBody>
@@ -754,103 +2211,105 @@
           <a:lstStyle/>
           <a:p>
             <a:r>
+              <a:rPr lang="en-US"/>
+              <a:t>Click to edit Master title style</a:t>
+            </a:r>
+          </a:p>
+        </p:txBody>
+      </p:sp>
+      <p:sp>
+        <p:nvSpPr>
+          <p:cNvPr id="3" name="Content Placeholder 2"/>
+          <p:cNvSpPr>
+            <a:spLocks noGrp="1"/>
+          </p:cNvSpPr>
+          <p:nvPr>
+            <p:ph idx="1"/>
+          </p:nvPr>
+        </p:nvSpPr>
+        <p:spPr/>
+        <p:txBody>
+          <a:bodyPr/>
+          <a:lstStyle/>
+          <a:p>
+            <a:pPr lvl="0"/>
+            <a:r>
+              <a:rPr lang="en-US"/>
+              <a:t>Click to edit Master text styles</a:t>
+            </a:r>
+          </a:p>
+          <a:p>
+            <a:pPr lvl="1"/>
+            <a:r>
+              <a:rPr lang="en-US"/>
+              <a:t>Second level</a:t>
+            </a:r>
+          </a:p>
+          <a:p>
+            <a:pPr lvl="2"/>
+            <a:r>
+              <a:rPr lang="en-US"/>
+              <a:t>Third level</a:t>
+            </a:r>
+          </a:p>
+          <a:p>
+            <a:pPr lvl="3"/>
+            <a:r>
+              <a:rPr lang="en-US"/>
+              <a:t>Fourth level</a:t>
+            </a:r>
+          </a:p>
+          <a:p>
+            <a:pPr lvl="4"/>
+            <a:r>
+              <a:rPr lang="en-US"/>
+              <a:t>Fifth level</a:t>
+            </a:r>
+          </a:p>
+        </p:txBody>
+      </p:sp>
+      <p:sp>
+        <p:nvSpPr>
+          <p:cNvPr id="4" name="Date Placeholder 3"/>
+          <p:cNvSpPr>
+            <a:spLocks noGrp="1"/>
+          </p:cNvSpPr>
+          <p:nvPr>
+            <p:ph type="dt" sz="half" idx="10"/>
+          </p:nvPr>
+        </p:nvSpPr>
+        <p:spPr/>
+        <p:txBody>
+          <a:bodyPr/>
+          <a:lstStyle/>
+          <a:p>
+            <a:fld id="{05FFD749-F603-44AC-986C-1FA9DFE0EEFF}" type="datetime1">
               <a:rPr lang="en-US" smtClean="0"/>
-              <a:t>Click to edit Master title style</a:t>
-            </a:r>
-            <a:endParaRPr lang="en-US"/>
-          </a:p>
-        </p:txBody>
-      </p:sp>
-      <p:sp>
-        <p:nvSpPr>
-          <p:cNvPr id="3" name="Content Placeholder 2"/>
-          <p:cNvSpPr>
-            <a:spLocks noGrp="1"/>
-          </p:cNvSpPr>
-          <p:nvPr>
-            <p:ph idx="1"/>
-          </p:nvPr>
-        </p:nvSpPr>
-        <p:spPr/>
-        <p:txBody>
-          <a:bodyPr/>
-          <a:lstStyle/>
-          <a:p>
-            <a:pPr lvl="0"/>
+              <a:t>4/15/2025</a:t>
+            </a:fld>
+            <a:endParaRPr lang="en-US"/>
+          </a:p>
+        </p:txBody>
+      </p:sp>
+      <p:sp>
+        <p:nvSpPr>
+          <p:cNvPr id="5" name="Footer Placeholder 4"/>
+          <p:cNvSpPr>
+            <a:spLocks noGrp="1"/>
+          </p:cNvSpPr>
+          <p:nvPr>
+            <p:ph type="ftr" sz="quarter" idx="11"/>
+          </p:nvPr>
+        </p:nvSpPr>
+        <p:spPr/>
+        <p:txBody>
+          <a:bodyPr/>
+          <a:lstStyle/>
+          <a:p>
             <a:r>
               <a:rPr lang="en-US" smtClean="0"/>
-              <a:t>Click to edit Master text styles</a:t>
-            </a:r>
-          </a:p>
-          <a:p>
-            <a:pPr lvl="1"/>
-            <a:r>
-              <a:rPr lang="en-US" smtClean="0"/>
-              <a:t>Second level</a:t>
-            </a:r>
-          </a:p>
-          <a:p>
-            <a:pPr lvl="2"/>
-            <a:r>
-              <a:rPr lang="en-US" smtClean="0"/>
-              <a:t>Third level</a:t>
-            </a:r>
-          </a:p>
-          <a:p>
-            <a:pPr lvl="3"/>
-            <a:r>
-              <a:rPr lang="en-US" smtClean="0"/>
-              <a:t>Fourth level</a:t>
-            </a:r>
-          </a:p>
-          <a:p>
-            <a:pPr lvl="4"/>
-            <a:r>
-              <a:rPr lang="en-US" smtClean="0"/>
-              <a:t>Fifth level</a:t>
-            </a:r>
-            <a:endParaRPr lang="en-US"/>
-          </a:p>
-        </p:txBody>
-      </p:sp>
-      <p:sp>
-        <p:nvSpPr>
-          <p:cNvPr id="4" name="Date Placeholder 3"/>
-          <p:cNvSpPr>
-            <a:spLocks noGrp="1"/>
-          </p:cNvSpPr>
-          <p:nvPr>
-            <p:ph type="dt" sz="half" idx="10"/>
-          </p:nvPr>
-        </p:nvSpPr>
-        <p:spPr/>
-        <p:txBody>
-          <a:bodyPr/>
-          <a:lstStyle/>
-          <a:p>
-            <a:fld id="{5BCAD085-E8A6-8845-BD4E-CB4CCA059FC4}" type="datetimeFigureOut">
-              <a:rPr lang="en-US" smtClean="0"/>
-              <a:t>4/14/2025</a:t>
-            </a:fld>
-            <a:endParaRPr lang="en-US"/>
-          </a:p>
-        </p:txBody>
-      </p:sp>
-      <p:sp>
-        <p:nvSpPr>
-          <p:cNvPr id="5" name="Footer Placeholder 4"/>
-          <p:cNvSpPr>
-            <a:spLocks noGrp="1"/>
-          </p:cNvSpPr>
-          <p:nvPr>
-            <p:ph type="ftr" sz="quarter" idx="11"/>
-          </p:nvPr>
-        </p:nvSpPr>
-        <p:spPr/>
-        <p:txBody>
-          <a:bodyPr/>
-          <a:lstStyle/>
-          <a:p>
+              <a:t>1-10</a:t>
+            </a:r>
             <a:endParaRPr lang="en-US"/>
           </a:p>
         </p:txBody>
@@ -933,10 +2392,9 @@
           </a:lstStyle>
           <a:p>
             <a:r>
-              <a:rPr lang="en-US" smtClean="0"/>
+              <a:rPr lang="en-US"/>
               <a:t>Click to edit Master title style</a:t>
             </a:r>
-            <a:endParaRPr lang="en-US"/>
           </a:p>
         </p:txBody>
       </p:sp>
@@ -1053,50 +2511,54 @@
           <a:p>
             <a:pPr lvl="0"/>
             <a:r>
+              <a:rPr lang="en-US"/>
+              <a:t>Click to edit Master text styles</a:t>
+            </a:r>
+          </a:p>
+        </p:txBody>
+      </p:sp>
+      <p:sp>
+        <p:nvSpPr>
+          <p:cNvPr id="4" name="Date Placeholder 3"/>
+          <p:cNvSpPr>
+            <a:spLocks noGrp="1"/>
+          </p:cNvSpPr>
+          <p:nvPr>
+            <p:ph type="dt" sz="half" idx="10"/>
+          </p:nvPr>
+        </p:nvSpPr>
+        <p:spPr/>
+        <p:txBody>
+          <a:bodyPr/>
+          <a:lstStyle/>
+          <a:p>
+            <a:fld id="{5B5F1840-6731-4CAC-82E3-5F444FDB7729}" type="datetime1">
               <a:rPr lang="en-US" smtClean="0"/>
-              <a:t>Click to edit Master text styles</a:t>
-            </a:r>
-          </a:p>
-        </p:txBody>
-      </p:sp>
-      <p:sp>
-        <p:nvSpPr>
-          <p:cNvPr id="4" name="Date Placeholder 3"/>
-          <p:cNvSpPr>
-            <a:spLocks noGrp="1"/>
-          </p:cNvSpPr>
-          <p:nvPr>
-            <p:ph type="dt" sz="half" idx="10"/>
-          </p:nvPr>
-        </p:nvSpPr>
-        <p:spPr/>
-        <p:txBody>
-          <a:bodyPr/>
-          <a:lstStyle/>
-          <a:p>
-            <a:fld id="{5BCAD085-E8A6-8845-BD4E-CB4CCA059FC4}" type="datetimeFigureOut">
+              <a:t>4/15/2025</a:t>
+            </a:fld>
+            <a:endParaRPr lang="en-US"/>
+          </a:p>
+        </p:txBody>
+      </p:sp>
+      <p:sp>
+        <p:nvSpPr>
+          <p:cNvPr id="5" name="Footer Placeholder 4"/>
+          <p:cNvSpPr>
+            <a:spLocks noGrp="1"/>
+          </p:cNvSpPr>
+          <p:nvPr>
+            <p:ph type="ftr" sz="quarter" idx="11"/>
+          </p:nvPr>
+        </p:nvSpPr>
+        <p:spPr/>
+        <p:txBody>
+          <a:bodyPr/>
+          <a:lstStyle/>
+          <a:p>
+            <a:r>
               <a:rPr lang="en-US" smtClean="0"/>
-              <a:t>4/14/2025</a:t>
-            </a:fld>
-            <a:endParaRPr lang="en-US"/>
-          </a:p>
-        </p:txBody>
-      </p:sp>
-      <p:sp>
-        <p:nvSpPr>
-          <p:cNvPr id="5" name="Footer Placeholder 4"/>
-          <p:cNvSpPr>
-            <a:spLocks noGrp="1"/>
-          </p:cNvSpPr>
-          <p:nvPr>
-            <p:ph type="ftr" sz="quarter" idx="11"/>
-          </p:nvPr>
-        </p:nvSpPr>
-        <p:spPr/>
-        <p:txBody>
-          <a:bodyPr/>
-          <a:lstStyle/>
-          <a:p>
+              <a:t>1-10</a:t>
+            </a:r>
             <a:endParaRPr lang="en-US"/>
           </a:p>
         </p:txBody>
@@ -1170,10 +2632,9 @@
           <a:lstStyle/>
           <a:p>
             <a:r>
-              <a:rPr lang="en-US" smtClean="0"/>
+              <a:rPr lang="en-US"/>
               <a:t>Click to edit Master title style</a:t>
             </a:r>
-            <a:endParaRPr lang="en-US"/>
           </a:p>
         </p:txBody>
       </p:sp>
@@ -1227,38 +2688,37 @@
           <a:p>
             <a:pPr lvl="0"/>
             <a:r>
-              <a:rPr lang="en-US" smtClean="0"/>
+              <a:rPr lang="en-US"/>
               <a:t>Click to edit Master text styles</a:t>
             </a:r>
           </a:p>
           <a:p>
             <a:pPr lvl="1"/>
             <a:r>
-              <a:rPr lang="en-US" smtClean="0"/>
+              <a:rPr lang="en-US"/>
               <a:t>Second level</a:t>
             </a:r>
           </a:p>
           <a:p>
             <a:pPr lvl="2"/>
             <a:r>
-              <a:rPr lang="en-US" smtClean="0"/>
+              <a:rPr lang="en-US"/>
               <a:t>Third level</a:t>
             </a:r>
           </a:p>
           <a:p>
             <a:pPr lvl="3"/>
             <a:r>
-              <a:rPr lang="en-US" smtClean="0"/>
+              <a:rPr lang="en-US"/>
               <a:t>Fourth level</a:t>
             </a:r>
           </a:p>
           <a:p>
             <a:pPr lvl="4"/>
             <a:r>
-              <a:rPr lang="en-US" smtClean="0"/>
+              <a:rPr lang="en-US"/>
               <a:t>Fifth level</a:t>
             </a:r>
-            <a:endParaRPr lang="en-US"/>
           </a:p>
         </p:txBody>
       </p:sp>
@@ -1312,79 +2772,82 @@
           <a:p>
             <a:pPr lvl="0"/>
             <a:r>
+              <a:rPr lang="en-US"/>
+              <a:t>Click to edit Master text styles</a:t>
+            </a:r>
+          </a:p>
+          <a:p>
+            <a:pPr lvl="1"/>
+            <a:r>
+              <a:rPr lang="en-US"/>
+              <a:t>Second level</a:t>
+            </a:r>
+          </a:p>
+          <a:p>
+            <a:pPr lvl="2"/>
+            <a:r>
+              <a:rPr lang="en-US"/>
+              <a:t>Third level</a:t>
+            </a:r>
+          </a:p>
+          <a:p>
+            <a:pPr lvl="3"/>
+            <a:r>
+              <a:rPr lang="en-US"/>
+              <a:t>Fourth level</a:t>
+            </a:r>
+          </a:p>
+          <a:p>
+            <a:pPr lvl="4"/>
+            <a:r>
+              <a:rPr lang="en-US"/>
+              <a:t>Fifth level</a:t>
+            </a:r>
+          </a:p>
+        </p:txBody>
+      </p:sp>
+      <p:sp>
+        <p:nvSpPr>
+          <p:cNvPr id="5" name="Date Placeholder 4"/>
+          <p:cNvSpPr>
+            <a:spLocks noGrp="1"/>
+          </p:cNvSpPr>
+          <p:nvPr>
+            <p:ph type="dt" sz="half" idx="10"/>
+          </p:nvPr>
+        </p:nvSpPr>
+        <p:spPr/>
+        <p:txBody>
+          <a:bodyPr/>
+          <a:lstStyle/>
+          <a:p>
+            <a:fld id="{8884EA5A-9E70-4A6F-B66D-894BA1096B59}" type="datetime1">
               <a:rPr lang="en-US" smtClean="0"/>
-              <a:t>Click to edit Master text styles</a:t>
-            </a:r>
-          </a:p>
-          <a:p>
-            <a:pPr lvl="1"/>
+              <a:t>4/15/2025</a:t>
+            </a:fld>
+            <a:endParaRPr lang="en-US"/>
+          </a:p>
+        </p:txBody>
+      </p:sp>
+      <p:sp>
+        <p:nvSpPr>
+          <p:cNvPr id="6" name="Footer Placeholder 5"/>
+          <p:cNvSpPr>
+            <a:spLocks noGrp="1"/>
+          </p:cNvSpPr>
+          <p:nvPr>
+            <p:ph type="ftr" sz="quarter" idx="11"/>
+          </p:nvPr>
+        </p:nvSpPr>
+        <p:spPr/>
+        <p:txBody>
+          <a:bodyPr/>
+          <a:lstStyle/>
+          <a:p>
             <a:r>
               <a:rPr lang="en-US" smtClean="0"/>
-              <a:t>Second level</a:t>
-            </a:r>
-          </a:p>
-          <a:p>
-            <a:pPr lvl="2"/>
-            <a:r>
-              <a:rPr lang="en-US" smtClean="0"/>
-              <a:t>Third level</a:t>
-            </a:r>
-          </a:p>
-          <a:p>
-            <a:pPr lvl="3"/>
-            <a:r>
-              <a:rPr lang="en-US" smtClean="0"/>
-              <a:t>Fourth level</a:t>
-            </a:r>
-          </a:p>
-          <a:p>
-            <a:pPr lvl="4"/>
-            <a:r>
-              <a:rPr lang="en-US" smtClean="0"/>
-              <a:t>Fifth level</a:t>
-            </a:r>
-            <a:endParaRPr lang="en-US"/>
-          </a:p>
-        </p:txBody>
-      </p:sp>
-      <p:sp>
-        <p:nvSpPr>
-          <p:cNvPr id="5" name="Date Placeholder 4"/>
-          <p:cNvSpPr>
-            <a:spLocks noGrp="1"/>
-          </p:cNvSpPr>
-          <p:nvPr>
-            <p:ph type="dt" sz="half" idx="10"/>
-          </p:nvPr>
-        </p:nvSpPr>
-        <p:spPr/>
-        <p:txBody>
-          <a:bodyPr/>
-          <a:lstStyle/>
-          <a:p>
-            <a:fld id="{5BCAD085-E8A6-8845-BD4E-CB4CCA059FC4}" type="datetimeFigureOut">
-              <a:rPr lang="en-US" smtClean="0"/>
-              <a:t>4/14/2025</a:t>
-            </a:fld>
-            <a:endParaRPr lang="en-US"/>
-          </a:p>
-        </p:txBody>
-      </p:sp>
-      <p:sp>
-        <p:nvSpPr>
-          <p:cNvPr id="6" name="Footer Placeholder 5"/>
-          <p:cNvSpPr>
-            <a:spLocks noGrp="1"/>
-          </p:cNvSpPr>
-          <p:nvPr>
-            <p:ph type="ftr" sz="quarter" idx="11"/>
-          </p:nvPr>
-        </p:nvSpPr>
-        <p:spPr/>
-        <p:txBody>
-          <a:bodyPr/>
-          <a:lstStyle/>
-          <a:p>
+              <a:t>1-10</a:t>
+            </a:r>
             <a:endParaRPr lang="en-US"/>
           </a:p>
         </p:txBody>
@@ -1462,10 +2925,9 @@
           </a:lstStyle>
           <a:p>
             <a:r>
-              <a:rPr lang="en-US" smtClean="0"/>
+              <a:rPr lang="en-US"/>
               <a:t>Click to edit Master title style</a:t>
             </a:r>
-            <a:endParaRPr lang="en-US"/>
           </a:p>
         </p:txBody>
       </p:sp>
@@ -1528,7 +2990,7 @@
           <a:p>
             <a:pPr lvl="0"/>
             <a:r>
-              <a:rPr lang="en-US" smtClean="0"/>
+              <a:rPr lang="en-US"/>
               <a:t>Click to edit Master text styles</a:t>
             </a:r>
           </a:p>
@@ -1584,38 +3046,37 @@
           <a:p>
             <a:pPr lvl="0"/>
             <a:r>
-              <a:rPr lang="en-US" smtClean="0"/>
+              <a:rPr lang="en-US"/>
               <a:t>Click to edit Master text styles</a:t>
             </a:r>
           </a:p>
           <a:p>
             <a:pPr lvl="1"/>
             <a:r>
-              <a:rPr lang="en-US" smtClean="0"/>
+              <a:rPr lang="en-US"/>
               <a:t>Second level</a:t>
             </a:r>
           </a:p>
           <a:p>
             <a:pPr lvl="2"/>
             <a:r>
-              <a:rPr lang="en-US" smtClean="0"/>
+              <a:rPr lang="en-US"/>
               <a:t>Third level</a:t>
             </a:r>
           </a:p>
           <a:p>
             <a:pPr lvl="3"/>
             <a:r>
-              <a:rPr lang="en-US" smtClean="0"/>
+              <a:rPr lang="en-US"/>
               <a:t>Fourth level</a:t>
             </a:r>
           </a:p>
           <a:p>
             <a:pPr lvl="4"/>
             <a:r>
-              <a:rPr lang="en-US" smtClean="0"/>
+              <a:rPr lang="en-US"/>
               <a:t>Fifth level</a:t>
             </a:r>
-            <a:endParaRPr lang="en-US"/>
           </a:p>
         </p:txBody>
       </p:sp>
@@ -1678,7 +3139,7 @@
           <a:p>
             <a:pPr lvl="0"/>
             <a:r>
-              <a:rPr lang="en-US" smtClean="0"/>
+              <a:rPr lang="en-US"/>
               <a:t>Click to edit Master text styles</a:t>
             </a:r>
           </a:p>
@@ -1734,79 +3195,82 @@
           <a:p>
             <a:pPr lvl="0"/>
             <a:r>
+              <a:rPr lang="en-US"/>
+              <a:t>Click to edit Master text styles</a:t>
+            </a:r>
+          </a:p>
+          <a:p>
+            <a:pPr lvl="1"/>
+            <a:r>
+              <a:rPr lang="en-US"/>
+              <a:t>Second level</a:t>
+            </a:r>
+          </a:p>
+          <a:p>
+            <a:pPr lvl="2"/>
+            <a:r>
+              <a:rPr lang="en-US"/>
+              <a:t>Third level</a:t>
+            </a:r>
+          </a:p>
+          <a:p>
+            <a:pPr lvl="3"/>
+            <a:r>
+              <a:rPr lang="en-US"/>
+              <a:t>Fourth level</a:t>
+            </a:r>
+          </a:p>
+          <a:p>
+            <a:pPr lvl="4"/>
+            <a:r>
+              <a:rPr lang="en-US"/>
+              <a:t>Fifth level</a:t>
+            </a:r>
+          </a:p>
+        </p:txBody>
+      </p:sp>
+      <p:sp>
+        <p:nvSpPr>
+          <p:cNvPr id="7" name="Date Placeholder 6"/>
+          <p:cNvSpPr>
+            <a:spLocks noGrp="1"/>
+          </p:cNvSpPr>
+          <p:nvPr>
+            <p:ph type="dt" sz="half" idx="10"/>
+          </p:nvPr>
+        </p:nvSpPr>
+        <p:spPr/>
+        <p:txBody>
+          <a:bodyPr/>
+          <a:lstStyle/>
+          <a:p>
+            <a:fld id="{EDDAF89F-7F43-4515-9CC5-B6C73A17E405}" type="datetime1">
               <a:rPr lang="en-US" smtClean="0"/>
-              <a:t>Click to edit Master text styles</a:t>
-            </a:r>
-          </a:p>
-          <a:p>
-            <a:pPr lvl="1"/>
+              <a:t>4/15/2025</a:t>
+            </a:fld>
+            <a:endParaRPr lang="en-US"/>
+          </a:p>
+        </p:txBody>
+      </p:sp>
+      <p:sp>
+        <p:nvSpPr>
+          <p:cNvPr id="8" name="Footer Placeholder 7"/>
+          <p:cNvSpPr>
+            <a:spLocks noGrp="1"/>
+          </p:cNvSpPr>
+          <p:nvPr>
+            <p:ph type="ftr" sz="quarter" idx="11"/>
+          </p:nvPr>
+        </p:nvSpPr>
+        <p:spPr/>
+        <p:txBody>
+          <a:bodyPr/>
+          <a:lstStyle/>
+          <a:p>
             <a:r>
               <a:rPr lang="en-US" smtClean="0"/>
-              <a:t>Second level</a:t>
-            </a:r>
-          </a:p>
-          <a:p>
-            <a:pPr lvl="2"/>
-            <a:r>
-              <a:rPr lang="en-US" smtClean="0"/>
-              <a:t>Third level</a:t>
-            </a:r>
-          </a:p>
-          <a:p>
-            <a:pPr lvl="3"/>
-            <a:r>
-              <a:rPr lang="en-US" smtClean="0"/>
-              <a:t>Fourth level</a:t>
-            </a:r>
-          </a:p>
-          <a:p>
-            <a:pPr lvl="4"/>
-            <a:r>
-              <a:rPr lang="en-US" smtClean="0"/>
-              <a:t>Fifth level</a:t>
-            </a:r>
-            <a:endParaRPr lang="en-US"/>
-          </a:p>
-        </p:txBody>
-      </p:sp>
-      <p:sp>
-        <p:nvSpPr>
-          <p:cNvPr id="7" name="Date Placeholder 6"/>
-          <p:cNvSpPr>
-            <a:spLocks noGrp="1"/>
-          </p:cNvSpPr>
-          <p:nvPr>
-            <p:ph type="dt" sz="half" idx="10"/>
-          </p:nvPr>
-        </p:nvSpPr>
-        <p:spPr/>
-        <p:txBody>
-          <a:bodyPr/>
-          <a:lstStyle/>
-          <a:p>
-            <a:fld id="{5BCAD085-E8A6-8845-BD4E-CB4CCA059FC4}" type="datetimeFigureOut">
-              <a:rPr lang="en-US" smtClean="0"/>
-              <a:t>4/14/2025</a:t>
-            </a:fld>
-            <a:endParaRPr lang="en-US"/>
-          </a:p>
-        </p:txBody>
-      </p:sp>
-      <p:sp>
-        <p:nvSpPr>
-          <p:cNvPr id="8" name="Footer Placeholder 7"/>
-          <p:cNvSpPr>
-            <a:spLocks noGrp="1"/>
-          </p:cNvSpPr>
-          <p:nvPr>
-            <p:ph type="ftr" sz="quarter" idx="11"/>
-          </p:nvPr>
-        </p:nvSpPr>
-        <p:spPr/>
-        <p:txBody>
-          <a:bodyPr/>
-          <a:lstStyle/>
-          <a:p>
+              <a:t>1-10</a:t>
+            </a:r>
             <a:endParaRPr lang="en-US"/>
           </a:p>
         </p:txBody>
@@ -1880,51 +3344,54 @@
           <a:lstStyle/>
           <a:p>
             <a:r>
+              <a:rPr lang="en-US"/>
+              <a:t>Click to edit Master title style</a:t>
+            </a:r>
+          </a:p>
+        </p:txBody>
+      </p:sp>
+      <p:sp>
+        <p:nvSpPr>
+          <p:cNvPr id="3" name="Date Placeholder 2"/>
+          <p:cNvSpPr>
+            <a:spLocks noGrp="1"/>
+          </p:cNvSpPr>
+          <p:nvPr>
+            <p:ph type="dt" sz="half" idx="10"/>
+          </p:nvPr>
+        </p:nvSpPr>
+        <p:spPr/>
+        <p:txBody>
+          <a:bodyPr/>
+          <a:lstStyle/>
+          <a:p>
+            <a:fld id="{56C2FD65-9E7B-4D88-8F49-238CE3E53071}" type="datetime1">
               <a:rPr lang="en-US" smtClean="0"/>
-              <a:t>Click to edit Master title style</a:t>
-            </a:r>
-            <a:endParaRPr lang="en-US"/>
-          </a:p>
-        </p:txBody>
-      </p:sp>
-      <p:sp>
-        <p:nvSpPr>
-          <p:cNvPr id="3" name="Date Placeholder 2"/>
-          <p:cNvSpPr>
-            <a:spLocks noGrp="1"/>
-          </p:cNvSpPr>
-          <p:nvPr>
-            <p:ph type="dt" sz="half" idx="10"/>
-          </p:nvPr>
-        </p:nvSpPr>
-        <p:spPr/>
-        <p:txBody>
-          <a:bodyPr/>
-          <a:lstStyle/>
-          <a:p>
-            <a:fld id="{5BCAD085-E8A6-8845-BD4E-CB4CCA059FC4}" type="datetimeFigureOut">
+              <a:t>4/15/2025</a:t>
+            </a:fld>
+            <a:endParaRPr lang="en-US"/>
+          </a:p>
+        </p:txBody>
+      </p:sp>
+      <p:sp>
+        <p:nvSpPr>
+          <p:cNvPr id="4" name="Footer Placeholder 3"/>
+          <p:cNvSpPr>
+            <a:spLocks noGrp="1"/>
+          </p:cNvSpPr>
+          <p:nvPr>
+            <p:ph type="ftr" sz="quarter" idx="11"/>
+          </p:nvPr>
+        </p:nvSpPr>
+        <p:spPr/>
+        <p:txBody>
+          <a:bodyPr/>
+          <a:lstStyle/>
+          <a:p>
+            <a:r>
               <a:rPr lang="en-US" smtClean="0"/>
-              <a:t>4/14/2025</a:t>
-            </a:fld>
-            <a:endParaRPr lang="en-US"/>
-          </a:p>
-        </p:txBody>
-      </p:sp>
-      <p:sp>
-        <p:nvSpPr>
-          <p:cNvPr id="4" name="Footer Placeholder 3"/>
-          <p:cNvSpPr>
-            <a:spLocks noGrp="1"/>
-          </p:cNvSpPr>
-          <p:nvPr>
-            <p:ph type="ftr" sz="quarter" idx="11"/>
-          </p:nvPr>
-        </p:nvSpPr>
-        <p:spPr/>
-        <p:txBody>
-          <a:bodyPr/>
-          <a:lstStyle/>
-          <a:p>
+              <a:t>1-10</a:t>
+            </a:r>
             <a:endParaRPr lang="en-US"/>
           </a:p>
         </p:txBody>
@@ -1997,9 +3464,9 @@
           <a:bodyPr/>
           <a:lstStyle/>
           <a:p>
-            <a:fld id="{5BCAD085-E8A6-8845-BD4E-CB4CCA059FC4}" type="datetimeFigureOut">
+            <a:fld id="{788615B6-194A-4A19-A5D5-385CD444324C}" type="datetime1">
               <a:rPr lang="en-US" smtClean="0"/>
-              <a:t>4/14/2025</a:t>
+              <a:t>4/15/2025</a:t>
             </a:fld>
             <a:endParaRPr lang="en-US"/>
           </a:p>
@@ -2020,6 +3487,10 @@
           <a:bodyPr/>
           <a:lstStyle/>
           <a:p>
+            <a:r>
+              <a:rPr lang="en-US" smtClean="0"/>
+              <a:t>1-10</a:t>
+            </a:r>
             <a:endParaRPr lang="en-US"/>
           </a:p>
         </p:txBody>
@@ -2102,10 +3573,9 @@
           </a:lstStyle>
           <a:p>
             <a:r>
-              <a:rPr lang="en-US" smtClean="0"/>
+              <a:rPr lang="en-US"/>
               <a:t>Click to edit Master title style</a:t>
             </a:r>
-            <a:endParaRPr lang="en-US"/>
           </a:p>
         </p:txBody>
       </p:sp>
@@ -2159,38 +3629,37 @@
           <a:p>
             <a:pPr lvl="0"/>
             <a:r>
-              <a:rPr lang="en-US" smtClean="0"/>
+              <a:rPr lang="en-US"/>
               <a:t>Click to edit Master text styles</a:t>
             </a:r>
           </a:p>
           <a:p>
             <a:pPr lvl="1"/>
             <a:r>
-              <a:rPr lang="en-US" smtClean="0"/>
+              <a:rPr lang="en-US"/>
               <a:t>Second level</a:t>
             </a:r>
           </a:p>
           <a:p>
             <a:pPr lvl="2"/>
             <a:r>
-              <a:rPr lang="en-US" smtClean="0"/>
+              <a:rPr lang="en-US"/>
               <a:t>Third level</a:t>
             </a:r>
           </a:p>
           <a:p>
             <a:pPr lvl="3"/>
             <a:r>
-              <a:rPr lang="en-US" smtClean="0"/>
+              <a:rPr lang="en-US"/>
               <a:t>Fourth level</a:t>
             </a:r>
           </a:p>
           <a:p>
             <a:pPr lvl="4"/>
             <a:r>
-              <a:rPr lang="en-US" smtClean="0"/>
+              <a:rPr lang="en-US"/>
               <a:t>Fifth level</a:t>
             </a:r>
-            <a:endParaRPr lang="en-US"/>
           </a:p>
         </p:txBody>
       </p:sp>
@@ -2253,50 +3722,54 @@
           <a:p>
             <a:pPr lvl="0"/>
             <a:r>
+              <a:rPr lang="en-US"/>
+              <a:t>Click to edit Master text styles</a:t>
+            </a:r>
+          </a:p>
+        </p:txBody>
+      </p:sp>
+      <p:sp>
+        <p:nvSpPr>
+          <p:cNvPr id="5" name="Date Placeholder 4"/>
+          <p:cNvSpPr>
+            <a:spLocks noGrp="1"/>
+          </p:cNvSpPr>
+          <p:nvPr>
+            <p:ph type="dt" sz="half" idx="10"/>
+          </p:nvPr>
+        </p:nvSpPr>
+        <p:spPr/>
+        <p:txBody>
+          <a:bodyPr/>
+          <a:lstStyle/>
+          <a:p>
+            <a:fld id="{F05E1ED2-FBF2-46BF-B58B-5C74BBAD1478}" type="datetime1">
               <a:rPr lang="en-US" smtClean="0"/>
-              <a:t>Click to edit Master text styles</a:t>
-            </a:r>
-          </a:p>
-        </p:txBody>
-      </p:sp>
-      <p:sp>
-        <p:nvSpPr>
-          <p:cNvPr id="5" name="Date Placeholder 4"/>
-          <p:cNvSpPr>
-            <a:spLocks noGrp="1"/>
-          </p:cNvSpPr>
-          <p:nvPr>
-            <p:ph type="dt" sz="half" idx="10"/>
-          </p:nvPr>
-        </p:nvSpPr>
-        <p:spPr/>
-        <p:txBody>
-          <a:bodyPr/>
-          <a:lstStyle/>
-          <a:p>
-            <a:fld id="{5BCAD085-E8A6-8845-BD4E-CB4CCA059FC4}" type="datetimeFigureOut">
+              <a:t>4/15/2025</a:t>
+            </a:fld>
+            <a:endParaRPr lang="en-US"/>
+          </a:p>
+        </p:txBody>
+      </p:sp>
+      <p:sp>
+        <p:nvSpPr>
+          <p:cNvPr id="6" name="Footer Placeholder 5"/>
+          <p:cNvSpPr>
+            <a:spLocks noGrp="1"/>
+          </p:cNvSpPr>
+          <p:nvPr>
+            <p:ph type="ftr" sz="quarter" idx="11"/>
+          </p:nvPr>
+        </p:nvSpPr>
+        <p:spPr/>
+        <p:txBody>
+          <a:bodyPr/>
+          <a:lstStyle/>
+          <a:p>
+            <a:r>
               <a:rPr lang="en-US" smtClean="0"/>
-              <a:t>4/14/2025</a:t>
-            </a:fld>
-            <a:endParaRPr lang="en-US"/>
-          </a:p>
-        </p:txBody>
-      </p:sp>
-      <p:sp>
-        <p:nvSpPr>
-          <p:cNvPr id="6" name="Footer Placeholder 5"/>
-          <p:cNvSpPr>
-            <a:spLocks noGrp="1"/>
-          </p:cNvSpPr>
-          <p:nvPr>
-            <p:ph type="ftr" sz="quarter" idx="11"/>
-          </p:nvPr>
-        </p:nvSpPr>
-        <p:spPr/>
-        <p:txBody>
-          <a:bodyPr/>
-          <a:lstStyle/>
-          <a:p>
+              <a:t>1-10</a:t>
+            </a:r>
             <a:endParaRPr lang="en-US"/>
           </a:p>
         </p:txBody>
@@ -2379,10 +3852,9 @@
           </a:lstStyle>
           <a:p>
             <a:r>
-              <a:rPr lang="en-US" smtClean="0"/>
+              <a:rPr lang="en-US"/>
               <a:t>Click to edit Master title style</a:t>
             </a:r>
-            <a:endParaRPr lang="en-US"/>
           </a:p>
         </p:txBody>
       </p:sp>
@@ -2506,50 +3978,54 @@
           <a:p>
             <a:pPr lvl="0"/>
             <a:r>
+              <a:rPr lang="en-US"/>
+              <a:t>Click to edit Master text styles</a:t>
+            </a:r>
+          </a:p>
+        </p:txBody>
+      </p:sp>
+      <p:sp>
+        <p:nvSpPr>
+          <p:cNvPr id="5" name="Date Placeholder 4"/>
+          <p:cNvSpPr>
+            <a:spLocks noGrp="1"/>
+          </p:cNvSpPr>
+          <p:nvPr>
+            <p:ph type="dt" sz="half" idx="10"/>
+          </p:nvPr>
+        </p:nvSpPr>
+        <p:spPr/>
+        <p:txBody>
+          <a:bodyPr/>
+          <a:lstStyle/>
+          <a:p>
+            <a:fld id="{891CDDE5-C1DD-4D54-82B8-1D16C75A1614}" type="datetime1">
               <a:rPr lang="en-US" smtClean="0"/>
-              <a:t>Click to edit Master text styles</a:t>
-            </a:r>
-          </a:p>
-        </p:txBody>
-      </p:sp>
-      <p:sp>
-        <p:nvSpPr>
-          <p:cNvPr id="5" name="Date Placeholder 4"/>
-          <p:cNvSpPr>
-            <a:spLocks noGrp="1"/>
-          </p:cNvSpPr>
-          <p:nvPr>
-            <p:ph type="dt" sz="half" idx="10"/>
-          </p:nvPr>
-        </p:nvSpPr>
-        <p:spPr/>
-        <p:txBody>
-          <a:bodyPr/>
-          <a:lstStyle/>
-          <a:p>
-            <a:fld id="{5BCAD085-E8A6-8845-BD4E-CB4CCA059FC4}" type="datetimeFigureOut">
+              <a:t>4/15/2025</a:t>
+            </a:fld>
+            <a:endParaRPr lang="en-US"/>
+          </a:p>
+        </p:txBody>
+      </p:sp>
+      <p:sp>
+        <p:nvSpPr>
+          <p:cNvPr id="6" name="Footer Placeholder 5"/>
+          <p:cNvSpPr>
+            <a:spLocks noGrp="1"/>
+          </p:cNvSpPr>
+          <p:nvPr>
+            <p:ph type="ftr" sz="quarter" idx="11"/>
+          </p:nvPr>
+        </p:nvSpPr>
+        <p:spPr/>
+        <p:txBody>
+          <a:bodyPr/>
+          <a:lstStyle/>
+          <a:p>
+            <a:r>
               <a:rPr lang="en-US" smtClean="0"/>
-              <a:t>4/14/2025</a:t>
-            </a:fld>
-            <a:endParaRPr lang="en-US"/>
-          </a:p>
-        </p:txBody>
-      </p:sp>
-      <p:sp>
-        <p:nvSpPr>
-          <p:cNvPr id="6" name="Footer Placeholder 5"/>
-          <p:cNvSpPr>
-            <a:spLocks noGrp="1"/>
-          </p:cNvSpPr>
-          <p:nvPr>
-            <p:ph type="ftr" sz="quarter" idx="11"/>
-          </p:nvPr>
-        </p:nvSpPr>
-        <p:spPr/>
-        <p:txBody>
-          <a:bodyPr/>
-          <a:lstStyle/>
-          <a:p>
+              <a:t>1-10</a:t>
+            </a:r>
             <a:endParaRPr lang="en-US"/>
           </a:p>
         </p:txBody>
@@ -2638,10 +4114,9 @@
           <a:lstStyle/>
           <a:p>
             <a:r>
-              <a:rPr lang="en-US" smtClean="0"/>
+              <a:rPr lang="en-US"/>
               <a:t>Click to edit Master title style</a:t>
             </a:r>
-            <a:endParaRPr lang="en-US"/>
           </a:p>
         </p:txBody>
       </p:sp>
@@ -2672,38 +4147,37 @@
           <a:p>
             <a:pPr lvl="0"/>
             <a:r>
-              <a:rPr lang="en-US" smtClean="0"/>
+              <a:rPr lang="en-US"/>
               <a:t>Click to edit Master text styles</a:t>
             </a:r>
           </a:p>
           <a:p>
             <a:pPr lvl="1"/>
             <a:r>
-              <a:rPr lang="en-US" smtClean="0"/>
+              <a:rPr lang="en-US"/>
               <a:t>Second level</a:t>
             </a:r>
           </a:p>
           <a:p>
             <a:pPr lvl="2"/>
             <a:r>
-              <a:rPr lang="en-US" smtClean="0"/>
+              <a:rPr lang="en-US"/>
               <a:t>Third level</a:t>
             </a:r>
           </a:p>
           <a:p>
             <a:pPr lvl="3"/>
             <a:r>
-              <a:rPr lang="en-US" smtClean="0"/>
+              <a:rPr lang="en-US"/>
               <a:t>Fourth level</a:t>
             </a:r>
           </a:p>
           <a:p>
             <a:pPr lvl="4"/>
             <a:r>
-              <a:rPr lang="en-US" smtClean="0"/>
+              <a:rPr lang="en-US"/>
               <a:t>Fifth level</a:t>
             </a:r>
-            <a:endParaRPr lang="en-US"/>
           </a:p>
         </p:txBody>
       </p:sp>
@@ -2740,9 +4214,9 @@
             </a:lvl1pPr>
           </a:lstStyle>
           <a:p>
-            <a:fld id="{5BCAD085-E8A6-8845-BD4E-CB4CCA059FC4}" type="datetimeFigureOut">
+            <a:fld id="{1CCF542B-21D5-406A-8F8A-CA90C817F293}" type="datetime1">
               <a:rPr lang="en-US" smtClean="0"/>
-              <a:t>4/14/2025</a:t>
+              <a:t>4/15/2025</a:t>
             </a:fld>
             <a:endParaRPr lang="en-US"/>
           </a:p>
@@ -2781,6 +4255,10 @@
             </a:lvl1pPr>
           </a:lstStyle>
           <a:p>
+            <a:r>
+              <a:rPr lang="en-US" smtClean="0"/>
+              <a:t>1-10</a:t>
+            </a:r>
             <a:endParaRPr lang="en-US"/>
           </a:p>
         </p:txBody>
@@ -2847,6 +4325,7 @@
     <p:sldLayoutId id="2147483658" r:id="rId10"/>
     <p:sldLayoutId id="2147483659" r:id="rId11"/>
   </p:sldLayoutIdLst>
+  <p:hf sldNum="0" hdr="0" ftr="0" dt="0"/>
   <p:txStyles>
     <p:titleStyle>
       <a:lvl1pPr algn="ctr" defTabSz="457200" rtl="0" eaLnBrk="1" latinLnBrk="0" hangingPunct="1">
@@ -3198,6 +4677,429 @@
   <p:clrMapOvr>
     <a:masterClrMapping/>
   </p:clrMapOvr>
+  <p:timing>
+    <p:tnLst>
+      <p:par>
+        <p:cTn id="1" dur="indefinite" restart="never" nodeType="tmRoot"/>
+      </p:par>
+    </p:tnLst>
+  </p:timing>
+</p:sld>
+</file>
+
+<file path=ppt/slides/slide10.xml><?xml version="1.0" encoding="utf-8"?>
+<p:sld xmlns:a="http://schemas.openxmlformats.org/drawingml/2006/main" xmlns:r="http://schemas.openxmlformats.org/officeDocument/2006/relationships" xmlns:p="http://schemas.openxmlformats.org/presentationml/2006/main">
+  <p:cSld>
+    <p:spTree>
+      <p:nvGrpSpPr>
+        <p:cNvPr id="1" name=""/>
+        <p:cNvGrpSpPr/>
+        <p:nvPr/>
+      </p:nvGrpSpPr>
+      <p:grpSpPr>
+        <a:xfrm>
+          <a:off x="0" y="0"/>
+          <a:ext cx="0" cy="0"/>
+          <a:chOff x="0" y="0"/>
+          <a:chExt cx="0" cy="0"/>
+        </a:xfrm>
+      </p:grpSpPr>
+      <p:sp>
+        <p:nvSpPr>
+          <p:cNvPr id="2" name="Title 1"/>
+          <p:cNvSpPr>
+            <a:spLocks noGrp="1"/>
+          </p:cNvSpPr>
+          <p:nvPr>
+            <p:ph type="title"/>
+          </p:nvPr>
+        </p:nvSpPr>
+        <p:spPr/>
+        <p:txBody>
+          <a:bodyPr/>
+          <a:lstStyle/>
+          <a:p>
+            <a:r>
+              <a:rPr dirty="0"/>
+              <a:t>Model &amp; Analysis</a:t>
+            </a:r>
+          </a:p>
+        </p:txBody>
+      </p:sp>
+      <p:sp>
+        <p:nvSpPr>
+          <p:cNvPr id="3" name="Content Placeholder 2"/>
+          <p:cNvSpPr>
+            <a:spLocks noGrp="1"/>
+          </p:cNvSpPr>
+          <p:nvPr>
+            <p:ph idx="1"/>
+          </p:nvPr>
+        </p:nvSpPr>
+        <p:spPr>
+          <a:xfrm>
+            <a:off x="457200" y="1600201"/>
+            <a:ext cx="8229600" cy="3944758"/>
+          </a:xfrm>
+        </p:spPr>
+        <p:txBody>
+          <a:bodyPr>
+            <a:normAutofit/>
+          </a:bodyPr>
+          <a:lstStyle/>
+          <a:p>
+            <a:r>
+              <a:rPr sz="2000" dirty="0"/>
+              <a:t>- Cleaned all missing data (used imputation or dropped high-missing columns)</a:t>
+            </a:r>
+          </a:p>
+          <a:p>
+            <a:r>
+              <a:rPr sz="2000" dirty="0"/>
+              <a:t>- Used logistic regression and feature importance to analyze impact</a:t>
+            </a:r>
+          </a:p>
+          <a:p>
+            <a:endParaRPr sz="2000" dirty="0"/>
+          </a:p>
+          <a:p>
+            <a:r>
+              <a:rPr sz="2000" b="1" dirty="0"/>
+              <a:t>Important </a:t>
+            </a:r>
+            <a:r>
+              <a:rPr lang="en-GB" sz="2000" b="1" dirty="0" smtClean="0"/>
+              <a:t>Analysis</a:t>
+            </a:r>
+            <a:r>
+              <a:rPr sz="2000" b="1" dirty="0" smtClean="0"/>
+              <a:t>:</a:t>
+            </a:r>
+            <a:endParaRPr sz="2000" b="1" dirty="0"/>
+          </a:p>
+          <a:p>
+            <a:r>
+              <a:rPr sz="2000" dirty="0"/>
+              <a:t>- Doctor recommendation (47.5%)</a:t>
+            </a:r>
+          </a:p>
+          <a:p>
+            <a:r>
+              <a:rPr sz="2000" dirty="0"/>
+              <a:t>- </a:t>
+            </a:r>
+            <a:r>
+              <a:rPr sz="2000" dirty="0" smtClean="0"/>
+              <a:t>H1N1</a:t>
+            </a:r>
+            <a:r>
+              <a:rPr lang="en-GB" sz="2000" dirty="0" smtClean="0"/>
+              <a:t> Virus</a:t>
+            </a:r>
+            <a:r>
+              <a:rPr sz="2000" dirty="0" smtClean="0"/>
+              <a:t> </a:t>
+            </a:r>
+            <a:r>
+              <a:rPr sz="2000" dirty="0"/>
+              <a:t>concern (57.2%)</a:t>
+            </a:r>
+          </a:p>
+          <a:p>
+            <a:r>
+              <a:rPr sz="2000" dirty="0"/>
+              <a:t>- Vaccine effectiveness belief</a:t>
+            </a:r>
+          </a:p>
+          <a:p>
+            <a:r>
+              <a:rPr sz="2000" dirty="0"/>
+              <a:t>- </a:t>
+            </a:r>
+            <a:r>
+              <a:rPr lang="en-GB" sz="2000" dirty="0" smtClean="0"/>
+              <a:t>Preventive Antiviral Medical Usage (4.9%)</a:t>
+            </a:r>
+          </a:p>
+          <a:p>
+            <a:r>
+              <a:rPr lang="en-GB" sz="2000" dirty="0" smtClean="0"/>
+              <a:t>- </a:t>
+            </a:r>
+            <a:r>
+              <a:rPr sz="2000" dirty="0" smtClean="0"/>
+              <a:t>Chronic conditions</a:t>
+            </a:r>
+            <a:r>
+              <a:rPr lang="en-GB" sz="2000" dirty="0" smtClean="0"/>
+              <a:t> (28.3%)</a:t>
+            </a:r>
+            <a:endParaRPr sz="2000" dirty="0"/>
+          </a:p>
+        </p:txBody>
+      </p:sp>
+      <p:sp>
+        <p:nvSpPr>
+          <p:cNvPr id="7" name="Footer Placeholder 6"/>
+          <p:cNvSpPr>
+            <a:spLocks noGrp="1"/>
+          </p:cNvSpPr>
+          <p:nvPr>
+            <p:ph type="ftr" sz="quarter" idx="11"/>
+          </p:nvPr>
+        </p:nvSpPr>
+        <p:spPr/>
+        <p:txBody>
+          <a:bodyPr/>
+          <a:lstStyle/>
+          <a:p>
+            <a:r>
+              <a:rPr lang="en-US" smtClean="0"/>
+              <a:t>9-10</a:t>
+            </a:r>
+            <a:endParaRPr lang="en-US"/>
+          </a:p>
+        </p:txBody>
+      </p:sp>
+    </p:spTree>
+  </p:cSld>
+  <p:clrMapOvr>
+    <a:masterClrMapping/>
+  </p:clrMapOvr>
+  <p:timing>
+    <p:tnLst>
+      <p:par>
+        <p:cTn id="1" dur="indefinite" restart="never" nodeType="tmRoot"/>
+      </p:par>
+    </p:tnLst>
+  </p:timing>
+</p:sld>
+</file>
+
+<file path=ppt/slides/slide11.xml><?xml version="1.0" encoding="utf-8"?>
+<p:sld xmlns:a="http://schemas.openxmlformats.org/drawingml/2006/main" xmlns:r="http://schemas.openxmlformats.org/officeDocument/2006/relationships" xmlns:p="http://schemas.openxmlformats.org/presentationml/2006/main">
+  <p:cSld>
+    <p:spTree>
+      <p:nvGrpSpPr>
+        <p:cNvPr id="1" name=""/>
+        <p:cNvGrpSpPr/>
+        <p:nvPr/>
+      </p:nvGrpSpPr>
+      <p:grpSpPr>
+        <a:xfrm>
+          <a:off x="0" y="0"/>
+          <a:ext cx="0" cy="0"/>
+          <a:chOff x="0" y="0"/>
+          <a:chExt cx="0" cy="0"/>
+        </a:xfrm>
+      </p:grpSpPr>
+      <p:sp>
+        <p:nvSpPr>
+          <p:cNvPr id="2" name="Title 1"/>
+          <p:cNvSpPr>
+            <a:spLocks noGrp="1"/>
+          </p:cNvSpPr>
+          <p:nvPr>
+            <p:ph type="title"/>
+          </p:nvPr>
+        </p:nvSpPr>
+        <p:spPr/>
+        <p:txBody>
+          <a:bodyPr>
+            <a:normAutofit/>
+          </a:bodyPr>
+          <a:lstStyle/>
+          <a:p>
+            <a:r>
+              <a:rPr sz="4000" dirty="0"/>
+              <a:t>Recommendations</a:t>
+            </a:r>
+          </a:p>
+        </p:txBody>
+      </p:sp>
+      <p:sp>
+        <p:nvSpPr>
+          <p:cNvPr id="3" name="Content Placeholder 2"/>
+          <p:cNvSpPr>
+            <a:spLocks noGrp="1"/>
+          </p:cNvSpPr>
+          <p:nvPr>
+            <p:ph idx="1"/>
+          </p:nvPr>
+        </p:nvSpPr>
+        <p:spPr>
+          <a:xfrm>
+            <a:off x="457200" y="1600200"/>
+            <a:ext cx="8229600" cy="2078315"/>
+          </a:xfrm>
+        </p:spPr>
+        <p:txBody>
+          <a:bodyPr>
+            <a:normAutofit/>
+          </a:bodyPr>
+          <a:lstStyle/>
+          <a:p>
+            <a:pPr marL="0" indent="0">
+              <a:buNone/>
+            </a:pPr>
+            <a:r>
+              <a:rPr sz="2000" dirty="0"/>
+              <a:t>1. Train doctors to give strong, clear vaccine advice</a:t>
+            </a:r>
+          </a:p>
+          <a:p>
+            <a:pPr marL="0" indent="0">
+              <a:buNone/>
+            </a:pPr>
+            <a:r>
+              <a:rPr sz="2000" dirty="0"/>
+              <a:t>2. Target under-vaccinated groups (50–64 year-olds)</a:t>
+            </a:r>
+          </a:p>
+          <a:p>
+            <a:pPr marL="0" indent="0">
+              <a:buNone/>
+            </a:pPr>
+            <a:r>
+              <a:rPr sz="2000" dirty="0"/>
+              <a:t>3. Use SMS campaigns and infographics</a:t>
+            </a:r>
+          </a:p>
+          <a:p>
+            <a:pPr marL="0" indent="0">
+              <a:buNone/>
+            </a:pPr>
+            <a:r>
+              <a:rPr sz="2000" dirty="0"/>
+              <a:t>4. Promote combined vaccine confidence messages</a:t>
+            </a:r>
+          </a:p>
+          <a:p>
+            <a:pPr marL="0" indent="0">
+              <a:buNone/>
+            </a:pPr>
+            <a:r>
+              <a:rPr sz="2000" dirty="0"/>
+              <a:t>5. Improve future surveys: ask about access and timing</a:t>
+            </a:r>
+          </a:p>
+        </p:txBody>
+      </p:sp>
+      <p:sp>
+        <p:nvSpPr>
+          <p:cNvPr id="4" name="Rectangle 3"/>
+          <p:cNvSpPr/>
+          <p:nvPr/>
+        </p:nvSpPr>
+        <p:spPr>
+          <a:xfrm>
+            <a:off x="346842" y="3678515"/>
+            <a:ext cx="8216086" cy="707886"/>
+          </a:xfrm>
+          <a:prstGeom prst="rect">
+            <a:avLst/>
+          </a:prstGeom>
+        </p:spPr>
+        <p:txBody>
+          <a:bodyPr wrap="square">
+            <a:spAutoFit/>
+          </a:bodyPr>
+          <a:lstStyle/>
+          <a:p>
+            <a:pPr algn="ctr"/>
+            <a:r>
+              <a:rPr lang="en-US" sz="4000" dirty="0"/>
+              <a:t>Final Thoughts</a:t>
+            </a:r>
+          </a:p>
+        </p:txBody>
+      </p:sp>
+      <p:sp>
+        <p:nvSpPr>
+          <p:cNvPr id="5" name="Rectangle 4"/>
+          <p:cNvSpPr/>
+          <p:nvPr/>
+        </p:nvSpPr>
+        <p:spPr>
+          <a:xfrm>
+            <a:off x="648637" y="4386401"/>
+            <a:ext cx="7076465" cy="1631216"/>
+          </a:xfrm>
+          <a:prstGeom prst="rect">
+            <a:avLst/>
+          </a:prstGeom>
+        </p:spPr>
+        <p:txBody>
+          <a:bodyPr wrap="square">
+            <a:spAutoFit/>
+          </a:bodyPr>
+          <a:lstStyle/>
+          <a:p>
+            <a:pPr algn="just"/>
+            <a:r>
+              <a:rPr lang="en-GB" sz="2000" dirty="0"/>
+              <a:t>✅ Machine learning can help target interventions</a:t>
+            </a:r>
+          </a:p>
+          <a:p>
+            <a:pPr algn="just"/>
+            <a:endParaRPr lang="en-GB" sz="2000" dirty="0"/>
+          </a:p>
+          <a:p>
+            <a:pPr algn="just"/>
+            <a:r>
+              <a:rPr lang="en-GB" sz="2000" dirty="0"/>
+              <a:t>✅ Beliefs and doctor input matter more than demographics</a:t>
+            </a:r>
+          </a:p>
+          <a:p>
+            <a:pPr algn="just"/>
+            <a:endParaRPr lang="en-GB" sz="2000" dirty="0"/>
+          </a:p>
+          <a:p>
+            <a:pPr algn="just"/>
+            <a:r>
+              <a:rPr lang="en-GB" sz="2000" dirty="0"/>
+              <a:t>📢 Next step: Build prediction tool for clinics</a:t>
+            </a:r>
+          </a:p>
+        </p:txBody>
+      </p:sp>
+      <p:sp>
+        <p:nvSpPr>
+          <p:cNvPr id="9" name="Footer Placeholder 8"/>
+          <p:cNvSpPr>
+            <a:spLocks noGrp="1"/>
+          </p:cNvSpPr>
+          <p:nvPr>
+            <p:ph type="ftr" sz="quarter" idx="11"/>
+          </p:nvPr>
+        </p:nvSpPr>
+        <p:spPr/>
+        <p:txBody>
+          <a:bodyPr/>
+          <a:lstStyle/>
+          <a:p>
+            <a:r>
+              <a:rPr lang="en-US" smtClean="0"/>
+              <a:t>10-10</a:t>
+            </a:r>
+            <a:endParaRPr lang="en-US"/>
+          </a:p>
+        </p:txBody>
+      </p:sp>
+    </p:spTree>
+  </p:cSld>
+  <p:clrMapOvr>
+    <a:masterClrMapping/>
+  </p:clrMapOvr>
+  <p:timing>
+    <p:tnLst>
+      <p:par>
+        <p:cTn id="1" dur="indefinite" restart="never" nodeType="tmRoot"/>
+      </p:par>
+    </p:tnLst>
+  </p:timing>
 </p:sld>
 </file>
 
@@ -3317,11 +5219,41 @@
           </a:p>
         </p:txBody>
       </p:sp>
+      <p:sp>
+        <p:nvSpPr>
+          <p:cNvPr id="7" name="Footer Placeholder 6"/>
+          <p:cNvSpPr>
+            <a:spLocks noGrp="1"/>
+          </p:cNvSpPr>
+          <p:nvPr>
+            <p:ph type="ftr" sz="quarter" idx="11"/>
+          </p:nvPr>
+        </p:nvSpPr>
+        <p:spPr/>
+        <p:txBody>
+          <a:bodyPr/>
+          <a:lstStyle/>
+          <a:p>
+            <a:r>
+              <a:rPr lang="en-US" smtClean="0"/>
+              <a:t>1-10</a:t>
+            </a:r>
+            <a:endParaRPr lang="en-US"/>
+          </a:p>
+        </p:txBody>
+      </p:sp>
     </p:spTree>
   </p:cSld>
   <p:clrMapOvr>
     <a:masterClrMapping/>
   </p:clrMapOvr>
+  <p:timing>
+    <p:tnLst>
+      <p:par>
+        <p:cTn id="1" dur="indefinite" restart="never" nodeType="tmRoot"/>
+      </p:par>
+    </p:tnLst>
+  </p:timing>
 </p:sld>
 </file>
 
@@ -3406,23 +5338,15 @@
           <a:p>
             <a:r>
               <a:rPr sz="2000" dirty="0"/>
-              <a:t>- Demographics (age, education</a:t>
-            </a:r>
-            <a:r>
-              <a:rPr sz="2000" dirty="0" smtClean="0"/>
-              <a:t>,</a:t>
-            </a:r>
-            <a:r>
-              <a:rPr lang="en-US" sz="2000" dirty="0" smtClean="0"/>
+              <a:t>- Demographics (age, education,</a:t>
+            </a:r>
+            <a:r>
+              <a:rPr lang="en-US" sz="2000" dirty="0"/>
               <a:t> race, gender,</a:t>
             </a:r>
             <a:r>
-              <a:rPr sz="2000" dirty="0" smtClean="0"/>
-              <a:t> </a:t>
-            </a:r>
-            <a:r>
               <a:rPr sz="2000" dirty="0"/>
-              <a:t>etc.)</a:t>
+              <a:t> etc.)</a:t>
             </a:r>
           </a:p>
           <a:p>
@@ -3449,6 +5373,52 @@
               <a:rPr sz="2000" dirty="0"/>
               <a:t>Missing data in some columns (up to 50%)</a:t>
             </a:r>
+          </a:p>
+        </p:txBody>
+      </p:sp>
+      <p:sp>
+        <p:nvSpPr>
+          <p:cNvPr id="7" name="Footer Placeholder 6"/>
+          <p:cNvSpPr>
+            <a:spLocks noGrp="1"/>
+          </p:cNvSpPr>
+          <p:nvPr>
+            <p:ph type="ftr" sz="quarter" idx="11"/>
+          </p:nvPr>
+        </p:nvSpPr>
+        <p:spPr/>
+        <p:txBody>
+          <a:bodyPr/>
+          <a:lstStyle/>
+          <a:p>
+            <a:r>
+              <a:rPr lang="en-US" smtClean="0"/>
+              <a:t>2-10</a:t>
+            </a:r>
+            <a:endParaRPr lang="en-US"/>
+          </a:p>
+        </p:txBody>
+      </p:sp>
+      <p:sp>
+        <p:nvSpPr>
+          <p:cNvPr id="8" name="Slide Number Placeholder 7"/>
+          <p:cNvSpPr>
+            <a:spLocks noGrp="1"/>
+          </p:cNvSpPr>
+          <p:nvPr>
+            <p:ph type="sldNum" sz="quarter" idx="12"/>
+          </p:nvPr>
+        </p:nvSpPr>
+        <p:spPr/>
+        <p:txBody>
+          <a:bodyPr/>
+          <a:lstStyle/>
+          <a:p>
+            <a:fld id="{C1FF6DA9-008F-8B48-92A6-B652298478BF}" type="slidenum">
+              <a:rPr lang="en-US" smtClean="0"/>
+              <a:t>3</a:t>
+            </a:fld>
+            <a:endParaRPr lang="en-US"/>
           </a:p>
         </p:txBody>
       </p:sp>
@@ -3457,15 +5427,36 @@
   <p:clrMapOvr>
     <a:masterClrMapping/>
   </p:clrMapOvr>
+  <p:timing>
+    <p:tnLst>
+      <p:par>
+        <p:cTn id="1" dur="indefinite" restart="never" nodeType="tmRoot"/>
+      </p:par>
+    </p:tnLst>
+  </p:timing>
 </p:sld>
 </file>
 
 <file path=ppt/slides/slide4.xml><?xml version="1.0" encoding="utf-8"?>
 <p:sld xmlns:a="http://schemas.openxmlformats.org/drawingml/2006/main" xmlns:r="http://schemas.openxmlformats.org/officeDocument/2006/relationships" xmlns:p="http://schemas.openxmlformats.org/presentationml/2006/main">
   <p:cSld>
+    <p:bg>
+      <p:bgPr>
+        <a:solidFill>
+          <a:schemeClr val="bg1"/>
+        </a:solidFill>
+        <a:effectLst/>
+      </p:bgPr>
+    </p:bg>
     <p:spTree>
       <p:nvGrpSpPr>
-        <p:cNvPr id="1" name=""/>
+        <p:cNvPr id="1" name="">
+          <a:extLst>
+            <a:ext uri="{FF2B5EF4-FFF2-40B4-BE49-F238E27FC236}">
+              <a16:creationId xmlns="" xmlns:a16="http://schemas.microsoft.com/office/drawing/2014/main" id="{B2B19A18-EB17-47D1-456A-E2236EE982BB}"/>
+            </a:ext>
+          </a:extLst>
+        </p:cNvPr>
         <p:cNvGrpSpPr/>
         <p:nvPr/>
       </p:nvGrpSpPr>
@@ -3477,95 +5468,908 @@
           <a:chExt cx="0" cy="0"/>
         </a:xfrm>
       </p:grpSpPr>
-      <p:sp>
-        <p:nvSpPr>
-          <p:cNvPr id="2" name="Title 1"/>
-          <p:cNvSpPr>
-            <a:spLocks noGrp="1"/>
-          </p:cNvSpPr>
-          <p:nvPr>
-            <p:ph type="title"/>
-          </p:nvPr>
-        </p:nvSpPr>
-        <p:spPr/>
-        <p:txBody>
-          <a:bodyPr/>
-          <a:lstStyle/>
-          <a:p>
-            <a:r>
-              <a:t>Key Findings</a:t>
-            </a:r>
-          </a:p>
-        </p:txBody>
-      </p:sp>
-      <p:sp>
-        <p:nvSpPr>
-          <p:cNvPr id="3" name="Content Placeholder 2"/>
-          <p:cNvSpPr>
-            <a:spLocks noGrp="1"/>
-          </p:cNvSpPr>
-          <p:nvPr>
-            <p:ph idx="1"/>
+      <p:sp useBgFill="1">
+        <p:nvSpPr>
+          <p:cNvPr id="28" name="Rectangle 27">
+            <a:extLst>
+              <a:ext uri="{FF2B5EF4-FFF2-40B4-BE49-F238E27FC236}">
+                <a16:creationId xmlns="" xmlns:a16="http://schemas.microsoft.com/office/drawing/2014/main" id="{69D47016-023F-44BD-981C-50E7A10A6609}"/>
+              </a:ext>
+              <a:ext uri="{C183D7F6-B498-43B3-948B-1728B52AA6E4}">
+                <adec:decorative xmlns="" xmlns:adec="http://schemas.microsoft.com/office/drawing/2017/decorative" val="1"/>
+              </a:ext>
+            </a:extLst>
+          </p:cNvPr>
+          <p:cNvSpPr>
+            <a:spLocks noGrp="1" noRot="1" noChangeAspect="1" noMove="1" noResize="1" noEditPoints="1" noAdjustHandles="1" noChangeArrowheads="1" noChangeShapeType="1" noTextEdit="1"/>
+          </p:cNvSpPr>
+          <p:nvPr>
+            <p:extLst>
+              <p:ext uri="{386F3935-93C4-4BCD-93E2-E3B085C9AB24}">
+                <p16:designElem xmlns="" xmlns:p16="http://schemas.microsoft.com/office/powerpoint/2015/main" val="1"/>
+              </p:ext>
+            </p:extLst>
           </p:nvPr>
         </p:nvSpPr>
         <p:spPr>
           <a:xfrm>
-            <a:off x="457201" y="1600200"/>
-            <a:ext cx="3803994" cy="3985298"/>
+            <a:off x="0" y="0"/>
+            <a:ext cx="9141714" cy="6858000"/>
+          </a:xfrm>
+          <a:prstGeom prst="rect">
+            <a:avLst/>
+          </a:prstGeom>
+          <a:ln>
+            <a:noFill/>
+          </a:ln>
+        </p:spPr>
+        <p:style>
+          <a:lnRef idx="2">
+            <a:schemeClr val="accent1">
+              <a:shade val="50000"/>
+            </a:schemeClr>
+          </a:lnRef>
+          <a:fillRef idx="1">
+            <a:schemeClr val="accent1"/>
+          </a:fillRef>
+          <a:effectRef idx="0">
+            <a:schemeClr val="accent1"/>
+          </a:effectRef>
+          <a:fontRef idx="minor">
+            <a:schemeClr val="lt1"/>
+          </a:fontRef>
+        </p:style>
+        <p:txBody>
+          <a:bodyPr rtlCol="0" anchor="ctr"/>
+          <a:lstStyle/>
+          <a:p>
+            <a:pPr algn="ctr"/>
+            <a:endParaRPr lang="en-US" dirty="0"/>
+          </a:p>
+        </p:txBody>
+      </p:sp>
+      <p:sp>
+        <p:nvSpPr>
+          <p:cNvPr id="2" name="Title 1">
+            <a:extLst>
+              <a:ext uri="{FF2B5EF4-FFF2-40B4-BE49-F238E27FC236}">
+                <a16:creationId xmlns="" xmlns:a16="http://schemas.microsoft.com/office/drawing/2014/main" id="{FA9C25E5-5E66-D0C9-2B1D-F144EC7DA064}"/>
+              </a:ext>
+            </a:extLst>
+          </p:cNvPr>
+          <p:cNvSpPr>
+            <a:spLocks noGrp="1"/>
+          </p:cNvSpPr>
+          <p:nvPr>
+            <p:ph type="title"/>
+          </p:nvPr>
+        </p:nvSpPr>
+        <p:spPr>
+          <a:xfrm>
+            <a:off x="473202" y="457200"/>
+            <a:ext cx="8318754" cy="1020254"/>
           </a:xfrm>
         </p:spPr>
         <p:txBody>
-          <a:bodyPr>
+          <a:bodyPr vert="horz" lIns="91440" tIns="45720" rIns="91440" bIns="45720" rtlCol="0" anchor="ctr">
             <a:normAutofit/>
           </a:bodyPr>
           <a:lstStyle/>
           <a:p>
-            <a:pPr algn="just"/>
-            <a:r>
-              <a:rPr sz="2000" dirty="0"/>
-              <a:t>- Doctor advice strongly influences vaccination</a:t>
-            </a:r>
-          </a:p>
-          <a:p>
-            <a:pPr algn="just"/>
-            <a:r>
-              <a:rPr sz="2000" dirty="0"/>
-              <a:t>- Concern about H1N1 = more handwashing</a:t>
-            </a:r>
-          </a:p>
-          <a:p>
-            <a:pPr algn="just"/>
-            <a:r>
-              <a:rPr sz="2000" dirty="0"/>
-              <a:t>- Older adults (65+) more likely to get seasonal flu shots</a:t>
-            </a:r>
-          </a:p>
-          <a:p>
-            <a:pPr algn="just"/>
-            <a:r>
-              <a:rPr sz="2000" dirty="0"/>
-              <a:t>- Education affects knowledge, but not always behavior</a:t>
-            </a:r>
-          </a:p>
-          <a:p>
-            <a:pPr algn="just"/>
-            <a:r>
-              <a:rPr sz="2000" dirty="0"/>
-              <a:t>- Some expected factors (income, age) were less predictive</a:t>
-            </a:r>
+            <a:pPr defTabSz="914400">
+              <a:lnSpc>
+                <a:spcPct val="90000"/>
+              </a:lnSpc>
+            </a:pPr>
+            <a:r>
+              <a:rPr lang="en-US" dirty="0"/>
+              <a:t>Visuals Of </a:t>
+            </a:r>
+            <a:r>
+              <a:rPr lang="en-US" dirty="0" smtClean="0"/>
+              <a:t>Race &amp; Age Distributions</a:t>
+            </a:r>
+            <a:endParaRPr lang="en-US" dirty="0"/>
           </a:p>
         </p:txBody>
       </p:sp>
       <p:pic>
         <p:nvPicPr>
-          <p:cNvPr id="4" name="Picture 3"/>
+          <p:cNvPr id="12" name="Content Placeholder 11" descr="A pie chart with different colored triangles&#10;&#10;AI-generated content may be incorrect.">
+            <a:extLst>
+              <a:ext uri="{FF2B5EF4-FFF2-40B4-BE49-F238E27FC236}">
+                <a16:creationId xmlns="" xmlns:a16="http://schemas.microsoft.com/office/drawing/2014/main" id="{C4A9B491-01DE-8402-1DFA-8BEF3E484457}"/>
+              </a:ext>
+            </a:extLst>
+          </p:cNvPr>
           <p:cNvPicPr>
-            <a:picLocks noChangeAspect="1"/>
+            <a:picLocks noGrp="1" noChangeAspect="1"/>
           </p:cNvPicPr>
-          <p:nvPr/>
+          <p:nvPr>
+            <p:ph sz="half" idx="2"/>
+          </p:nvPr>
         </p:nvPicPr>
         <p:blipFill>
-          <a:blip r:embed="rId2">
+          <a:blip r:embed="rId3"/>
+          <a:stretch>
+            <a:fillRect/>
+          </a:stretch>
+        </p:blipFill>
+        <p:spPr>
+          <a:xfrm>
+            <a:off x="330871" y="2132500"/>
+            <a:ext cx="3697423" cy="3678936"/>
+          </a:xfrm>
+          <a:prstGeom prst="rect">
+            <a:avLst/>
+          </a:prstGeom>
+        </p:spPr>
+      </p:pic>
+      <p:sp>
+        <p:nvSpPr>
+          <p:cNvPr id="6" name="sketch line">
+            <a:extLst>
+              <a:ext uri="{FF2B5EF4-FFF2-40B4-BE49-F238E27FC236}">
+                <a16:creationId xmlns="" xmlns:a16="http://schemas.microsoft.com/office/drawing/2014/main" id="{D6A9C53F-5F90-40A5-8C85-5412D39C8C68}"/>
+              </a:ext>
+              <a:ext uri="{C183D7F6-B498-43B3-948B-1728B52AA6E4}">
+                <adec:decorative xmlns="" xmlns:adec="http://schemas.microsoft.com/office/drawing/2017/decorative" val="1"/>
+              </a:ext>
+            </a:extLst>
+          </p:cNvPr>
+          <p:cNvSpPr>
+            <a:spLocks noGrp="1" noRot="1" noChangeAspect="1" noMove="1" noResize="1" noEditPoints="1" noAdjustHandles="1" noChangeArrowheads="1" noChangeShapeType="1" noTextEdit="1"/>
+          </p:cNvSpPr>
+          <p:nvPr>
+            <p:extLst>
+              <p:ext uri="{386F3935-93C4-4BCD-93E2-E3B085C9AB24}">
+                <p16:designElem xmlns="" xmlns:p16="http://schemas.microsoft.com/office/powerpoint/2015/main" val="1"/>
+              </p:ext>
+            </p:extLst>
+          </p:nvPr>
+        </p:nvSpPr>
+        <p:spPr>
+          <a:xfrm>
+            <a:off x="3337560" y="1850683"/>
+            <a:ext cx="2468880" cy="18288"/>
+          </a:xfrm>
+          <a:custGeom>
+            <a:avLst/>
+            <a:gdLst>
+              <a:gd name="connsiteX0" fmla="*/ 0 w 2468880"/>
+              <a:gd name="connsiteY0" fmla="*/ 0 h 18288"/>
+              <a:gd name="connsiteX1" fmla="*/ 592531 w 2468880"/>
+              <a:gd name="connsiteY1" fmla="*/ 0 h 18288"/>
+              <a:gd name="connsiteX2" fmla="*/ 1160374 w 2468880"/>
+              <a:gd name="connsiteY2" fmla="*/ 0 h 18288"/>
+              <a:gd name="connsiteX3" fmla="*/ 1728216 w 2468880"/>
+              <a:gd name="connsiteY3" fmla="*/ 0 h 18288"/>
+              <a:gd name="connsiteX4" fmla="*/ 2468880 w 2468880"/>
+              <a:gd name="connsiteY4" fmla="*/ 0 h 18288"/>
+              <a:gd name="connsiteX5" fmla="*/ 2468880 w 2468880"/>
+              <a:gd name="connsiteY5" fmla="*/ 18288 h 18288"/>
+              <a:gd name="connsiteX6" fmla="*/ 1802282 w 2468880"/>
+              <a:gd name="connsiteY6" fmla="*/ 18288 h 18288"/>
+              <a:gd name="connsiteX7" fmla="*/ 1209751 w 2468880"/>
+              <a:gd name="connsiteY7" fmla="*/ 18288 h 18288"/>
+              <a:gd name="connsiteX8" fmla="*/ 641909 w 2468880"/>
+              <a:gd name="connsiteY8" fmla="*/ 18288 h 18288"/>
+              <a:gd name="connsiteX9" fmla="*/ 0 w 2468880"/>
+              <a:gd name="connsiteY9" fmla="*/ 18288 h 18288"/>
+              <a:gd name="connsiteX10" fmla="*/ 0 w 2468880"/>
+              <a:gd name="connsiteY10" fmla="*/ 0 h 18288"/>
+            </a:gdLst>
+            <a:ahLst/>
+            <a:cxnLst>
+              <a:cxn ang="0">
+                <a:pos x="connsiteX0" y="connsiteY0"/>
+              </a:cxn>
+              <a:cxn ang="0">
+                <a:pos x="connsiteX1" y="connsiteY1"/>
+              </a:cxn>
+              <a:cxn ang="0">
+                <a:pos x="connsiteX2" y="connsiteY2"/>
+              </a:cxn>
+              <a:cxn ang="0">
+                <a:pos x="connsiteX3" y="connsiteY3"/>
+              </a:cxn>
+              <a:cxn ang="0">
+                <a:pos x="connsiteX4" y="connsiteY4"/>
+              </a:cxn>
+              <a:cxn ang="0">
+                <a:pos x="connsiteX5" y="connsiteY5"/>
+              </a:cxn>
+              <a:cxn ang="0">
+                <a:pos x="connsiteX6" y="connsiteY6"/>
+              </a:cxn>
+              <a:cxn ang="0">
+                <a:pos x="connsiteX7" y="connsiteY7"/>
+              </a:cxn>
+              <a:cxn ang="0">
+                <a:pos x="connsiteX8" y="connsiteY8"/>
+              </a:cxn>
+              <a:cxn ang="0">
+                <a:pos x="connsiteX9" y="connsiteY9"/>
+              </a:cxn>
+              <a:cxn ang="0">
+                <a:pos x="connsiteX10" y="connsiteY10"/>
+              </a:cxn>
+            </a:cxnLst>
+            <a:rect l="l" t="t" r="r" b="b"/>
+            <a:pathLst>
+              <a:path w="2468880" h="18288" fill="none" extrusionOk="0">
+                <a:moveTo>
+                  <a:pt x="0" y="0"/>
+                </a:moveTo>
+                <a:cubicBezTo>
+                  <a:pt x="171523" y="-1510"/>
+                  <a:pt x="416079" y="20036"/>
+                  <a:pt x="592531" y="0"/>
+                </a:cubicBezTo>
+                <a:cubicBezTo>
+                  <a:pt x="768983" y="-20036"/>
+                  <a:pt x="878305" y="13110"/>
+                  <a:pt x="1160374" y="0"/>
+                </a:cubicBezTo>
+                <a:cubicBezTo>
+                  <a:pt x="1442443" y="-13110"/>
+                  <a:pt x="1612108" y="24695"/>
+                  <a:pt x="1728216" y="0"/>
+                </a:cubicBezTo>
+                <a:cubicBezTo>
+                  <a:pt x="1844324" y="-24695"/>
+                  <a:pt x="2271040" y="20667"/>
+                  <a:pt x="2468880" y="0"/>
+                </a:cubicBezTo>
+                <a:cubicBezTo>
+                  <a:pt x="2468302" y="4771"/>
+                  <a:pt x="2469633" y="12323"/>
+                  <a:pt x="2468880" y="18288"/>
+                </a:cubicBezTo>
+                <a:cubicBezTo>
+                  <a:pt x="2229297" y="-14659"/>
+                  <a:pt x="2066775" y="30253"/>
+                  <a:pt x="1802282" y="18288"/>
+                </a:cubicBezTo>
+                <a:cubicBezTo>
+                  <a:pt x="1537789" y="6323"/>
+                  <a:pt x="1379930" y="22266"/>
+                  <a:pt x="1209751" y="18288"/>
+                </a:cubicBezTo>
+                <a:cubicBezTo>
+                  <a:pt x="1039572" y="14310"/>
+                  <a:pt x="837025" y="12850"/>
+                  <a:pt x="641909" y="18288"/>
+                </a:cubicBezTo>
+                <a:cubicBezTo>
+                  <a:pt x="446793" y="23726"/>
+                  <a:pt x="170561" y="18472"/>
+                  <a:pt x="0" y="18288"/>
+                </a:cubicBezTo>
+                <a:cubicBezTo>
+                  <a:pt x="841" y="12879"/>
+                  <a:pt x="-726" y="3977"/>
+                  <a:pt x="0" y="0"/>
+                </a:cubicBezTo>
+                <a:close/>
+              </a:path>
+              <a:path w="2468880" h="18288" stroke="0" extrusionOk="0">
+                <a:moveTo>
+                  <a:pt x="0" y="0"/>
+                </a:moveTo>
+                <a:cubicBezTo>
+                  <a:pt x="190931" y="24910"/>
+                  <a:pt x="333688" y="11559"/>
+                  <a:pt x="567842" y="0"/>
+                </a:cubicBezTo>
+                <a:cubicBezTo>
+                  <a:pt x="801996" y="-11559"/>
+                  <a:pt x="939971" y="-5677"/>
+                  <a:pt x="1234440" y="0"/>
+                </a:cubicBezTo>
+                <a:cubicBezTo>
+                  <a:pt x="1528909" y="5677"/>
+                  <a:pt x="1658539" y="5184"/>
+                  <a:pt x="1777594" y="0"/>
+                </a:cubicBezTo>
+                <a:cubicBezTo>
+                  <a:pt x="1896649" y="-5184"/>
+                  <a:pt x="2186164" y="23915"/>
+                  <a:pt x="2468880" y="0"/>
+                </a:cubicBezTo>
+                <a:cubicBezTo>
+                  <a:pt x="2468266" y="8857"/>
+                  <a:pt x="2469384" y="13619"/>
+                  <a:pt x="2468880" y="18288"/>
+                </a:cubicBezTo>
+                <a:cubicBezTo>
+                  <a:pt x="2271330" y="36599"/>
+                  <a:pt x="2001027" y="31554"/>
+                  <a:pt x="1876349" y="18288"/>
+                </a:cubicBezTo>
+                <a:cubicBezTo>
+                  <a:pt x="1751671" y="5022"/>
+                  <a:pt x="1364652" y="15063"/>
+                  <a:pt x="1209751" y="18288"/>
+                </a:cubicBezTo>
+                <a:cubicBezTo>
+                  <a:pt x="1054850" y="21513"/>
+                  <a:pt x="748438" y="20074"/>
+                  <a:pt x="617220" y="18288"/>
+                </a:cubicBezTo>
+                <a:cubicBezTo>
+                  <a:pt x="486002" y="16502"/>
+                  <a:pt x="237432" y="27200"/>
+                  <a:pt x="0" y="18288"/>
+                </a:cubicBezTo>
+                <a:cubicBezTo>
+                  <a:pt x="-487" y="10816"/>
+                  <a:pt x="-839" y="6058"/>
+                  <a:pt x="0" y="0"/>
+                </a:cubicBezTo>
+                <a:close/>
+              </a:path>
+            </a:pathLst>
+          </a:custGeom>
+          <a:solidFill>
+            <a:schemeClr val="accent2"/>
+          </a:solidFill>
+          <a:ln w="41275" cap="rnd">
+            <a:solidFill>
+              <a:schemeClr val="accent2"/>
+            </a:solidFill>
+            <a:round/>
+            <a:extLst>
+              <a:ext uri="{C807C97D-BFC1-408E-A445-0C87EB9F89A2}">
+                <ask:lineSketchStyleProps xmlns="" xmlns:ask="http://schemas.microsoft.com/office/drawing/2018/sketchyshapes" sd="2863741219">
+                  <a:prstGeom prst="rect">
+                    <a:avLst/>
+                  </a:prstGeom>
+                  <ask:type>
+                    <ask:lineSketchFreehand/>
+                  </ask:type>
+                </ask:lineSketchStyleProps>
+              </a:ext>
+            </a:extLst>
+          </a:ln>
+        </p:spPr>
+        <p:style>
+          <a:lnRef idx="2">
+            <a:schemeClr val="accent1">
+              <a:shade val="50000"/>
+            </a:schemeClr>
+          </a:lnRef>
+          <a:fillRef idx="1">
+            <a:schemeClr val="accent1"/>
+          </a:fillRef>
+          <a:effectRef idx="0">
+            <a:schemeClr val="accent1"/>
+          </a:effectRef>
+          <a:fontRef idx="minor">
+            <a:schemeClr val="lt1"/>
+          </a:fontRef>
+        </p:style>
+        <p:txBody>
+          <a:bodyPr rtlCol="0" anchor="ctr"/>
+          <a:lstStyle/>
+          <a:p>
+            <a:pPr algn="ctr"/>
+            <a:endParaRPr lang="en-US"/>
+          </a:p>
+        </p:txBody>
+      </p:sp>
+      <p:pic>
+        <p:nvPicPr>
+          <p:cNvPr id="10" name="Content Placeholder 9" descr="A graph with numbers and a number of persons&#10;&#10;AI-generated content may be incorrect.">
+            <a:extLst>
+              <a:ext uri="{FF2B5EF4-FFF2-40B4-BE49-F238E27FC236}">
+                <a16:creationId xmlns="" xmlns:a16="http://schemas.microsoft.com/office/drawing/2014/main" id="{24AE16AC-6079-E09A-E388-50DF57F6EBAC}"/>
+              </a:ext>
+            </a:extLst>
+          </p:cNvPr>
+          <p:cNvPicPr>
+            <a:picLocks noGrp="1" noChangeAspect="1"/>
+          </p:cNvPicPr>
+          <p:nvPr>
+            <p:ph sz="half" idx="1"/>
+          </p:nvPr>
+        </p:nvPicPr>
+        <p:blipFill>
+          <a:blip r:embed="rId4"/>
+          <a:stretch>
+            <a:fillRect/>
+          </a:stretch>
+        </p:blipFill>
+        <p:spPr>
+          <a:xfrm>
+            <a:off x="4676896" y="2132500"/>
+            <a:ext cx="4358997" cy="3842138"/>
+          </a:xfrm>
+          <a:prstGeom prst="rect">
+            <a:avLst/>
+          </a:prstGeom>
+        </p:spPr>
+      </p:pic>
+      <p:sp>
+        <p:nvSpPr>
+          <p:cNvPr id="11" name="Footer Placeholder 10"/>
+          <p:cNvSpPr>
+            <a:spLocks noGrp="1"/>
+          </p:cNvSpPr>
+          <p:nvPr>
+            <p:ph type="ftr" sz="quarter" idx="11"/>
+          </p:nvPr>
+        </p:nvSpPr>
+        <p:spPr/>
+        <p:txBody>
+          <a:bodyPr/>
+          <a:lstStyle/>
+          <a:p>
+            <a:r>
+              <a:rPr lang="en-US" smtClean="0"/>
+              <a:t>3-10</a:t>
+            </a:r>
+            <a:endParaRPr lang="en-US"/>
+          </a:p>
+        </p:txBody>
+      </p:sp>
+    </p:spTree>
+    <p:extLst>
+      <p:ext uri="{BB962C8B-B14F-4D97-AF65-F5344CB8AC3E}">
+        <p14:creationId xmlns:p14="http://schemas.microsoft.com/office/powerpoint/2010/main" val="2802226605"/>
+      </p:ext>
+    </p:extLst>
+  </p:cSld>
+  <p:clrMapOvr>
+    <a:masterClrMapping/>
+  </p:clrMapOvr>
+  <p:timing>
+    <p:tnLst>
+      <p:par>
+        <p:cTn id="1" dur="indefinite" restart="never" nodeType="tmRoot"/>
+      </p:par>
+    </p:tnLst>
+  </p:timing>
+</p:sld>
+</file>
+
+<file path=ppt/slides/slide5.xml><?xml version="1.0" encoding="utf-8"?>
+<p:sld xmlns:a="http://schemas.openxmlformats.org/drawingml/2006/main" xmlns:r="http://schemas.openxmlformats.org/officeDocument/2006/relationships" xmlns:p="http://schemas.openxmlformats.org/presentationml/2006/main">
+  <p:cSld>
+    <p:bg>
+      <p:bgPr>
+        <a:solidFill>
+          <a:schemeClr val="bg1"/>
+        </a:solidFill>
+        <a:effectLst/>
+      </p:bgPr>
+    </p:bg>
+    <p:spTree>
+      <p:nvGrpSpPr>
+        <p:cNvPr id="1" name="">
+          <a:extLst>
+            <a:ext uri="{FF2B5EF4-FFF2-40B4-BE49-F238E27FC236}">
+              <a16:creationId xmlns="" xmlns:a16="http://schemas.microsoft.com/office/drawing/2014/main" id="{33FC1DEE-427B-7ADB-AEE9-F7D604A93368}"/>
+            </a:ext>
+          </a:extLst>
+        </p:cNvPr>
+        <p:cNvGrpSpPr/>
+        <p:nvPr/>
+      </p:nvGrpSpPr>
+      <p:grpSpPr>
+        <a:xfrm>
+          <a:off x="0" y="0"/>
+          <a:ext cx="0" cy="0"/>
+          <a:chOff x="0" y="0"/>
+          <a:chExt cx="0" cy="0"/>
+        </a:xfrm>
+      </p:grpSpPr>
+      <p:sp useBgFill="1">
+        <p:nvSpPr>
+          <p:cNvPr id="29" name="Rectangle 28">
+            <a:extLst>
+              <a:ext uri="{FF2B5EF4-FFF2-40B4-BE49-F238E27FC236}">
+                <a16:creationId xmlns="" xmlns:a16="http://schemas.microsoft.com/office/drawing/2014/main" id="{C4879EFC-8E62-4E00-973C-C45EE9EC676D}"/>
+              </a:ext>
+              <a:ext uri="{C183D7F6-B498-43B3-948B-1728B52AA6E4}">
+                <adec:decorative xmlns="" xmlns:adec="http://schemas.microsoft.com/office/drawing/2017/decorative" val="1"/>
+              </a:ext>
+            </a:extLst>
+          </p:cNvPr>
+          <p:cNvSpPr>
+            <a:spLocks noGrp="1" noRot="1" noChangeAspect="1" noMove="1" noResize="1" noEditPoints="1" noAdjustHandles="1" noChangeArrowheads="1" noChangeShapeType="1" noTextEdit="1"/>
+          </p:cNvSpPr>
+          <p:nvPr>
+            <p:extLst>
+              <p:ext uri="{386F3935-93C4-4BCD-93E2-E3B085C9AB24}">
+                <p16:designElem xmlns="" xmlns:p16="http://schemas.microsoft.com/office/powerpoint/2015/main" val="1"/>
+              </p:ext>
+            </p:extLst>
+          </p:nvPr>
+        </p:nvSpPr>
+        <p:spPr>
+          <a:xfrm>
+            <a:off x="0" y="0"/>
+            <a:ext cx="9141714" cy="6858000"/>
+          </a:xfrm>
+          <a:prstGeom prst="rect">
+            <a:avLst/>
+          </a:prstGeom>
+          <a:ln>
+            <a:noFill/>
+          </a:ln>
+        </p:spPr>
+        <p:style>
+          <a:lnRef idx="2">
+            <a:schemeClr val="accent1">
+              <a:shade val="50000"/>
+            </a:schemeClr>
+          </a:lnRef>
+          <a:fillRef idx="1">
+            <a:schemeClr val="accent1"/>
+          </a:fillRef>
+          <a:effectRef idx="0">
+            <a:schemeClr val="accent1"/>
+          </a:effectRef>
+          <a:fontRef idx="minor">
+            <a:schemeClr val="lt1"/>
+          </a:fontRef>
+        </p:style>
+        <p:txBody>
+          <a:bodyPr rtlCol="0" anchor="ctr"/>
+          <a:lstStyle/>
+          <a:p>
+            <a:pPr algn="ctr"/>
+            <a:endParaRPr lang="en-US"/>
+          </a:p>
+        </p:txBody>
+      </p:sp>
+      <p:sp>
+        <p:nvSpPr>
+          <p:cNvPr id="2" name="Title 1">
+            <a:extLst>
+              <a:ext uri="{FF2B5EF4-FFF2-40B4-BE49-F238E27FC236}">
+                <a16:creationId xmlns="" xmlns:a16="http://schemas.microsoft.com/office/drawing/2014/main" id="{6D4F07FF-396A-B794-9953-3885F1D35F1E}"/>
+              </a:ext>
+            </a:extLst>
+          </p:cNvPr>
+          <p:cNvSpPr>
+            <a:spLocks noGrp="1"/>
+          </p:cNvSpPr>
+          <p:nvPr>
+            <p:ph type="title"/>
+          </p:nvPr>
+        </p:nvSpPr>
+        <p:spPr>
+          <a:xfrm>
+            <a:off x="479160" y="457200"/>
+            <a:ext cx="8182230" cy="1368614"/>
+          </a:xfrm>
+        </p:spPr>
+        <p:txBody>
+          <a:bodyPr vert="horz" lIns="91440" tIns="45720" rIns="91440" bIns="45720" rtlCol="0" anchor="ctr">
+            <a:normAutofit fontScale="90000"/>
+          </a:bodyPr>
+          <a:lstStyle/>
+          <a:p>
+            <a:pPr defTabSz="914400">
+              <a:lnSpc>
+                <a:spcPct val="90000"/>
+              </a:lnSpc>
+            </a:pPr>
+            <a:r>
+              <a:rPr lang="en-US" sz="6000" dirty="0"/>
+              <a:t>Visuals Of </a:t>
+            </a:r>
+            <a:r>
+              <a:rPr lang="en-US" sz="6000" dirty="0" smtClean="0"/>
+              <a:t>Educational Levels </a:t>
+            </a:r>
+            <a:r>
+              <a:rPr lang="en-GB" sz="6000" dirty="0" smtClean="0"/>
+              <a:t>&amp; Public Opinion</a:t>
+            </a:r>
+            <a:endParaRPr lang="en-US" sz="5700" dirty="0"/>
+          </a:p>
+        </p:txBody>
+      </p:sp>
+      <p:sp>
+        <p:nvSpPr>
+          <p:cNvPr id="31" name="sketch line">
+            <a:extLst>
+              <a:ext uri="{FF2B5EF4-FFF2-40B4-BE49-F238E27FC236}">
+                <a16:creationId xmlns="" xmlns:a16="http://schemas.microsoft.com/office/drawing/2014/main" id="{D6A9C53F-5F90-40A5-8C85-5412D39C8C68}"/>
+              </a:ext>
+              <a:ext uri="{C183D7F6-B498-43B3-948B-1728B52AA6E4}">
+                <adec:decorative xmlns="" xmlns:adec="http://schemas.microsoft.com/office/drawing/2017/decorative" val="1"/>
+              </a:ext>
+            </a:extLst>
+          </p:cNvPr>
+          <p:cNvSpPr>
+            <a:spLocks noGrp="1" noRot="1" noChangeAspect="1" noMove="1" noResize="1" noEditPoints="1" noAdjustHandles="1" noChangeArrowheads="1" noChangeShapeType="1" noTextEdit="1"/>
+          </p:cNvSpPr>
+          <p:nvPr>
+            <p:extLst>
+              <p:ext uri="{386F3935-93C4-4BCD-93E2-E3B085C9AB24}">
+                <p16:designElem xmlns="" xmlns:p16="http://schemas.microsoft.com/office/powerpoint/2015/main" val="1"/>
+              </p:ext>
+            </p:extLst>
+          </p:nvPr>
+        </p:nvSpPr>
+        <p:spPr>
+          <a:xfrm>
+            <a:off x="3337560" y="1850683"/>
+            <a:ext cx="2468880" cy="18288"/>
+          </a:xfrm>
+          <a:custGeom>
+            <a:avLst/>
+            <a:gdLst>
+              <a:gd name="connsiteX0" fmla="*/ 0 w 2468880"/>
+              <a:gd name="connsiteY0" fmla="*/ 0 h 18288"/>
+              <a:gd name="connsiteX1" fmla="*/ 592531 w 2468880"/>
+              <a:gd name="connsiteY1" fmla="*/ 0 h 18288"/>
+              <a:gd name="connsiteX2" fmla="*/ 1160374 w 2468880"/>
+              <a:gd name="connsiteY2" fmla="*/ 0 h 18288"/>
+              <a:gd name="connsiteX3" fmla="*/ 1728216 w 2468880"/>
+              <a:gd name="connsiteY3" fmla="*/ 0 h 18288"/>
+              <a:gd name="connsiteX4" fmla="*/ 2468880 w 2468880"/>
+              <a:gd name="connsiteY4" fmla="*/ 0 h 18288"/>
+              <a:gd name="connsiteX5" fmla="*/ 2468880 w 2468880"/>
+              <a:gd name="connsiteY5" fmla="*/ 18288 h 18288"/>
+              <a:gd name="connsiteX6" fmla="*/ 1802282 w 2468880"/>
+              <a:gd name="connsiteY6" fmla="*/ 18288 h 18288"/>
+              <a:gd name="connsiteX7" fmla="*/ 1209751 w 2468880"/>
+              <a:gd name="connsiteY7" fmla="*/ 18288 h 18288"/>
+              <a:gd name="connsiteX8" fmla="*/ 641909 w 2468880"/>
+              <a:gd name="connsiteY8" fmla="*/ 18288 h 18288"/>
+              <a:gd name="connsiteX9" fmla="*/ 0 w 2468880"/>
+              <a:gd name="connsiteY9" fmla="*/ 18288 h 18288"/>
+              <a:gd name="connsiteX10" fmla="*/ 0 w 2468880"/>
+              <a:gd name="connsiteY10" fmla="*/ 0 h 18288"/>
+            </a:gdLst>
+            <a:ahLst/>
+            <a:cxnLst>
+              <a:cxn ang="0">
+                <a:pos x="connsiteX0" y="connsiteY0"/>
+              </a:cxn>
+              <a:cxn ang="0">
+                <a:pos x="connsiteX1" y="connsiteY1"/>
+              </a:cxn>
+              <a:cxn ang="0">
+                <a:pos x="connsiteX2" y="connsiteY2"/>
+              </a:cxn>
+              <a:cxn ang="0">
+                <a:pos x="connsiteX3" y="connsiteY3"/>
+              </a:cxn>
+              <a:cxn ang="0">
+                <a:pos x="connsiteX4" y="connsiteY4"/>
+              </a:cxn>
+              <a:cxn ang="0">
+                <a:pos x="connsiteX5" y="connsiteY5"/>
+              </a:cxn>
+              <a:cxn ang="0">
+                <a:pos x="connsiteX6" y="connsiteY6"/>
+              </a:cxn>
+              <a:cxn ang="0">
+                <a:pos x="connsiteX7" y="connsiteY7"/>
+              </a:cxn>
+              <a:cxn ang="0">
+                <a:pos x="connsiteX8" y="connsiteY8"/>
+              </a:cxn>
+              <a:cxn ang="0">
+                <a:pos x="connsiteX9" y="connsiteY9"/>
+              </a:cxn>
+              <a:cxn ang="0">
+                <a:pos x="connsiteX10" y="connsiteY10"/>
+              </a:cxn>
+            </a:cxnLst>
+            <a:rect l="l" t="t" r="r" b="b"/>
+            <a:pathLst>
+              <a:path w="2468880" h="18288" fill="none" extrusionOk="0">
+                <a:moveTo>
+                  <a:pt x="0" y="0"/>
+                </a:moveTo>
+                <a:cubicBezTo>
+                  <a:pt x="171523" y="-1510"/>
+                  <a:pt x="416079" y="20036"/>
+                  <a:pt x="592531" y="0"/>
+                </a:cubicBezTo>
+                <a:cubicBezTo>
+                  <a:pt x="768983" y="-20036"/>
+                  <a:pt x="878305" y="13110"/>
+                  <a:pt x="1160374" y="0"/>
+                </a:cubicBezTo>
+                <a:cubicBezTo>
+                  <a:pt x="1442443" y="-13110"/>
+                  <a:pt x="1612108" y="24695"/>
+                  <a:pt x="1728216" y="0"/>
+                </a:cubicBezTo>
+                <a:cubicBezTo>
+                  <a:pt x="1844324" y="-24695"/>
+                  <a:pt x="2271040" y="20667"/>
+                  <a:pt x="2468880" y="0"/>
+                </a:cubicBezTo>
+                <a:cubicBezTo>
+                  <a:pt x="2468302" y="4771"/>
+                  <a:pt x="2469633" y="12323"/>
+                  <a:pt x="2468880" y="18288"/>
+                </a:cubicBezTo>
+                <a:cubicBezTo>
+                  <a:pt x="2229297" y="-14659"/>
+                  <a:pt x="2066775" y="30253"/>
+                  <a:pt x="1802282" y="18288"/>
+                </a:cubicBezTo>
+                <a:cubicBezTo>
+                  <a:pt x="1537789" y="6323"/>
+                  <a:pt x="1379930" y="22266"/>
+                  <a:pt x="1209751" y="18288"/>
+                </a:cubicBezTo>
+                <a:cubicBezTo>
+                  <a:pt x="1039572" y="14310"/>
+                  <a:pt x="837025" y="12850"/>
+                  <a:pt x="641909" y="18288"/>
+                </a:cubicBezTo>
+                <a:cubicBezTo>
+                  <a:pt x="446793" y="23726"/>
+                  <a:pt x="170561" y="18472"/>
+                  <a:pt x="0" y="18288"/>
+                </a:cubicBezTo>
+                <a:cubicBezTo>
+                  <a:pt x="841" y="12879"/>
+                  <a:pt x="-726" y="3977"/>
+                  <a:pt x="0" y="0"/>
+                </a:cubicBezTo>
+                <a:close/>
+              </a:path>
+              <a:path w="2468880" h="18288" stroke="0" extrusionOk="0">
+                <a:moveTo>
+                  <a:pt x="0" y="0"/>
+                </a:moveTo>
+                <a:cubicBezTo>
+                  <a:pt x="190931" y="24910"/>
+                  <a:pt x="333688" y="11559"/>
+                  <a:pt x="567842" y="0"/>
+                </a:cubicBezTo>
+                <a:cubicBezTo>
+                  <a:pt x="801996" y="-11559"/>
+                  <a:pt x="939971" y="-5677"/>
+                  <a:pt x="1234440" y="0"/>
+                </a:cubicBezTo>
+                <a:cubicBezTo>
+                  <a:pt x="1528909" y="5677"/>
+                  <a:pt x="1658539" y="5184"/>
+                  <a:pt x="1777594" y="0"/>
+                </a:cubicBezTo>
+                <a:cubicBezTo>
+                  <a:pt x="1896649" y="-5184"/>
+                  <a:pt x="2186164" y="23915"/>
+                  <a:pt x="2468880" y="0"/>
+                </a:cubicBezTo>
+                <a:cubicBezTo>
+                  <a:pt x="2468266" y="8857"/>
+                  <a:pt x="2469384" y="13619"/>
+                  <a:pt x="2468880" y="18288"/>
+                </a:cubicBezTo>
+                <a:cubicBezTo>
+                  <a:pt x="2271330" y="36599"/>
+                  <a:pt x="2001027" y="31554"/>
+                  <a:pt x="1876349" y="18288"/>
+                </a:cubicBezTo>
+                <a:cubicBezTo>
+                  <a:pt x="1751671" y="5022"/>
+                  <a:pt x="1364652" y="15063"/>
+                  <a:pt x="1209751" y="18288"/>
+                </a:cubicBezTo>
+                <a:cubicBezTo>
+                  <a:pt x="1054850" y="21513"/>
+                  <a:pt x="748438" y="20074"/>
+                  <a:pt x="617220" y="18288"/>
+                </a:cubicBezTo>
+                <a:cubicBezTo>
+                  <a:pt x="486002" y="16502"/>
+                  <a:pt x="237432" y="27200"/>
+                  <a:pt x="0" y="18288"/>
+                </a:cubicBezTo>
+                <a:cubicBezTo>
+                  <a:pt x="-487" y="10816"/>
+                  <a:pt x="-839" y="6058"/>
+                  <a:pt x="0" y="0"/>
+                </a:cubicBezTo>
+                <a:close/>
+              </a:path>
+            </a:pathLst>
+          </a:custGeom>
+          <a:solidFill>
+            <a:schemeClr val="accent2"/>
+          </a:solidFill>
+          <a:ln w="41275" cap="rnd">
+            <a:solidFill>
+              <a:schemeClr val="accent2"/>
+            </a:solidFill>
+            <a:round/>
+            <a:extLst>
+              <a:ext uri="{C807C97D-BFC1-408E-A445-0C87EB9F89A2}">
+                <ask:lineSketchStyleProps xmlns="" xmlns:ask="http://schemas.microsoft.com/office/drawing/2018/sketchyshapes" sd="2863741219">
+                  <a:prstGeom prst="rect">
+                    <a:avLst/>
+                  </a:prstGeom>
+                  <ask:type>
+                    <ask:lineSketchFreehand/>
+                  </ask:type>
+                </ask:lineSketchStyleProps>
+              </a:ext>
+            </a:extLst>
+          </a:ln>
+        </p:spPr>
+        <p:style>
+          <a:lnRef idx="2">
+            <a:schemeClr val="accent1">
+              <a:shade val="50000"/>
+            </a:schemeClr>
+          </a:lnRef>
+          <a:fillRef idx="1">
+            <a:schemeClr val="accent1"/>
+          </a:fillRef>
+          <a:effectRef idx="0">
+            <a:schemeClr val="accent1"/>
+          </a:effectRef>
+          <a:fontRef idx="minor">
+            <a:schemeClr val="lt1"/>
+          </a:fontRef>
+        </p:style>
+        <p:txBody>
+          <a:bodyPr rtlCol="0" anchor="ctr"/>
+          <a:lstStyle/>
+          <a:p>
+            <a:pPr algn="ctr"/>
+            <a:endParaRPr lang="en-US"/>
+          </a:p>
+        </p:txBody>
+      </p:sp>
+      <p:pic>
+        <p:nvPicPr>
+          <p:cNvPr id="4" name="Content Placeholder 3" descr="A graph of a bar graph&#10;&#10;AI-generated content may be incorrect.">
+            <a:extLst>
+              <a:ext uri="{FF2B5EF4-FFF2-40B4-BE49-F238E27FC236}">
+                <a16:creationId xmlns="" xmlns:a16="http://schemas.microsoft.com/office/drawing/2014/main" id="{DCF1AF55-BB4A-9D78-F6E9-E18FC1356C32}"/>
+              </a:ext>
+            </a:extLst>
+          </p:cNvPr>
+          <p:cNvPicPr>
+            <a:picLocks noGrp="1" noChangeAspect="1"/>
+          </p:cNvPicPr>
+          <p:nvPr>
+            <p:ph sz="half" idx="2"/>
+          </p:nvPr>
+        </p:nvPicPr>
+        <p:blipFill>
+          <a:blip r:embed="rId3"/>
+          <a:stretch>
+            <a:fillRect/>
+          </a:stretch>
+        </p:blipFill>
+        <p:spPr>
+          <a:xfrm>
+            <a:off x="4690872" y="2166634"/>
+            <a:ext cx="4450842" cy="3605279"/>
+          </a:xfrm>
+          <a:prstGeom prst="rect">
+            <a:avLst/>
+          </a:prstGeom>
+        </p:spPr>
+      </p:pic>
+      <p:pic>
+        <p:nvPicPr>
+          <p:cNvPr id="5" name="Content Placeholder 4"/>
+          <p:cNvPicPr>
+            <a:picLocks noGrp="1" noChangeAspect="1"/>
+          </p:cNvPicPr>
+          <p:nvPr>
+            <p:ph sz="half" idx="1"/>
+          </p:nvPr>
+        </p:nvPicPr>
+        <p:blipFill>
+          <a:blip r:embed="rId4">
             <a:extLst>
               <a:ext uri="{28A0092B-C50C-407E-A947-70E740481C1C}">
                 <a14:useLocalDpi xmlns:a14="http://schemas.microsoft.com/office/drawing/2010/main" val="0"/>
@@ -3578,130 +6382,51 @@
         </p:blipFill>
         <p:spPr>
           <a:xfrm>
-            <a:off x="4734159" y="1421003"/>
-            <a:ext cx="4247680" cy="4164495"/>
-          </a:xfrm>
-          <a:prstGeom prst="rect">
-            <a:avLst/>
-          </a:prstGeom>
-        </p:spPr>
-      </p:pic>
-    </p:spTree>
-  </p:cSld>
-  <p:clrMapOvr>
-    <a:masterClrMapping/>
-  </p:clrMapOvr>
-</p:sld>
-</file>
-
-<file path=ppt/slides/slide5.xml><?xml version="1.0" encoding="utf-8"?>
-<p:sld xmlns:a="http://schemas.openxmlformats.org/drawingml/2006/main" xmlns:r="http://schemas.openxmlformats.org/officeDocument/2006/relationships" xmlns:p="http://schemas.openxmlformats.org/presentationml/2006/main">
-  <p:cSld>
-    <p:spTree>
-      <p:nvGrpSpPr>
-        <p:cNvPr id="1" name=""/>
-        <p:cNvGrpSpPr/>
-        <p:nvPr/>
-      </p:nvGrpSpPr>
-      <p:grpSpPr>
-        <a:xfrm>
-          <a:off x="0" y="0"/>
-          <a:ext cx="0" cy="0"/>
-          <a:chOff x="0" y="0"/>
-          <a:chExt cx="0" cy="0"/>
-        </a:xfrm>
-      </p:grpSpPr>
-      <p:sp>
-        <p:nvSpPr>
-          <p:cNvPr id="2" name="Title 1"/>
-          <p:cNvSpPr>
-            <a:spLocks noGrp="1"/>
-          </p:cNvSpPr>
-          <p:nvPr>
-            <p:ph type="title"/>
-          </p:nvPr>
-        </p:nvSpPr>
-        <p:spPr/>
-        <p:txBody>
-          <a:bodyPr/>
-          <a:lstStyle/>
-          <a:p>
-            <a:r>
-              <a:rPr lang="en-US" dirty="0" smtClean="0"/>
-              <a:t>Visuals Of Findings </a:t>
-            </a:r>
-            <a:endParaRPr lang="en-US" dirty="0"/>
-          </a:p>
-        </p:txBody>
-      </p:sp>
-      <p:pic>
-        <p:nvPicPr>
-          <p:cNvPr id="8" name="Content Placeholder 7"/>
-          <p:cNvPicPr>
-            <a:picLocks noGrp="1" noChangeAspect="1"/>
-          </p:cNvPicPr>
-          <p:nvPr>
-            <p:ph sz="half" idx="2"/>
-          </p:nvPr>
-        </p:nvPicPr>
-        <p:blipFill>
-          <a:blip r:embed="rId2">
-            <a:extLst>
-              <a:ext uri="{28A0092B-C50C-407E-A947-70E740481C1C}">
-                <a14:useLocalDpi xmlns:a14="http://schemas.microsoft.com/office/drawing/2010/main" val="0"/>
-              </a:ext>
-            </a:extLst>
-          </a:blip>
-          <a:stretch>
-            <a:fillRect/>
-          </a:stretch>
-        </p:blipFill>
-        <p:spPr>
-          <a:xfrm>
-            <a:off x="4648199" y="1767494"/>
-            <a:ext cx="4257065" cy="3718906"/>
+            <a:off x="457200" y="2260073"/>
+            <a:ext cx="4038600" cy="3206216"/>
           </a:xfrm>
         </p:spPr>
       </p:pic>
-      <p:pic>
-        <p:nvPicPr>
-          <p:cNvPr id="10" name="Content Placeholder 9"/>
-          <p:cNvPicPr>
-            <a:picLocks noGrp="1" noChangeAspect="1"/>
-          </p:cNvPicPr>
-          <p:nvPr>
-            <p:ph sz="half" idx="1"/>
-          </p:nvPr>
-        </p:nvPicPr>
-        <p:blipFill>
-          <a:blip r:embed="rId3">
-            <a:extLst>
-              <a:ext uri="{28A0092B-C50C-407E-A947-70E740481C1C}">
-                <a14:useLocalDpi xmlns:a14="http://schemas.microsoft.com/office/drawing/2010/main" val="0"/>
-              </a:ext>
-            </a:extLst>
-          </a:blip>
-          <a:stretch>
-            <a:fillRect/>
-          </a:stretch>
-        </p:blipFill>
-        <p:spPr>
-          <a:xfrm>
-            <a:off x="457200" y="1772654"/>
-            <a:ext cx="4038600" cy="4181055"/>
-          </a:xfrm>
-        </p:spPr>
-      </p:pic>
+      <p:sp>
+        <p:nvSpPr>
+          <p:cNvPr id="11" name="Footer Placeholder 10"/>
+          <p:cNvSpPr>
+            <a:spLocks noGrp="1"/>
+          </p:cNvSpPr>
+          <p:nvPr>
+            <p:ph type="ftr" sz="quarter" idx="11"/>
+          </p:nvPr>
+        </p:nvSpPr>
+        <p:spPr/>
+        <p:txBody>
+          <a:bodyPr/>
+          <a:lstStyle/>
+          <a:p>
+            <a:r>
+              <a:rPr lang="en-US" smtClean="0"/>
+              <a:t>4-10</a:t>
+            </a:r>
+            <a:endParaRPr lang="en-US"/>
+          </a:p>
+        </p:txBody>
+      </p:sp>
     </p:spTree>
     <p:extLst>
       <p:ext uri="{BB962C8B-B14F-4D97-AF65-F5344CB8AC3E}">
-        <p14:creationId xmlns:p14="http://schemas.microsoft.com/office/powerpoint/2010/main" val="741955163"/>
+        <p14:creationId xmlns:p14="http://schemas.microsoft.com/office/powerpoint/2010/main" val="4109838419"/>
       </p:ext>
     </p:extLst>
   </p:cSld>
   <p:clrMapOvr>
     <a:masterClrMapping/>
   </p:clrMapOvr>
+  <p:timing>
+    <p:tnLst>
+      <p:par>
+        <p:cTn id="1" dur="indefinite" restart="never" nodeType="tmRoot"/>
+      </p:par>
+    </p:tnLst>
+  </p:timing>
 </p:sld>
 </file>
 
@@ -3732,31 +6457,10 @@
             <p:ph type="title"/>
           </p:nvPr>
         </p:nvSpPr>
-        <p:spPr/>
-        <p:txBody>
-          <a:bodyPr/>
-          <a:lstStyle/>
-          <a:p>
-            <a:r>
-              <a:t>Model &amp; Analysis</a:t>
-            </a:r>
-          </a:p>
-        </p:txBody>
-      </p:sp>
-      <p:sp>
-        <p:nvSpPr>
-          <p:cNvPr id="3" name="Content Placeholder 2"/>
-          <p:cNvSpPr>
-            <a:spLocks noGrp="1"/>
-          </p:cNvSpPr>
-          <p:nvPr>
-            <p:ph idx="1"/>
-          </p:nvPr>
-        </p:nvSpPr>
         <p:spPr>
           <a:xfrm>
-            <a:off x="457200" y="1600200"/>
-            <a:ext cx="8229600" cy="4521325"/>
+            <a:off x="457200" y="63262"/>
+            <a:ext cx="8229600" cy="864614"/>
           </a:xfrm>
         </p:spPr>
         <p:txBody>
@@ -3766,48 +6470,96 @@
           <a:lstStyle/>
           <a:p>
             <a:r>
-              <a:rPr sz="2000" dirty="0"/>
-              <a:t>- Cleaned all missing data (used imputation or dropped high-missing columns)</a:t>
-            </a:r>
-          </a:p>
-          <a:p>
-            <a:r>
-              <a:rPr sz="2000" dirty="0"/>
-              <a:t>- Used logistic regression and feature importance to analyze impact</a:t>
-            </a:r>
-          </a:p>
-          <a:p>
-            <a:endParaRPr sz="2000" dirty="0"/>
-          </a:p>
-          <a:p>
-            <a:r>
-              <a:rPr sz="2000" dirty="0"/>
-              <a:t>Important predictors:</a:t>
-            </a:r>
-          </a:p>
-          <a:p>
-            <a:r>
-              <a:rPr sz="2000" dirty="0"/>
-              <a:t>- Doctor recommendation (47.5%)</a:t>
-            </a:r>
-          </a:p>
-          <a:p>
-            <a:r>
-              <a:rPr sz="2000" dirty="0"/>
-              <a:t>- H1N1 concern (57.2%)</a:t>
-            </a:r>
-          </a:p>
-          <a:p>
-            <a:r>
-              <a:rPr sz="2000" dirty="0"/>
-              <a:t>- Vaccine effectiveness belief</a:t>
-            </a:r>
-          </a:p>
-          <a:p>
-            <a:r>
-              <a:rPr sz="2000" dirty="0"/>
-              <a:t>- Chronic conditions</a:t>
-            </a:r>
+              <a:rPr lang="en-US" sz="4000" dirty="0"/>
+              <a:t>Key Findings &amp; Visuals</a:t>
+            </a:r>
+            <a:endParaRPr sz="4000" dirty="0"/>
+          </a:p>
+        </p:txBody>
+      </p:sp>
+      <p:pic>
+        <p:nvPicPr>
+          <p:cNvPr id="4" name="Picture 3"/>
+          <p:cNvPicPr>
+            <a:picLocks noChangeAspect="1"/>
+          </p:cNvPicPr>
+          <p:nvPr/>
+        </p:nvPicPr>
+        <p:blipFill>
+          <a:blip r:embed="rId3">
+            <a:extLst>
+              <a:ext uri="{28A0092B-C50C-407E-A947-70E740481C1C}">
+                <a14:useLocalDpi xmlns:a14="http://schemas.microsoft.com/office/drawing/2010/main" val="0"/>
+              </a:ext>
+            </a:extLst>
+          </a:blip>
+          <a:stretch>
+            <a:fillRect/>
+          </a:stretch>
+        </p:blipFill>
+        <p:spPr>
+          <a:xfrm>
+            <a:off x="974361" y="2090299"/>
+            <a:ext cx="6153462" cy="4134828"/>
+          </a:xfrm>
+          <a:prstGeom prst="rect">
+            <a:avLst/>
+          </a:prstGeom>
+        </p:spPr>
+      </p:pic>
+      <p:sp>
+        <p:nvSpPr>
+          <p:cNvPr id="6" name="Rectangle 5"/>
+          <p:cNvSpPr/>
+          <p:nvPr/>
+        </p:nvSpPr>
+        <p:spPr>
+          <a:xfrm>
+            <a:off x="457200" y="936885"/>
+            <a:ext cx="8229600" cy="1077218"/>
+          </a:xfrm>
+          <a:prstGeom prst="rect">
+            <a:avLst/>
+          </a:prstGeom>
+        </p:spPr>
+        <p:txBody>
+          <a:bodyPr wrap="square">
+            <a:spAutoFit/>
+          </a:bodyPr>
+          <a:lstStyle/>
+          <a:p>
+            <a:pPr algn="ctr"/>
+            <a:r>
+              <a:rPr lang="en-US" sz="3200" dirty="0" smtClean="0"/>
+              <a:t>1. Doctor </a:t>
+            </a:r>
+            <a:r>
+              <a:rPr lang="en-US" sz="3200" dirty="0"/>
+              <a:t>Recommendations Influence Vaccination</a:t>
+            </a:r>
+          </a:p>
+        </p:txBody>
+      </p:sp>
+      <p:sp>
+        <p:nvSpPr>
+          <p:cNvPr id="10" name="Footer Placeholder 9"/>
+          <p:cNvSpPr>
+            <a:spLocks noGrp="1"/>
+          </p:cNvSpPr>
+          <p:nvPr>
+            <p:ph type="ftr" sz="quarter" idx="11"/>
+          </p:nvPr>
+        </p:nvSpPr>
+        <p:spPr/>
+        <p:txBody>
+          <a:bodyPr/>
+          <a:lstStyle/>
+          <a:p>
+            <a:r>
+              <a:rPr lang="en-US" smtClean="0"/>
+              <a:t>5-10</a:t>
+            </a:r>
+            <a:endParaRPr lang="en-US"/>
           </a:p>
         </p:txBody>
       </p:sp>
@@ -3816,6 +6568,13 @@
   <p:clrMapOvr>
     <a:masterClrMapping/>
   </p:clrMapOvr>
+  <p:timing>
+    <p:tnLst>
+      <p:par>
+        <p:cTn id="1" dur="indefinite" restart="never" nodeType="tmRoot"/>
+      </p:par>
+    </p:tnLst>
+  </p:timing>
 </p:sld>
 </file>
 
@@ -3846,107 +6605,68 @@
             <p:ph type="title"/>
           </p:nvPr>
         </p:nvSpPr>
-        <p:spPr/>
-        <p:txBody>
-          <a:bodyPr>
-            <a:normAutofit/>
-          </a:bodyPr>
-          <a:lstStyle/>
-          <a:p>
-            <a:r>
-              <a:rPr sz="4000" dirty="0" smtClean="0"/>
-              <a:t>Recommendations</a:t>
-            </a:r>
-            <a:endParaRPr sz="4000" dirty="0"/>
-          </a:p>
-        </p:txBody>
-      </p:sp>
-      <p:sp>
-        <p:nvSpPr>
-          <p:cNvPr id="3" name="Content Placeholder 2"/>
-          <p:cNvSpPr>
-            <a:spLocks noGrp="1"/>
-          </p:cNvSpPr>
-          <p:nvPr>
-            <p:ph idx="1"/>
-          </p:nvPr>
-        </p:nvSpPr>
         <p:spPr>
           <a:xfrm>
-            <a:off x="457200" y="1600200"/>
-            <a:ext cx="8229600" cy="2078315"/>
+            <a:off x="436930" y="54492"/>
+            <a:ext cx="8229600" cy="590213"/>
           </a:xfrm>
         </p:spPr>
         <p:txBody>
           <a:bodyPr>
-            <a:normAutofit/>
+            <a:noAutofit/>
           </a:bodyPr>
           <a:lstStyle/>
           <a:p>
-            <a:pPr marL="0" indent="0">
-              <a:buNone/>
-            </a:pPr>
-            <a:r>
-              <a:rPr sz="2000" dirty="0"/>
-              <a:t>1. Train doctors to give strong, clear vaccine advice</a:t>
-            </a:r>
-          </a:p>
-          <a:p>
-            <a:pPr marL="0" indent="0">
-              <a:buNone/>
-            </a:pPr>
-            <a:r>
-              <a:rPr sz="2000" dirty="0"/>
-              <a:t>2. Target under-vaccinated groups (50–64 year-olds)</a:t>
-            </a:r>
-          </a:p>
-          <a:p>
-            <a:pPr marL="0" indent="0">
-              <a:buNone/>
-            </a:pPr>
-            <a:r>
-              <a:rPr sz="2000" dirty="0"/>
-              <a:t>3. Use SMS campaigns and infographics</a:t>
-            </a:r>
-          </a:p>
-          <a:p>
-            <a:pPr marL="0" indent="0">
-              <a:buNone/>
-            </a:pPr>
-            <a:r>
-              <a:rPr sz="2000" dirty="0"/>
-              <a:t>4. Promote combined vaccine confidence messages</a:t>
-            </a:r>
-          </a:p>
-          <a:p>
-            <a:pPr marL="0" indent="0">
-              <a:buNone/>
-            </a:pPr>
-            <a:r>
-              <a:rPr sz="2000" dirty="0"/>
-              <a:t>5. Improve future </a:t>
-            </a:r>
-            <a:r>
-              <a:rPr sz="2000" dirty="0" smtClean="0"/>
-              <a:t>surveys</a:t>
-            </a:r>
-            <a:r>
-              <a:rPr sz="2000" dirty="0"/>
-              <a:t>: ask about access and timing</a:t>
-            </a:r>
-          </a:p>
-        </p:txBody>
-      </p:sp>
-      <p:sp>
-        <p:nvSpPr>
-          <p:cNvPr id="4" name="Rectangle 3"/>
+            <a:r>
+              <a:rPr lang="en-US" sz="4000" dirty="0" smtClean="0"/>
+              <a:t>Key Of </a:t>
+            </a:r>
+            <a:r>
+              <a:rPr lang="en-US" sz="4000" dirty="0"/>
+              <a:t>Findings </a:t>
+            </a:r>
+          </a:p>
+        </p:txBody>
+      </p:sp>
+      <p:pic>
+        <p:nvPicPr>
+          <p:cNvPr id="10" name="Content Placeholder 9"/>
+          <p:cNvPicPr>
+            <a:picLocks noGrp="1" noChangeAspect="1"/>
+          </p:cNvPicPr>
+          <p:nvPr>
+            <p:ph sz="half" idx="1"/>
+          </p:nvPr>
+        </p:nvPicPr>
+        <p:blipFill>
+          <a:blip r:embed="rId3">
+            <a:extLst>
+              <a:ext uri="{28A0092B-C50C-407E-A947-70E740481C1C}">
+                <a14:useLocalDpi xmlns:a14="http://schemas.microsoft.com/office/drawing/2010/main" val="0"/>
+              </a:ext>
+            </a:extLst>
+          </a:blip>
+          <a:stretch>
+            <a:fillRect/>
+          </a:stretch>
+        </p:blipFill>
+        <p:spPr>
+          <a:xfrm>
+            <a:off x="2045053" y="2166633"/>
+            <a:ext cx="5580952" cy="3958700"/>
+          </a:xfrm>
+        </p:spPr>
+      </p:pic>
+      <p:sp>
+        <p:nvSpPr>
+          <p:cNvPr id="3" name="Rectangle 2"/>
           <p:cNvSpPr/>
           <p:nvPr/>
         </p:nvSpPr>
         <p:spPr>
           <a:xfrm>
-            <a:off x="346842" y="3678515"/>
-            <a:ext cx="8216086" cy="707886"/>
+            <a:off x="869356" y="867060"/>
+            <a:ext cx="7364748" cy="1077218"/>
           </a:xfrm>
           <a:prstGeom prst="rect">
             <a:avLst/>
@@ -3960,26 +6680,157 @@
           <a:p>
             <a:pPr algn="ctr"/>
             <a:r>
-              <a:rPr lang="en-US" sz="4000" dirty="0" smtClean="0"/>
-              <a:t>Final </a:t>
-            </a:r>
+              <a:rPr lang="en-GB" sz="3200" dirty="0" smtClean="0"/>
+              <a:t>2.  Concern </a:t>
+            </a:r>
+            <a:r>
+              <a:rPr lang="en-GB" sz="3200" dirty="0"/>
+              <a:t>about </a:t>
+            </a:r>
+            <a:r>
+              <a:rPr lang="en-GB" sz="3200" dirty="0" smtClean="0"/>
+              <a:t>H1N1 Virus </a:t>
+            </a:r>
+            <a:r>
+              <a:rPr lang="en-GB" sz="3200" dirty="0"/>
+              <a:t>= more </a:t>
+            </a:r>
+            <a:r>
+              <a:rPr lang="en-GB" sz="3200" dirty="0" smtClean="0"/>
+              <a:t>handwashing</a:t>
+            </a:r>
+          </a:p>
+        </p:txBody>
+      </p:sp>
+      <p:sp>
+        <p:nvSpPr>
+          <p:cNvPr id="9" name="Footer Placeholder 8"/>
+          <p:cNvSpPr>
+            <a:spLocks noGrp="1"/>
+          </p:cNvSpPr>
+          <p:nvPr>
+            <p:ph type="ftr" sz="quarter" idx="11"/>
+          </p:nvPr>
+        </p:nvSpPr>
+        <p:spPr/>
+        <p:txBody>
+          <a:bodyPr/>
+          <a:lstStyle/>
+          <a:p>
+            <a:r>
+              <a:rPr lang="en-US" smtClean="0"/>
+              <a:t>6-10</a:t>
+            </a:r>
+            <a:endParaRPr lang="en-US"/>
+          </a:p>
+        </p:txBody>
+      </p:sp>
+    </p:spTree>
+    <p:extLst>
+      <p:ext uri="{BB962C8B-B14F-4D97-AF65-F5344CB8AC3E}">
+        <p14:creationId xmlns:p14="http://schemas.microsoft.com/office/powerpoint/2010/main" val="741955163"/>
+      </p:ext>
+    </p:extLst>
+  </p:cSld>
+  <p:clrMapOvr>
+    <a:masterClrMapping/>
+  </p:clrMapOvr>
+  <p:timing>
+    <p:tnLst>
+      <p:par>
+        <p:cTn id="1" dur="indefinite" restart="never" nodeType="tmRoot"/>
+      </p:par>
+    </p:tnLst>
+  </p:timing>
+</p:sld>
+</file>
+
+<file path=ppt/slides/slide8.xml><?xml version="1.0" encoding="utf-8"?>
+<p:sld xmlns:a="http://schemas.openxmlformats.org/drawingml/2006/main" xmlns:r="http://schemas.openxmlformats.org/officeDocument/2006/relationships" xmlns:p="http://schemas.openxmlformats.org/presentationml/2006/main">
+  <p:cSld>
+    <p:spTree>
+      <p:nvGrpSpPr>
+        <p:cNvPr id="1" name=""/>
+        <p:cNvGrpSpPr/>
+        <p:nvPr/>
+      </p:nvGrpSpPr>
+      <p:grpSpPr>
+        <a:xfrm>
+          <a:off x="0" y="0"/>
+          <a:ext cx="0" cy="0"/>
+          <a:chOff x="0" y="0"/>
+          <a:chExt cx="0" cy="0"/>
+        </a:xfrm>
+      </p:grpSpPr>
+      <p:sp>
+        <p:nvSpPr>
+          <p:cNvPr id="2" name="Title 1"/>
+          <p:cNvSpPr>
+            <a:spLocks noGrp="1"/>
+          </p:cNvSpPr>
+          <p:nvPr>
+            <p:ph type="title"/>
+          </p:nvPr>
+        </p:nvSpPr>
+        <p:spPr>
+          <a:xfrm>
+            <a:off x="457200" y="274638"/>
+            <a:ext cx="8229600" cy="590213"/>
+          </a:xfrm>
+        </p:spPr>
+        <p:txBody>
+          <a:bodyPr>
+            <a:noAutofit/>
+          </a:bodyPr>
+          <a:lstStyle/>
+          <a:p>
             <a:r>
               <a:rPr lang="en-US" sz="4000" dirty="0"/>
-              <a:t>Thoughts</a:t>
-            </a:r>
-          </a:p>
-        </p:txBody>
-      </p:sp>
-      <p:sp>
-        <p:nvSpPr>
-          <p:cNvPr id="5" name="Rectangle 4"/>
+              <a:t>Key Findings &amp; Visuals</a:t>
+            </a:r>
+            <a:endParaRPr lang="en-US" sz="4000" dirty="0"/>
+          </a:p>
+        </p:txBody>
+      </p:sp>
+      <p:pic>
+        <p:nvPicPr>
+          <p:cNvPr id="8" name="Content Placeholder 7"/>
+          <p:cNvPicPr>
+            <a:picLocks noGrp="1" noChangeAspect="1"/>
+          </p:cNvPicPr>
+          <p:nvPr>
+            <p:ph sz="half" idx="2"/>
+          </p:nvPr>
+        </p:nvPicPr>
+        <p:blipFill>
+          <a:blip r:embed="rId3">
+            <a:extLst>
+              <a:ext uri="{28A0092B-C50C-407E-A947-70E740481C1C}">
+                <a14:useLocalDpi xmlns:a14="http://schemas.microsoft.com/office/drawing/2010/main" val="0"/>
+              </a:ext>
+            </a:extLst>
+          </a:blip>
+          <a:stretch>
+            <a:fillRect/>
+          </a:stretch>
+        </p:blipFill>
+        <p:spPr>
+          <a:xfrm>
+            <a:off x="1445546" y="2389106"/>
+            <a:ext cx="6284062" cy="3718906"/>
+          </a:xfrm>
+        </p:spPr>
+      </p:pic>
+      <p:sp>
+        <p:nvSpPr>
+          <p:cNvPr id="3" name="Rectangle 2"/>
           <p:cNvSpPr/>
           <p:nvPr/>
         </p:nvSpPr>
         <p:spPr>
           <a:xfrm>
-            <a:off x="648637" y="4386401"/>
-            <a:ext cx="7076465" cy="1631216"/>
+            <a:off x="828816" y="985384"/>
+            <a:ext cx="7364748" cy="1077218"/>
           </a:xfrm>
           <a:prstGeom prst="rect">
             <a:avLst/>
@@ -3991,54 +6842,336 @@
           </a:bodyPr>
           <a:lstStyle/>
           <a:p>
-            <a:pPr algn="just"/>
-            <a:r>
-              <a:rPr lang="en-GB" sz="2000" dirty="0" smtClean="0"/>
-              <a:t>✅ </a:t>
-            </a:r>
-            <a:r>
-              <a:rPr lang="en-GB" sz="2000" dirty="0"/>
-              <a:t>Machine learning can help target interventions</a:t>
-            </a:r>
-          </a:p>
-          <a:p>
-            <a:pPr algn="just"/>
-            <a:endParaRPr lang="en-GB" sz="2000" dirty="0" smtClean="0"/>
-          </a:p>
-          <a:p>
-            <a:pPr algn="just"/>
-            <a:r>
-              <a:rPr lang="en-GB" sz="2000" dirty="0" smtClean="0"/>
-              <a:t>✅ </a:t>
-            </a:r>
-            <a:r>
-              <a:rPr lang="en-GB" sz="2000" dirty="0"/>
-              <a:t>Beliefs and doctor input matter more than demographics</a:t>
-            </a:r>
-          </a:p>
-          <a:p>
-            <a:pPr algn="just"/>
-            <a:endParaRPr lang="en-GB" sz="2000" dirty="0" smtClean="0"/>
-          </a:p>
-          <a:p>
-            <a:pPr algn="just"/>
-            <a:r>
-              <a:rPr lang="en-GB" sz="2000" dirty="0" smtClean="0"/>
-              <a:t>📢 </a:t>
-            </a:r>
-            <a:r>
-              <a:rPr lang="en-GB" sz="2000" dirty="0"/>
-              <a:t>Next step: Build prediction tool for clinics</a:t>
-            </a:r>
-            <a:endParaRPr lang="en-GB" sz="2000" dirty="0"/>
+            <a:pPr algn="ctr"/>
+            <a:r>
+              <a:rPr lang="en-GB" sz="3200" dirty="0" smtClean="0"/>
+              <a:t>3. Older </a:t>
+            </a:r>
+            <a:r>
+              <a:rPr lang="en-GB" sz="3200" dirty="0"/>
+              <a:t>adults (65+) more likely to get seasonal flu shots</a:t>
+            </a:r>
+            <a:endParaRPr lang="en-GB" sz="3200" dirty="0"/>
+          </a:p>
+        </p:txBody>
+      </p:sp>
+      <p:sp>
+        <p:nvSpPr>
+          <p:cNvPr id="9" name="Footer Placeholder 8"/>
+          <p:cNvSpPr>
+            <a:spLocks noGrp="1"/>
+          </p:cNvSpPr>
+          <p:nvPr>
+            <p:ph type="ftr" sz="quarter" idx="11"/>
+          </p:nvPr>
+        </p:nvSpPr>
+        <p:spPr/>
+        <p:txBody>
+          <a:bodyPr/>
+          <a:lstStyle/>
+          <a:p>
+            <a:r>
+              <a:rPr lang="en-US" smtClean="0"/>
+              <a:t>7-10</a:t>
+            </a:r>
+            <a:endParaRPr lang="en-US"/>
           </a:p>
         </p:txBody>
       </p:sp>
     </p:spTree>
+    <p:extLst>
+      <p:ext uri="{BB962C8B-B14F-4D97-AF65-F5344CB8AC3E}">
+        <p14:creationId xmlns:p14="http://schemas.microsoft.com/office/powerpoint/2010/main" val="2412669910"/>
+      </p:ext>
+    </p:extLst>
   </p:cSld>
   <p:clrMapOvr>
     <a:masterClrMapping/>
   </p:clrMapOvr>
+  <p:timing>
+    <p:tnLst>
+      <p:par>
+        <p:cTn id="1" dur="indefinite" restart="never" nodeType="tmRoot"/>
+      </p:par>
+    </p:tnLst>
+  </p:timing>
+</p:sld>
+</file>
+
+<file path=ppt/slides/slide9.xml><?xml version="1.0" encoding="utf-8"?>
+<p:sld xmlns:a="http://schemas.openxmlformats.org/drawingml/2006/main" xmlns:r="http://schemas.openxmlformats.org/officeDocument/2006/relationships" xmlns:p="http://schemas.openxmlformats.org/presentationml/2006/main">
+  <p:cSld>
+    <p:bg>
+      <p:bgPr>
+        <a:solidFill>
+          <a:schemeClr val="bg1"/>
+        </a:solidFill>
+        <a:effectLst/>
+      </p:bgPr>
+    </p:bg>
+    <p:spTree>
+      <p:nvGrpSpPr>
+        <p:cNvPr id="1" name="">
+          <a:extLst>
+            <a:ext uri="{FF2B5EF4-FFF2-40B4-BE49-F238E27FC236}">
+              <a16:creationId xmlns="" xmlns:a16="http://schemas.microsoft.com/office/drawing/2014/main" id="{E2A7CD3E-6FDC-5799-D36E-3836A1AFD447}"/>
+            </a:ext>
+          </a:extLst>
+        </p:cNvPr>
+        <p:cNvGrpSpPr/>
+        <p:nvPr/>
+      </p:nvGrpSpPr>
+      <p:grpSpPr>
+        <a:xfrm>
+          <a:off x="0" y="0"/>
+          <a:ext cx="0" cy="0"/>
+          <a:chOff x="0" y="0"/>
+          <a:chExt cx="0" cy="0"/>
+        </a:xfrm>
+      </p:grpSpPr>
+      <p:sp useBgFill="1">
+        <p:nvSpPr>
+          <p:cNvPr id="22" name="Rectangle 21">
+            <a:extLst>
+              <a:ext uri="{FF2B5EF4-FFF2-40B4-BE49-F238E27FC236}">
+                <a16:creationId xmlns="" xmlns:a16="http://schemas.microsoft.com/office/drawing/2014/main" id="{A1D1BBEA-2421-CC82-B770-1FE777DCA3F2}"/>
+              </a:ext>
+              <a:ext uri="{C183D7F6-B498-43B3-948B-1728B52AA6E4}">
+                <adec:decorative xmlns="" xmlns:adec="http://schemas.microsoft.com/office/drawing/2017/decorative" val="1"/>
+              </a:ext>
+            </a:extLst>
+          </p:cNvPr>
+          <p:cNvSpPr>
+            <a:spLocks noGrp="1" noRot="1" noChangeAspect="1" noMove="1" noResize="1" noEditPoints="1" noAdjustHandles="1" noChangeArrowheads="1" noChangeShapeType="1" noTextEdit="1"/>
+          </p:cNvSpPr>
+          <p:nvPr>
+            <p:extLst>
+              <p:ext uri="{386F3935-93C4-4BCD-93E2-E3B085C9AB24}">
+                <p16:designElem xmlns="" xmlns:p16="http://schemas.microsoft.com/office/powerpoint/2015/main" val="1"/>
+              </p:ext>
+            </p:extLst>
+          </p:nvPr>
+        </p:nvSpPr>
+        <p:spPr>
+          <a:xfrm>
+            <a:off x="0" y="0"/>
+            <a:ext cx="9144000" cy="6858000"/>
+          </a:xfrm>
+          <a:prstGeom prst="rect">
+            <a:avLst/>
+          </a:prstGeom>
+          <a:ln>
+            <a:noFill/>
+          </a:ln>
+        </p:spPr>
+        <p:style>
+          <a:lnRef idx="2">
+            <a:schemeClr val="accent1">
+              <a:shade val="50000"/>
+            </a:schemeClr>
+          </a:lnRef>
+          <a:fillRef idx="1">
+            <a:schemeClr val="accent1"/>
+          </a:fillRef>
+          <a:effectRef idx="0">
+            <a:schemeClr val="accent1"/>
+          </a:effectRef>
+          <a:fontRef idx="minor">
+            <a:schemeClr val="lt1"/>
+          </a:fontRef>
+        </p:style>
+        <p:txBody>
+          <a:bodyPr rtlCol="0" anchor="ctr"/>
+          <a:lstStyle/>
+          <a:p>
+            <a:pPr algn="ctr"/>
+            <a:r>
+              <a:rPr lang="en-GB"/>
+              <a:t>3. Older adults (65+) more likely to get seasonal flu shots</a:t>
+            </a:r>
+          </a:p>
+        </p:txBody>
+      </p:sp>
+      <p:sp>
+        <p:nvSpPr>
+          <p:cNvPr id="2" name="Title 1">
+            <a:extLst>
+              <a:ext uri="{FF2B5EF4-FFF2-40B4-BE49-F238E27FC236}">
+                <a16:creationId xmlns="" xmlns:a16="http://schemas.microsoft.com/office/drawing/2014/main" id="{830261ED-224B-79F8-29DF-CB0CF2079116}"/>
+              </a:ext>
+            </a:extLst>
+          </p:cNvPr>
+          <p:cNvSpPr>
+            <a:spLocks noGrp="1"/>
+          </p:cNvSpPr>
+          <p:nvPr>
+            <p:ph type="title"/>
+          </p:nvPr>
+        </p:nvSpPr>
+        <p:spPr>
+          <a:xfrm>
+            <a:off x="401130" y="157545"/>
+            <a:ext cx="7783425" cy="729798"/>
+          </a:xfrm>
+        </p:spPr>
+        <p:txBody>
+          <a:bodyPr vert="horz" lIns="91440" tIns="45720" rIns="91440" bIns="45720" rtlCol="0" anchor="b">
+            <a:normAutofit fontScale="90000"/>
+          </a:bodyPr>
+          <a:lstStyle/>
+          <a:p>
+            <a:pPr defTabSz="914400">
+              <a:lnSpc>
+                <a:spcPct val="90000"/>
+              </a:lnSpc>
+            </a:pPr>
+            <a:r>
+              <a:rPr lang="en-US" sz="4800" dirty="0" smtClean="0"/>
+              <a:t>Key </a:t>
+            </a:r>
+            <a:r>
+              <a:rPr lang="en-US" sz="4800" dirty="0" smtClean="0"/>
+              <a:t>Findings &amp; Visuals</a:t>
+            </a:r>
+            <a:endParaRPr lang="en-US" sz="4700" kern="1200" dirty="0">
+              <a:solidFill>
+                <a:schemeClr val="tx1"/>
+              </a:solidFill>
+              <a:latin typeface="+mj-lt"/>
+              <a:ea typeface="+mj-ea"/>
+              <a:cs typeface="+mj-cs"/>
+            </a:endParaRPr>
+          </a:p>
+        </p:txBody>
+      </p:sp>
+      <p:pic>
+        <p:nvPicPr>
+          <p:cNvPr id="5" name="Content Placeholder 4" descr="A red circle with blue and red text&#10;&#10;AI-generated content may be incorrect.">
+            <a:extLst>
+              <a:ext uri="{FF2B5EF4-FFF2-40B4-BE49-F238E27FC236}">
+                <a16:creationId xmlns="" xmlns:a16="http://schemas.microsoft.com/office/drawing/2014/main" id="{46DEBA47-3BAE-AF9B-3153-39DD37CCA8CA}"/>
+              </a:ext>
+            </a:extLst>
+          </p:cNvPr>
+          <p:cNvPicPr>
+            <a:picLocks noGrp="1" noChangeAspect="1"/>
+          </p:cNvPicPr>
+          <p:nvPr>
+            <p:ph sz="half" idx="1"/>
+          </p:nvPr>
+        </p:nvPicPr>
+        <p:blipFill>
+          <a:blip r:embed="rId3"/>
+          <a:stretch>
+            <a:fillRect/>
+          </a:stretch>
+        </p:blipFill>
+        <p:spPr>
+          <a:xfrm>
+            <a:off x="617215" y="3032098"/>
+            <a:ext cx="3833111" cy="3510132"/>
+          </a:xfrm>
+        </p:spPr>
+      </p:pic>
+      <p:pic>
+        <p:nvPicPr>
+          <p:cNvPr id="12" name="Content Placeholder 11" descr="A diagram of a patient condition&#10;&#10;AI-generated content may be incorrect.">
+            <a:extLst>
+              <a:ext uri="{FF2B5EF4-FFF2-40B4-BE49-F238E27FC236}">
+                <a16:creationId xmlns="" xmlns:a16="http://schemas.microsoft.com/office/drawing/2014/main" id="{06D8CF7D-A933-7AC3-F4C7-CB856E975786}"/>
+              </a:ext>
+            </a:extLst>
+          </p:cNvPr>
+          <p:cNvPicPr>
+            <a:picLocks noGrp="1" noChangeAspect="1"/>
+          </p:cNvPicPr>
+          <p:nvPr>
+            <p:ph sz="half" idx="2"/>
+          </p:nvPr>
+        </p:nvPicPr>
+        <p:blipFill>
+          <a:blip r:embed="rId4"/>
+          <a:stretch>
+            <a:fillRect/>
+          </a:stretch>
+        </p:blipFill>
+        <p:spPr>
+          <a:xfrm>
+            <a:off x="4777863" y="2923523"/>
+            <a:ext cx="4038600" cy="3618707"/>
+          </a:xfrm>
+        </p:spPr>
+      </p:pic>
+      <p:sp>
+        <p:nvSpPr>
+          <p:cNvPr id="4" name="Rectangle 3"/>
+          <p:cNvSpPr/>
+          <p:nvPr/>
+        </p:nvSpPr>
+        <p:spPr>
+          <a:xfrm>
+            <a:off x="139637" y="1217566"/>
+            <a:ext cx="8783645" cy="1569660"/>
+          </a:xfrm>
+          <a:prstGeom prst="rect">
+            <a:avLst/>
+          </a:prstGeom>
+        </p:spPr>
+        <p:txBody>
+          <a:bodyPr wrap="square">
+            <a:spAutoFit/>
+          </a:bodyPr>
+          <a:lstStyle/>
+          <a:p>
+            <a:pPr algn="ctr"/>
+            <a:r>
+              <a:rPr lang="en-US" sz="3200" dirty="0" smtClean="0"/>
+              <a:t>4.      4.9% Persons takes Preventive Antiviral Medication while, 28.3% Persons has chronic medical conditions</a:t>
+            </a:r>
+            <a:endParaRPr lang="en-US" sz="3200" dirty="0"/>
+          </a:p>
+        </p:txBody>
+      </p:sp>
+      <p:sp>
+        <p:nvSpPr>
+          <p:cNvPr id="9" name="Footer Placeholder 8"/>
+          <p:cNvSpPr>
+            <a:spLocks noGrp="1"/>
+          </p:cNvSpPr>
+          <p:nvPr>
+            <p:ph type="ftr" sz="quarter" idx="11"/>
+          </p:nvPr>
+        </p:nvSpPr>
+        <p:spPr/>
+        <p:txBody>
+          <a:bodyPr/>
+          <a:lstStyle/>
+          <a:p>
+            <a:r>
+              <a:rPr lang="en-US" smtClean="0"/>
+              <a:t>8-10</a:t>
+            </a:r>
+            <a:endParaRPr lang="en-US"/>
+          </a:p>
+        </p:txBody>
+      </p:sp>
+    </p:spTree>
+    <p:extLst>
+      <p:ext uri="{BB962C8B-B14F-4D97-AF65-F5344CB8AC3E}">
+        <p14:creationId xmlns:p14="http://schemas.microsoft.com/office/powerpoint/2010/main" val="2711066465"/>
+      </p:ext>
+    </p:extLst>
+  </p:cSld>
+  <p:clrMapOvr>
+    <a:masterClrMapping/>
+  </p:clrMapOvr>
+  <p:timing>
+    <p:tnLst>
+      <p:par>
+        <p:cTn id="1" dur="indefinite" restart="never" nodeType="tmRoot"/>
+      </p:par>
+    </p:tnLst>
+  </p:timing>
 </p:sld>
 </file>
 
@@ -4360,4 +7493,526 @@
   </a:objectDefaults>
   <a:extraClrSchemeLst/>
 </a:theme>
+</file>
+
+<file path=ppt/theme/theme2.xml><?xml version="1.0" encoding="utf-8"?>
+<a:theme xmlns:a="http://schemas.openxmlformats.org/drawingml/2006/main" name="Office Theme">
+  <a:themeElements>
+    <a:clrScheme name="Office">
+      <a:dk1>
+        <a:sysClr val="windowText" lastClr="000000"/>
+      </a:dk1>
+      <a:lt1>
+        <a:sysClr val="window" lastClr="FFFFFF"/>
+      </a:lt1>
+      <a:dk2>
+        <a:srgbClr val="44546A"/>
+      </a:dk2>
+      <a:lt2>
+        <a:srgbClr val="E7E6E6"/>
+      </a:lt2>
+      <a:accent1>
+        <a:srgbClr val="5B9BD5"/>
+      </a:accent1>
+      <a:accent2>
+        <a:srgbClr val="ED7D31"/>
+      </a:accent2>
+      <a:accent3>
+        <a:srgbClr val="A5A5A5"/>
+      </a:accent3>
+      <a:accent4>
+        <a:srgbClr val="FFC000"/>
+      </a:accent4>
+      <a:accent5>
+        <a:srgbClr val="4472C4"/>
+      </a:accent5>
+      <a:accent6>
+        <a:srgbClr val="70AD47"/>
+      </a:accent6>
+      <a:hlink>
+        <a:srgbClr val="0563C1"/>
+      </a:hlink>
+      <a:folHlink>
+        <a:srgbClr val="954F72"/>
+      </a:folHlink>
+    </a:clrScheme>
+    <a:fontScheme name="Office">
+      <a:majorFont>
+        <a:latin typeface="Calibri Light" panose="020F0302020204030204"/>
+        <a:ea typeface=""/>
+        <a:cs typeface=""/>
+        <a:font script="Jpan" typeface="ＭＳ Ｐゴシック"/>
+        <a:font script="Hang" typeface="맑은 고딕"/>
+        <a:font script="Hans" typeface="宋体"/>
+        <a:font script="Hant" typeface="新細明體"/>
+        <a:font script="Arab" typeface="Times New Roman"/>
+        <a:font script="Hebr" typeface="Times New Roman"/>
+        <a:font script="Thai" typeface="Angsana New"/>
+        <a:font script="Ethi" typeface="Nyala"/>
+        <a:font script="Beng" typeface="Vrinda"/>
+        <a:font script="Gujr" typeface="Shruti"/>
+        <a:font script="Khmr" typeface="MoolBoran"/>
+        <a:font script="Knda" typeface="Tunga"/>
+        <a:font script="Guru" typeface="Raavi"/>
+        <a:font script="Cans" typeface="Euphemia"/>
+        <a:font script="Cher" typeface="Plantagenet Cherokee"/>
+        <a:font script="Yiii" typeface="Microsoft Yi Baiti"/>
+        <a:font script="Tibt" typeface="Microsoft Himalaya"/>
+        <a:font script="Thaa" typeface="MV Boli"/>
+        <a:font script="Deva" typeface="Mangal"/>
+        <a:font script="Telu" typeface="Gautami"/>
+        <a:font script="Taml" typeface="Latha"/>
+        <a:font script="Syrc" typeface="Estrangelo Edessa"/>
+        <a:font script="Orya" typeface="Kalinga"/>
+        <a:font script="Mlym" typeface="Kartika"/>
+        <a:font script="Laoo" typeface="DokChampa"/>
+        <a:font script="Sinh" typeface="Iskoola Pota"/>
+        <a:font script="Mong" typeface="Mongolian Baiti"/>
+        <a:font script="Viet" typeface="Times New Roman"/>
+        <a:font script="Uigh" typeface="Microsoft Uighur"/>
+        <a:font script="Geor" typeface="Sylfaen"/>
+      </a:majorFont>
+      <a:minorFont>
+        <a:latin typeface="Calibri" panose="020F0502020204030204"/>
+        <a:ea typeface=""/>
+        <a:cs typeface=""/>
+        <a:font script="Jpan" typeface="ＭＳ Ｐゴシック"/>
+        <a:font script="Hang" typeface="맑은 고딕"/>
+        <a:font script="Hans" typeface="宋体"/>
+        <a:font script="Hant" typeface="新細明體"/>
+        <a:font script="Arab" typeface="Arial"/>
+        <a:font script="Hebr" typeface="Arial"/>
+        <a:font script="Thai" typeface="Cordia New"/>
+        <a:font script="Ethi" typeface="Nyala"/>
+        <a:font script="Beng" typeface="Vrinda"/>
+        <a:font script="Gujr" typeface="Shruti"/>
+        <a:font script="Khmr" typeface="DaunPenh"/>
+        <a:font script="Knda" typeface="Tunga"/>
+        <a:font script="Guru" typeface="Raavi"/>
+        <a:font script="Cans" typeface="Euphemia"/>
+        <a:font script="Cher" typeface="Plantagenet Cherokee"/>
+        <a:font script="Yiii" typeface="Microsoft Yi Baiti"/>
+        <a:font script="Tibt" typeface="Microsoft Himalaya"/>
+        <a:font script="Thaa" typeface="MV Boli"/>
+        <a:font script="Deva" typeface="Mangal"/>
+        <a:font script="Telu" typeface="Gautami"/>
+        <a:font script="Taml" typeface="Latha"/>
+        <a:font script="Syrc" typeface="Estrangelo Edessa"/>
+        <a:font script="Orya" typeface="Kalinga"/>
+        <a:font script="Mlym" typeface="Kartika"/>
+        <a:font script="Laoo" typeface="DokChampa"/>
+        <a:font script="Sinh" typeface="Iskoola Pota"/>
+        <a:font script="Mong" typeface="Mongolian Baiti"/>
+        <a:font script="Viet" typeface="Arial"/>
+        <a:font script="Uigh" typeface="Microsoft Uighur"/>
+        <a:font script="Geor" typeface="Sylfaen"/>
+      </a:minorFont>
+    </a:fontScheme>
+    <a:fmtScheme name="Office">
+      <a:fillStyleLst>
+        <a:solidFill>
+          <a:schemeClr val="phClr"/>
+        </a:solidFill>
+        <a:gradFill rotWithShape="1">
+          <a:gsLst>
+            <a:gs pos="0">
+              <a:schemeClr val="phClr">
+                <a:lumMod val="110000"/>
+                <a:satMod val="105000"/>
+                <a:tint val="67000"/>
+              </a:schemeClr>
+            </a:gs>
+            <a:gs pos="50000">
+              <a:schemeClr val="phClr">
+                <a:lumMod val="105000"/>
+                <a:satMod val="103000"/>
+                <a:tint val="73000"/>
+              </a:schemeClr>
+            </a:gs>
+            <a:gs pos="100000">
+              <a:schemeClr val="phClr">
+                <a:lumMod val="105000"/>
+                <a:satMod val="109000"/>
+                <a:tint val="81000"/>
+              </a:schemeClr>
+            </a:gs>
+          </a:gsLst>
+          <a:lin ang="5400000" scaled="0"/>
+        </a:gradFill>
+        <a:gradFill rotWithShape="1">
+          <a:gsLst>
+            <a:gs pos="0">
+              <a:schemeClr val="phClr">
+                <a:satMod val="103000"/>
+                <a:lumMod val="102000"/>
+                <a:tint val="94000"/>
+              </a:schemeClr>
+            </a:gs>
+            <a:gs pos="50000">
+              <a:schemeClr val="phClr">
+                <a:satMod val="110000"/>
+                <a:lumMod val="100000"/>
+                <a:shade val="100000"/>
+              </a:schemeClr>
+            </a:gs>
+            <a:gs pos="100000">
+              <a:schemeClr val="phClr">
+                <a:lumMod val="99000"/>
+                <a:satMod val="120000"/>
+                <a:shade val="78000"/>
+              </a:schemeClr>
+            </a:gs>
+          </a:gsLst>
+          <a:lin ang="5400000" scaled="0"/>
+        </a:gradFill>
+      </a:fillStyleLst>
+      <a:lnStyleLst>
+        <a:ln w="6350" cap="flat" cmpd="sng" algn="ctr">
+          <a:solidFill>
+            <a:schemeClr val="phClr"/>
+          </a:solidFill>
+          <a:prstDash val="solid"/>
+          <a:miter lim="800000"/>
+        </a:ln>
+        <a:ln w="12700" cap="flat" cmpd="sng" algn="ctr">
+          <a:solidFill>
+            <a:schemeClr val="phClr"/>
+          </a:solidFill>
+          <a:prstDash val="solid"/>
+          <a:miter lim="800000"/>
+        </a:ln>
+        <a:ln w="19050" cap="flat" cmpd="sng" algn="ctr">
+          <a:solidFill>
+            <a:schemeClr val="phClr"/>
+          </a:solidFill>
+          <a:prstDash val="solid"/>
+          <a:miter lim="800000"/>
+        </a:ln>
+      </a:lnStyleLst>
+      <a:effectStyleLst>
+        <a:effectStyle>
+          <a:effectLst/>
+        </a:effectStyle>
+        <a:effectStyle>
+          <a:effectLst/>
+        </a:effectStyle>
+        <a:effectStyle>
+          <a:effectLst>
+            <a:outerShdw blurRad="57150" dist="19050" dir="5400000" algn="ctr" rotWithShape="0">
+              <a:srgbClr val="000000">
+                <a:alpha val="63000"/>
+              </a:srgbClr>
+            </a:outerShdw>
+          </a:effectLst>
+        </a:effectStyle>
+      </a:effectStyleLst>
+      <a:bgFillStyleLst>
+        <a:solidFill>
+          <a:schemeClr val="phClr"/>
+        </a:solidFill>
+        <a:solidFill>
+          <a:schemeClr val="phClr">
+            <a:tint val="95000"/>
+            <a:satMod val="170000"/>
+          </a:schemeClr>
+        </a:solidFill>
+        <a:gradFill rotWithShape="1">
+          <a:gsLst>
+            <a:gs pos="0">
+              <a:schemeClr val="phClr">
+                <a:tint val="93000"/>
+                <a:satMod val="150000"/>
+                <a:shade val="98000"/>
+                <a:lumMod val="102000"/>
+              </a:schemeClr>
+            </a:gs>
+            <a:gs pos="50000">
+              <a:schemeClr val="phClr">
+                <a:tint val="98000"/>
+                <a:satMod val="130000"/>
+                <a:shade val="90000"/>
+                <a:lumMod val="103000"/>
+              </a:schemeClr>
+            </a:gs>
+            <a:gs pos="100000">
+              <a:schemeClr val="phClr">
+                <a:shade val="63000"/>
+                <a:satMod val="120000"/>
+              </a:schemeClr>
+            </a:gs>
+          </a:gsLst>
+          <a:lin ang="5400000" scaled="0"/>
+        </a:gradFill>
+      </a:bgFillStyleLst>
+    </a:fmtScheme>
+  </a:themeElements>
+  <a:objectDefaults/>
+  <a:extraClrSchemeLst/>
+  <a:extLst>
+    <a:ext uri="{05A4C25C-085E-4340-85A3-A5531E510DB2}">
+      <thm15:themeFamily xmlns:thm15="http://schemas.microsoft.com/office/thememl/2012/main" name="Office Theme" id="{62F939B6-93AF-4DB8-9C6B-D6C7DFDC589F}" vid="{4A3C46E8-61CC-4603-A589-7422A47A8E4A}"/>
+    </a:ext>
+  </a:extLst>
+</a:theme>
+</file>
+
+<file path=ppt/theme/theme3.xml><?xml version="1.0" encoding="utf-8"?>
+<a:theme xmlns:a="http://schemas.openxmlformats.org/drawingml/2006/main" name="Office Theme">
+  <a:themeElements>
+    <a:clrScheme name="Office">
+      <a:dk1>
+        <a:sysClr val="windowText" lastClr="000000"/>
+      </a:dk1>
+      <a:lt1>
+        <a:sysClr val="window" lastClr="FFFFFF"/>
+      </a:lt1>
+      <a:dk2>
+        <a:srgbClr val="44546A"/>
+      </a:dk2>
+      <a:lt2>
+        <a:srgbClr val="E7E6E6"/>
+      </a:lt2>
+      <a:accent1>
+        <a:srgbClr val="5B9BD5"/>
+      </a:accent1>
+      <a:accent2>
+        <a:srgbClr val="ED7D31"/>
+      </a:accent2>
+      <a:accent3>
+        <a:srgbClr val="A5A5A5"/>
+      </a:accent3>
+      <a:accent4>
+        <a:srgbClr val="FFC000"/>
+      </a:accent4>
+      <a:accent5>
+        <a:srgbClr val="4472C4"/>
+      </a:accent5>
+      <a:accent6>
+        <a:srgbClr val="70AD47"/>
+      </a:accent6>
+      <a:hlink>
+        <a:srgbClr val="0563C1"/>
+      </a:hlink>
+      <a:folHlink>
+        <a:srgbClr val="954F72"/>
+      </a:folHlink>
+    </a:clrScheme>
+    <a:fontScheme name="Office">
+      <a:majorFont>
+        <a:latin typeface="Calibri Light" panose="020F0302020204030204"/>
+        <a:ea typeface=""/>
+        <a:cs typeface=""/>
+        <a:font script="Jpan" typeface="ＭＳ Ｐゴシック"/>
+        <a:font script="Hang" typeface="맑은 고딕"/>
+        <a:font script="Hans" typeface="宋体"/>
+        <a:font script="Hant" typeface="新細明體"/>
+        <a:font script="Arab" typeface="Times New Roman"/>
+        <a:font script="Hebr" typeface="Times New Roman"/>
+        <a:font script="Thai" typeface="Angsana New"/>
+        <a:font script="Ethi" typeface="Nyala"/>
+        <a:font script="Beng" typeface="Vrinda"/>
+        <a:font script="Gujr" typeface="Shruti"/>
+        <a:font script="Khmr" typeface="MoolBoran"/>
+        <a:font script="Knda" typeface="Tunga"/>
+        <a:font script="Guru" typeface="Raavi"/>
+        <a:font script="Cans" typeface="Euphemia"/>
+        <a:font script="Cher" typeface="Plantagenet Cherokee"/>
+        <a:font script="Yiii" typeface="Microsoft Yi Baiti"/>
+        <a:font script="Tibt" typeface="Microsoft Himalaya"/>
+        <a:font script="Thaa" typeface="MV Boli"/>
+        <a:font script="Deva" typeface="Mangal"/>
+        <a:font script="Telu" typeface="Gautami"/>
+        <a:font script="Taml" typeface="Latha"/>
+        <a:font script="Syrc" typeface="Estrangelo Edessa"/>
+        <a:font script="Orya" typeface="Kalinga"/>
+        <a:font script="Mlym" typeface="Kartika"/>
+        <a:font script="Laoo" typeface="DokChampa"/>
+        <a:font script="Sinh" typeface="Iskoola Pota"/>
+        <a:font script="Mong" typeface="Mongolian Baiti"/>
+        <a:font script="Viet" typeface="Times New Roman"/>
+        <a:font script="Uigh" typeface="Microsoft Uighur"/>
+        <a:font script="Geor" typeface="Sylfaen"/>
+      </a:majorFont>
+      <a:minorFont>
+        <a:latin typeface="Calibri" panose="020F0502020204030204"/>
+        <a:ea typeface=""/>
+        <a:cs typeface=""/>
+        <a:font script="Jpan" typeface="ＭＳ Ｐゴシック"/>
+        <a:font script="Hang" typeface="맑은 고딕"/>
+        <a:font script="Hans" typeface="宋体"/>
+        <a:font script="Hant" typeface="新細明體"/>
+        <a:font script="Arab" typeface="Arial"/>
+        <a:font script="Hebr" typeface="Arial"/>
+        <a:font script="Thai" typeface="Cordia New"/>
+        <a:font script="Ethi" typeface="Nyala"/>
+        <a:font script="Beng" typeface="Vrinda"/>
+        <a:font script="Gujr" typeface="Shruti"/>
+        <a:font script="Khmr" typeface="DaunPenh"/>
+        <a:font script="Knda" typeface="Tunga"/>
+        <a:font script="Guru" typeface="Raavi"/>
+        <a:font script="Cans" typeface="Euphemia"/>
+        <a:font script="Cher" typeface="Plantagenet Cherokee"/>
+        <a:font script="Yiii" typeface="Microsoft Yi Baiti"/>
+        <a:font script="Tibt" typeface="Microsoft Himalaya"/>
+        <a:font script="Thaa" typeface="MV Boli"/>
+        <a:font script="Deva" typeface="Mangal"/>
+        <a:font script="Telu" typeface="Gautami"/>
+        <a:font script="Taml" typeface="Latha"/>
+        <a:font script="Syrc" typeface="Estrangelo Edessa"/>
+        <a:font script="Orya" typeface="Kalinga"/>
+        <a:font script="Mlym" typeface="Kartika"/>
+        <a:font script="Laoo" typeface="DokChampa"/>
+        <a:font script="Sinh" typeface="Iskoola Pota"/>
+        <a:font script="Mong" typeface="Mongolian Baiti"/>
+        <a:font script="Viet" typeface="Arial"/>
+        <a:font script="Uigh" typeface="Microsoft Uighur"/>
+        <a:font script="Geor" typeface="Sylfaen"/>
+      </a:minorFont>
+    </a:fontScheme>
+    <a:fmtScheme name="Office">
+      <a:fillStyleLst>
+        <a:solidFill>
+          <a:schemeClr val="phClr"/>
+        </a:solidFill>
+        <a:gradFill rotWithShape="1">
+          <a:gsLst>
+            <a:gs pos="0">
+              <a:schemeClr val="phClr">
+                <a:lumMod val="110000"/>
+                <a:satMod val="105000"/>
+                <a:tint val="67000"/>
+              </a:schemeClr>
+            </a:gs>
+            <a:gs pos="50000">
+              <a:schemeClr val="phClr">
+                <a:lumMod val="105000"/>
+                <a:satMod val="103000"/>
+                <a:tint val="73000"/>
+              </a:schemeClr>
+            </a:gs>
+            <a:gs pos="100000">
+              <a:schemeClr val="phClr">
+                <a:lumMod val="105000"/>
+                <a:satMod val="109000"/>
+                <a:tint val="81000"/>
+              </a:schemeClr>
+            </a:gs>
+          </a:gsLst>
+          <a:lin ang="5400000" scaled="0"/>
+        </a:gradFill>
+        <a:gradFill rotWithShape="1">
+          <a:gsLst>
+            <a:gs pos="0">
+              <a:schemeClr val="phClr">
+                <a:satMod val="103000"/>
+                <a:lumMod val="102000"/>
+                <a:tint val="94000"/>
+              </a:schemeClr>
+            </a:gs>
+            <a:gs pos="50000">
+              <a:schemeClr val="phClr">
+                <a:satMod val="110000"/>
+                <a:lumMod val="100000"/>
+                <a:shade val="100000"/>
+              </a:schemeClr>
+            </a:gs>
+            <a:gs pos="100000">
+              <a:schemeClr val="phClr">
+                <a:lumMod val="99000"/>
+                <a:satMod val="120000"/>
+                <a:shade val="78000"/>
+              </a:schemeClr>
+            </a:gs>
+          </a:gsLst>
+          <a:lin ang="5400000" scaled="0"/>
+        </a:gradFill>
+      </a:fillStyleLst>
+      <a:lnStyleLst>
+        <a:ln w="6350" cap="flat" cmpd="sng" algn="ctr">
+          <a:solidFill>
+            <a:schemeClr val="phClr"/>
+          </a:solidFill>
+          <a:prstDash val="solid"/>
+          <a:miter lim="800000"/>
+        </a:ln>
+        <a:ln w="12700" cap="flat" cmpd="sng" algn="ctr">
+          <a:solidFill>
+            <a:schemeClr val="phClr"/>
+          </a:solidFill>
+          <a:prstDash val="solid"/>
+          <a:miter lim="800000"/>
+        </a:ln>
+        <a:ln w="19050" cap="flat" cmpd="sng" algn="ctr">
+          <a:solidFill>
+            <a:schemeClr val="phClr"/>
+          </a:solidFill>
+          <a:prstDash val="solid"/>
+          <a:miter lim="800000"/>
+        </a:ln>
+      </a:lnStyleLst>
+      <a:effectStyleLst>
+        <a:effectStyle>
+          <a:effectLst/>
+        </a:effectStyle>
+        <a:effectStyle>
+          <a:effectLst/>
+        </a:effectStyle>
+        <a:effectStyle>
+          <a:effectLst>
+            <a:outerShdw blurRad="57150" dist="19050" dir="5400000" algn="ctr" rotWithShape="0">
+              <a:srgbClr val="000000">
+                <a:alpha val="63000"/>
+              </a:srgbClr>
+            </a:outerShdw>
+          </a:effectLst>
+        </a:effectStyle>
+      </a:effectStyleLst>
+      <a:bgFillStyleLst>
+        <a:solidFill>
+          <a:schemeClr val="phClr"/>
+        </a:solidFill>
+        <a:solidFill>
+          <a:schemeClr val="phClr">
+            <a:tint val="95000"/>
+            <a:satMod val="170000"/>
+          </a:schemeClr>
+        </a:solidFill>
+        <a:gradFill rotWithShape="1">
+          <a:gsLst>
+            <a:gs pos="0">
+              <a:schemeClr val="phClr">
+                <a:tint val="93000"/>
+                <a:satMod val="150000"/>
+                <a:shade val="98000"/>
+                <a:lumMod val="102000"/>
+              </a:schemeClr>
+            </a:gs>
+            <a:gs pos="50000">
+              <a:schemeClr val="phClr">
+                <a:tint val="98000"/>
+                <a:satMod val="130000"/>
+                <a:shade val="90000"/>
+                <a:lumMod val="103000"/>
+              </a:schemeClr>
+            </a:gs>
+            <a:gs pos="100000">
+              <a:schemeClr val="phClr">
+                <a:shade val="63000"/>
+                <a:satMod val="120000"/>
+              </a:schemeClr>
+            </a:gs>
+          </a:gsLst>
+          <a:lin ang="5400000" scaled="0"/>
+        </a:gradFill>
+      </a:bgFillStyleLst>
+    </a:fmtScheme>
+  </a:themeElements>
+  <a:objectDefaults/>
+  <a:extraClrSchemeLst/>
+  <a:extLst>
+    <a:ext uri="{05A4C25C-085E-4340-85A3-A5531E510DB2}">
+      <thm15:themeFamily xmlns:thm15="http://schemas.microsoft.com/office/thememl/2012/main" name="Office Theme" id="{62F939B6-93AF-4DB8-9C6B-D6C7DFDC589F}" vid="{4A3C46E8-61CC-4603-A589-7422A47A8E4A}"/>
+    </a:ext>
+  </a:extLst>
+</a:theme>
 </file>
--- a/documents/Flu_Vaccination_Predictor_Presentation.pptx
+++ b/documents/Flu_Vaccination_Predictor_Presentation.pptx
@@ -4720,9 +4720,22 @@
           <a:lstStyle/>
           <a:p>
             <a:r>
-              <a:rPr dirty="0"/>
-              <a:t>Model &amp; Analysis</a:t>
-            </a:r>
+              <a:rPr lang="en-GB" dirty="0" smtClean="0"/>
+              <a:t>Data </a:t>
+            </a:r>
+            <a:r>
+              <a:rPr dirty="0" smtClean="0"/>
+              <a:t>Analysis</a:t>
+            </a:r>
+            <a:r>
+              <a:rPr lang="en-GB" dirty="0"/>
+              <a:t> </a:t>
+            </a:r>
+            <a:r>
+              <a:rPr lang="en-GB" dirty="0" smtClean="0"/>
+              <a:t>Summary</a:t>
+            </a:r>
+            <a:endParaRPr dirty="0"/>
           </a:p>
         </p:txBody>
       </p:sp>
@@ -4749,17 +4762,88 @@
           <a:lstStyle/>
           <a:p>
             <a:r>
+              <a:rPr sz="2000" b="1" dirty="0" smtClean="0"/>
+              <a:t>Cleaned </a:t>
+            </a:r>
+            <a:r>
+              <a:rPr sz="2000" b="1" dirty="0"/>
+              <a:t>all missing </a:t>
+            </a:r>
+            <a:r>
+              <a:rPr sz="2000" b="1" dirty="0" smtClean="0"/>
+              <a:t>data</a:t>
+            </a:r>
+            <a:r>
+              <a:rPr lang="en-GB" sz="2000" b="1" dirty="0" smtClean="0"/>
+              <a:t>:</a:t>
+            </a:r>
+            <a:r>
+              <a:rPr sz="2000" b="1" dirty="0" smtClean="0"/>
+              <a:t> </a:t>
+            </a:r>
+            <a:endParaRPr lang="en-GB" sz="2000" b="1" dirty="0" smtClean="0"/>
+          </a:p>
+          <a:p>
+            <a:r>
+              <a:rPr lang="en-GB" sz="2000" dirty="0"/>
+              <a:t> </a:t>
+            </a:r>
+            <a:r>
+              <a:rPr lang="en-GB" sz="2000" dirty="0" smtClean="0"/>
+              <a:t>-Dr</a:t>
+            </a:r>
+            <a:r>
+              <a:rPr sz="2000" dirty="0" err="1" smtClean="0"/>
+              <a:t>opped</a:t>
+            </a:r>
+            <a:r>
+              <a:rPr sz="2000" dirty="0" smtClean="0"/>
+              <a:t> </a:t>
+            </a:r>
+            <a:r>
               <a:rPr sz="2000" dirty="0"/>
-              <a:t>- Cleaned all missing data (used imputation or dropped high-missing columns)</a:t>
-            </a:r>
-          </a:p>
-          <a:p>
-            <a:r>
-              <a:rPr sz="2000" dirty="0"/>
-              <a:t>- Used logistic regression and feature importance to analyze impact</a:t>
-            </a:r>
-          </a:p>
-          <a:p>
+              <a:t>high-missing </a:t>
+            </a:r>
+            <a:r>
+              <a:rPr sz="2000" dirty="0" smtClean="0"/>
+              <a:t>columns</a:t>
+            </a:r>
+            <a:r>
+              <a:rPr lang="en-GB" sz="2000" dirty="0" smtClean="0"/>
+              <a:t> (</a:t>
+            </a:r>
+            <a:r>
+              <a:rPr lang="en-GB" sz="2000" dirty="0" err="1" smtClean="0"/>
+              <a:t>employment_occupation</a:t>
+            </a:r>
+            <a:r>
+              <a:rPr lang="en-GB" sz="2000" dirty="0" smtClean="0"/>
+              <a:t> (50 %), </a:t>
+            </a:r>
+            <a:r>
+              <a:rPr lang="en-GB" sz="2000" dirty="0" err="1" smtClean="0"/>
+              <a:t>employment_industry</a:t>
+            </a:r>
+            <a:r>
+              <a:rPr lang="en-GB" sz="2000" dirty="0"/>
+              <a:t> </a:t>
+            </a:r>
+            <a:r>
+              <a:rPr lang="en-GB" sz="2000" dirty="0" smtClean="0"/>
+              <a:t>(49.9%), </a:t>
+            </a:r>
+            <a:r>
+              <a:rPr lang="en-GB" sz="2000" dirty="0" err="1" smtClean="0"/>
+              <a:t>health_insurance</a:t>
+            </a:r>
+            <a:r>
+              <a:rPr lang="en-GB" sz="2000" dirty="0"/>
+              <a:t> </a:t>
+            </a:r>
+            <a:r>
+              <a:rPr lang="en-GB" sz="2000" dirty="0" smtClean="0"/>
+              <a:t>(45.9%), etc.)</a:t>
+            </a:r>
             <a:endParaRPr sz="2000" dirty="0"/>
           </a:p>
           <a:p>
@@ -4801,8 +4885,24 @@
               <a:t> </a:t>
             </a:r>
             <a:r>
+              <a:rPr sz="2000" dirty="0" smtClean="0"/>
+              <a:t>concern</a:t>
+            </a:r>
+            <a:r>
+              <a:rPr lang="en-GB" sz="2000" dirty="0"/>
+              <a:t> </a:t>
+            </a:r>
+            <a:r>
+              <a:rPr lang="en-GB" sz="2000" dirty="0" smtClean="0"/>
+              <a:t>– face mark, wash hand and avoidance </a:t>
+            </a:r>
+            <a:r>
+              <a:rPr sz="2000" dirty="0" smtClean="0"/>
+              <a:t>(57.2</a:t>
+            </a:r>
+            <a:r>
               <a:rPr sz="2000" dirty="0"/>
-              <a:t>concern (57.2%)</a:t>
+              <a:t>%)</a:t>
             </a:r>
           </a:p>
           <a:p>
@@ -4971,16 +5071,11 @@
             </a:pPr>
             <a:r>
               <a:rPr sz="2000" dirty="0"/>
-              <a:t>4. Promote combined vaccine confidence messages</a:t>
-            </a:r>
-          </a:p>
-          <a:p>
-            <a:pPr marL="0" indent="0">
-              <a:buNone/>
-            </a:pPr>
-            <a:r>
-              <a:rPr sz="2000" dirty="0"/>
-              <a:t>5. Improve future surveys: ask about access and timing</a:t>
+              <a:t>4. Promote combined vaccine confidence </a:t>
+            </a:r>
+            <a:r>
+              <a:rPr sz="2000" dirty="0" smtClean="0"/>
+              <a:t>messages</a:t>
             </a:r>
           </a:p>
         </p:txBody>
@@ -4993,7 +5088,7 @@
         </p:nvSpPr>
         <p:spPr>
           <a:xfrm>
-            <a:off x="346842" y="3678515"/>
+            <a:off x="346842" y="3493939"/>
             <a:ext cx="8216086" cy="707886"/>
           </a:xfrm>
           <a:prstGeom prst="rect">
@@ -5022,7 +5117,7 @@
         </p:nvSpPr>
         <p:spPr>
           <a:xfrm>
-            <a:off x="648637" y="4386401"/>
+            <a:off x="648637" y="4269285"/>
             <a:ext cx="7076465" cy="1631216"/>
           </a:xfrm>
           <a:prstGeom prst="rect">
@@ -5453,7 +5548,7 @@
         <p:cNvPr id="1" name="">
           <a:extLst>
             <a:ext uri="{FF2B5EF4-FFF2-40B4-BE49-F238E27FC236}">
-              <a16:creationId xmlns="" xmlns:a16="http://schemas.microsoft.com/office/drawing/2014/main" id="{B2B19A18-EB17-47D1-456A-E2236EE982BB}"/>
+              <a16:creationId xmlns:a16="http://schemas.microsoft.com/office/drawing/2014/main" xmlns="" id="{B2B19A18-EB17-47D1-456A-E2236EE982BB}"/>
             </a:ext>
           </a:extLst>
         </p:cNvPr>
@@ -5473,10 +5568,10 @@
           <p:cNvPr id="28" name="Rectangle 27">
             <a:extLst>
               <a:ext uri="{FF2B5EF4-FFF2-40B4-BE49-F238E27FC236}">
-                <a16:creationId xmlns="" xmlns:a16="http://schemas.microsoft.com/office/drawing/2014/main" id="{69D47016-023F-44BD-981C-50E7A10A6609}"/>
+                <a16:creationId xmlns:a16="http://schemas.microsoft.com/office/drawing/2014/main" xmlns="" id="{69D47016-023F-44BD-981C-50E7A10A6609}"/>
               </a:ext>
               <a:ext uri="{C183D7F6-B498-43B3-948B-1728B52AA6E4}">
-                <adec:decorative xmlns="" xmlns:adec="http://schemas.microsoft.com/office/drawing/2017/decorative" val="1"/>
+                <adec:decorative xmlns:adec="http://schemas.microsoft.com/office/drawing/2017/decorative" xmlns="" val="1"/>
               </a:ext>
             </a:extLst>
           </p:cNvPr>
@@ -5486,7 +5581,7 @@
           <p:nvPr>
             <p:extLst>
               <p:ext uri="{386F3935-93C4-4BCD-93E2-E3B085C9AB24}">
-                <p16:designElem xmlns="" xmlns:p16="http://schemas.microsoft.com/office/powerpoint/2015/main" val="1"/>
+                <p16:designElem xmlns:p16="http://schemas.microsoft.com/office/powerpoint/2015/main" xmlns="" val="1"/>
               </p:ext>
             </p:extLst>
           </p:nvPr>
@@ -5533,7 +5628,7 @@
           <p:cNvPr id="2" name="Title 1">
             <a:extLst>
               <a:ext uri="{FF2B5EF4-FFF2-40B4-BE49-F238E27FC236}">
-                <a16:creationId xmlns="" xmlns:a16="http://schemas.microsoft.com/office/drawing/2014/main" id="{FA9C25E5-5E66-D0C9-2B1D-F144EC7DA064}"/>
+                <a16:creationId xmlns:a16="http://schemas.microsoft.com/office/drawing/2014/main" xmlns="" id="{FA9C25E5-5E66-D0C9-2B1D-F144EC7DA064}"/>
               </a:ext>
             </a:extLst>
           </p:cNvPr>
@@ -5578,7 +5673,7 @@
           <p:cNvPr id="12" name="Content Placeholder 11" descr="A pie chart with different colored triangles&#10;&#10;AI-generated content may be incorrect.">
             <a:extLst>
               <a:ext uri="{FF2B5EF4-FFF2-40B4-BE49-F238E27FC236}">
-                <a16:creationId xmlns="" xmlns:a16="http://schemas.microsoft.com/office/drawing/2014/main" id="{C4A9B491-01DE-8402-1DFA-8BEF3E484457}"/>
+                <a16:creationId xmlns:a16="http://schemas.microsoft.com/office/drawing/2014/main" xmlns="" id="{C4A9B491-01DE-8402-1DFA-8BEF3E484457}"/>
               </a:ext>
             </a:extLst>
           </p:cNvPr>
@@ -5610,10 +5705,10 @@
           <p:cNvPr id="6" name="sketch line">
             <a:extLst>
               <a:ext uri="{FF2B5EF4-FFF2-40B4-BE49-F238E27FC236}">
-                <a16:creationId xmlns="" xmlns:a16="http://schemas.microsoft.com/office/drawing/2014/main" id="{D6A9C53F-5F90-40A5-8C85-5412D39C8C68}"/>
+                <a16:creationId xmlns:a16="http://schemas.microsoft.com/office/drawing/2014/main" xmlns="" id="{D6A9C53F-5F90-40A5-8C85-5412D39C8C68}"/>
               </a:ext>
               <a:ext uri="{C183D7F6-B498-43B3-948B-1728B52AA6E4}">
-                <adec:decorative xmlns="" xmlns:adec="http://schemas.microsoft.com/office/drawing/2017/decorative" val="1"/>
+                <adec:decorative xmlns:adec="http://schemas.microsoft.com/office/drawing/2017/decorative" xmlns="" val="1"/>
               </a:ext>
             </a:extLst>
           </p:cNvPr>
@@ -5623,7 +5718,7 @@
           <p:nvPr>
             <p:extLst>
               <p:ext uri="{386F3935-93C4-4BCD-93E2-E3B085C9AB24}">
-                <p16:designElem xmlns="" xmlns:p16="http://schemas.microsoft.com/office/powerpoint/2015/main" val="1"/>
+                <p16:designElem xmlns:p16="http://schemas.microsoft.com/office/powerpoint/2015/main" xmlns="" val="1"/>
               </p:ext>
             </p:extLst>
           </p:nvPr>
@@ -5821,7 +5916,7 @@
             <a:round/>
             <a:extLst>
               <a:ext uri="{C807C97D-BFC1-408E-A445-0C87EB9F89A2}">
-                <ask:lineSketchStyleProps xmlns="" xmlns:ask="http://schemas.microsoft.com/office/drawing/2018/sketchyshapes" sd="2863741219">
+                <ask:lineSketchStyleProps xmlns:ask="http://schemas.microsoft.com/office/drawing/2018/sketchyshapes" xmlns="" sd="2863741219">
                   <a:prstGeom prst="rect">
                     <a:avLst/>
                   </a:prstGeom>
@@ -5863,7 +5958,7 @@
           <p:cNvPr id="10" name="Content Placeholder 9" descr="A graph with numbers and a number of persons&#10;&#10;AI-generated content may be incorrect.">
             <a:extLst>
               <a:ext uri="{FF2B5EF4-FFF2-40B4-BE49-F238E27FC236}">
-                <a16:creationId xmlns="" xmlns:a16="http://schemas.microsoft.com/office/drawing/2014/main" id="{24AE16AC-6079-E09A-E388-50DF57F6EBAC}"/>
+                <a16:creationId xmlns:a16="http://schemas.microsoft.com/office/drawing/2014/main" xmlns="" id="{24AE16AC-6079-E09A-E388-50DF57F6EBAC}"/>
               </a:ext>
             </a:extLst>
           </p:cNvPr>
@@ -5949,7 +6044,7 @@
         <p:cNvPr id="1" name="">
           <a:extLst>
             <a:ext uri="{FF2B5EF4-FFF2-40B4-BE49-F238E27FC236}">
-              <a16:creationId xmlns="" xmlns:a16="http://schemas.microsoft.com/office/drawing/2014/main" id="{33FC1DEE-427B-7ADB-AEE9-F7D604A93368}"/>
+              <a16:creationId xmlns:a16="http://schemas.microsoft.com/office/drawing/2014/main" xmlns="" id="{33FC1DEE-427B-7ADB-AEE9-F7D604A93368}"/>
             </a:ext>
           </a:extLst>
         </p:cNvPr>
@@ -5969,10 +6064,10 @@
           <p:cNvPr id="29" name="Rectangle 28">
             <a:extLst>
               <a:ext uri="{FF2B5EF4-FFF2-40B4-BE49-F238E27FC236}">
-                <a16:creationId xmlns="" xmlns:a16="http://schemas.microsoft.com/office/drawing/2014/main" id="{C4879EFC-8E62-4E00-973C-C45EE9EC676D}"/>
+                <a16:creationId xmlns:a16="http://schemas.microsoft.com/office/drawing/2014/main" xmlns="" id="{C4879EFC-8E62-4E00-973C-C45EE9EC676D}"/>
               </a:ext>
               <a:ext uri="{C183D7F6-B498-43B3-948B-1728B52AA6E4}">
-                <adec:decorative xmlns="" xmlns:adec="http://schemas.microsoft.com/office/drawing/2017/decorative" val="1"/>
+                <adec:decorative xmlns:adec="http://schemas.microsoft.com/office/drawing/2017/decorative" xmlns="" val="1"/>
               </a:ext>
             </a:extLst>
           </p:cNvPr>
@@ -5982,7 +6077,7 @@
           <p:nvPr>
             <p:extLst>
               <p:ext uri="{386F3935-93C4-4BCD-93E2-E3B085C9AB24}">
-                <p16:designElem xmlns="" xmlns:p16="http://schemas.microsoft.com/office/powerpoint/2015/main" val="1"/>
+                <p16:designElem xmlns:p16="http://schemas.microsoft.com/office/powerpoint/2015/main" xmlns="" val="1"/>
               </p:ext>
             </p:extLst>
           </p:nvPr>
@@ -6029,7 +6124,7 @@
           <p:cNvPr id="2" name="Title 1">
             <a:extLst>
               <a:ext uri="{FF2B5EF4-FFF2-40B4-BE49-F238E27FC236}">
-                <a16:creationId xmlns="" xmlns:a16="http://schemas.microsoft.com/office/drawing/2014/main" id="{6D4F07FF-396A-B794-9953-3885F1D35F1E}"/>
+                <a16:creationId xmlns:a16="http://schemas.microsoft.com/office/drawing/2014/main" xmlns="" id="{6D4F07FF-396A-B794-9953-3885F1D35F1E}"/>
               </a:ext>
             </a:extLst>
           </p:cNvPr>
@@ -6078,10 +6173,10 @@
           <p:cNvPr id="31" name="sketch line">
             <a:extLst>
               <a:ext uri="{FF2B5EF4-FFF2-40B4-BE49-F238E27FC236}">
-                <a16:creationId xmlns="" xmlns:a16="http://schemas.microsoft.com/office/drawing/2014/main" id="{D6A9C53F-5F90-40A5-8C85-5412D39C8C68}"/>
+                <a16:creationId xmlns:a16="http://schemas.microsoft.com/office/drawing/2014/main" xmlns="" id="{D6A9C53F-5F90-40A5-8C85-5412D39C8C68}"/>
               </a:ext>
               <a:ext uri="{C183D7F6-B498-43B3-948B-1728B52AA6E4}">
-                <adec:decorative xmlns="" xmlns:adec="http://schemas.microsoft.com/office/drawing/2017/decorative" val="1"/>
+                <adec:decorative xmlns:adec="http://schemas.microsoft.com/office/drawing/2017/decorative" xmlns="" val="1"/>
               </a:ext>
             </a:extLst>
           </p:cNvPr>
@@ -6091,7 +6186,7 @@
           <p:nvPr>
             <p:extLst>
               <p:ext uri="{386F3935-93C4-4BCD-93E2-E3B085C9AB24}">
-                <p16:designElem xmlns="" xmlns:p16="http://schemas.microsoft.com/office/powerpoint/2015/main" val="1"/>
+                <p16:designElem xmlns:p16="http://schemas.microsoft.com/office/powerpoint/2015/main" xmlns="" val="1"/>
               </p:ext>
             </p:extLst>
           </p:nvPr>
@@ -6289,7 +6384,7 @@
             <a:round/>
             <a:extLst>
               <a:ext uri="{C807C97D-BFC1-408E-A445-0C87EB9F89A2}">
-                <ask:lineSketchStyleProps xmlns="" xmlns:ask="http://schemas.microsoft.com/office/drawing/2018/sketchyshapes" sd="2863741219">
+                <ask:lineSketchStyleProps xmlns:ask="http://schemas.microsoft.com/office/drawing/2018/sketchyshapes" xmlns="" sd="2863741219">
                   <a:prstGeom prst="rect">
                     <a:avLst/>
                   </a:prstGeom>
@@ -6331,7 +6426,7 @@
           <p:cNvPr id="4" name="Content Placeholder 3" descr="A graph of a bar graph&#10;&#10;AI-generated content may be incorrect.">
             <a:extLst>
               <a:ext uri="{FF2B5EF4-FFF2-40B4-BE49-F238E27FC236}">
-                <a16:creationId xmlns="" xmlns:a16="http://schemas.microsoft.com/office/drawing/2014/main" id="{DCF1AF55-BB4A-9D78-F6E9-E18FC1356C32}"/>
+                <a16:creationId xmlns:a16="http://schemas.microsoft.com/office/drawing/2014/main" xmlns="" id="{DCF1AF55-BB4A-9D78-F6E9-E18FC1356C32}"/>
               </a:ext>
             </a:extLst>
           </p:cNvPr>
@@ -6665,7 +6760,7 @@
         </p:nvSpPr>
         <p:spPr>
           <a:xfrm>
-            <a:off x="869356" y="867060"/>
+            <a:off x="490984" y="806553"/>
             <a:ext cx="7364748" cy="1077218"/>
           </a:xfrm>
           <a:prstGeom prst="rect">
@@ -6788,7 +6883,6 @@
               <a:rPr lang="en-US" sz="4000" dirty="0"/>
               <a:t>Key Findings &amp; Visuals</a:t>
             </a:r>
-            <a:endParaRPr lang="en-US" sz="4000" dirty="0"/>
           </a:p>
         </p:txBody>
       </p:sp>
@@ -6851,7 +6945,6 @@
               <a:rPr lang="en-GB" sz="3200" dirty="0"/>
               <a:t>adults (65+) more likely to get seasonal flu shots</a:t>
             </a:r>
-            <a:endParaRPr lang="en-GB" sz="3200" dirty="0"/>
           </a:p>
         </p:txBody>
       </p:sp>
@@ -6914,7 +7007,7 @@
         <p:cNvPr id="1" name="">
           <a:extLst>
             <a:ext uri="{FF2B5EF4-FFF2-40B4-BE49-F238E27FC236}">
-              <a16:creationId xmlns="" xmlns:a16="http://schemas.microsoft.com/office/drawing/2014/main" id="{E2A7CD3E-6FDC-5799-D36E-3836A1AFD447}"/>
+              <a16:creationId xmlns:a16="http://schemas.microsoft.com/office/drawing/2014/main" xmlns="" id="{E2A7CD3E-6FDC-5799-D36E-3836A1AFD447}"/>
             </a:ext>
           </a:extLst>
         </p:cNvPr>
@@ -6934,10 +7027,10 @@
           <p:cNvPr id="22" name="Rectangle 21">
             <a:extLst>
               <a:ext uri="{FF2B5EF4-FFF2-40B4-BE49-F238E27FC236}">
-                <a16:creationId xmlns="" xmlns:a16="http://schemas.microsoft.com/office/drawing/2014/main" id="{A1D1BBEA-2421-CC82-B770-1FE777DCA3F2}"/>
+                <a16:creationId xmlns:a16="http://schemas.microsoft.com/office/drawing/2014/main" xmlns="" id="{A1D1BBEA-2421-CC82-B770-1FE777DCA3F2}"/>
               </a:ext>
               <a:ext uri="{C183D7F6-B498-43B3-948B-1728B52AA6E4}">
-                <adec:decorative xmlns="" xmlns:adec="http://schemas.microsoft.com/office/drawing/2017/decorative" val="1"/>
+                <adec:decorative xmlns:adec="http://schemas.microsoft.com/office/drawing/2017/decorative" xmlns="" val="1"/>
               </a:ext>
             </a:extLst>
           </p:cNvPr>
@@ -6947,7 +7040,7 @@
           <p:nvPr>
             <p:extLst>
               <p:ext uri="{386F3935-93C4-4BCD-93E2-E3B085C9AB24}">
-                <p16:designElem xmlns="" xmlns:p16="http://schemas.microsoft.com/office/powerpoint/2015/main" val="1"/>
+                <p16:designElem xmlns:p16="http://schemas.microsoft.com/office/powerpoint/2015/main" xmlns="" val="1"/>
               </p:ext>
             </p:extLst>
           </p:nvPr>
@@ -6997,7 +7090,7 @@
           <p:cNvPr id="2" name="Title 1">
             <a:extLst>
               <a:ext uri="{FF2B5EF4-FFF2-40B4-BE49-F238E27FC236}">
-                <a16:creationId xmlns="" xmlns:a16="http://schemas.microsoft.com/office/drawing/2014/main" id="{830261ED-224B-79F8-29DF-CB0CF2079116}"/>
+                <a16:creationId xmlns:a16="http://schemas.microsoft.com/office/drawing/2014/main" xmlns="" id="{830261ED-224B-79F8-29DF-CB0CF2079116}"/>
               </a:ext>
             </a:extLst>
           </p:cNvPr>
@@ -7027,11 +7120,7 @@
             </a:pPr>
             <a:r>
               <a:rPr lang="en-US" sz="4800" dirty="0" smtClean="0"/>
-              <a:t>Key </a:t>
-            </a:r>
-            <a:r>
-              <a:rPr lang="en-US" sz="4800" dirty="0" smtClean="0"/>
-              <a:t>Findings &amp; Visuals</a:t>
+              <a:t>Key Findings &amp; Visuals</a:t>
             </a:r>
             <a:endParaRPr lang="en-US" sz="4700" kern="1200" dirty="0">
               <a:solidFill>
@@ -7049,7 +7138,7 @@
           <p:cNvPr id="5" name="Content Placeholder 4" descr="A red circle with blue and red text&#10;&#10;AI-generated content may be incorrect.">
             <a:extLst>
               <a:ext uri="{FF2B5EF4-FFF2-40B4-BE49-F238E27FC236}">
-                <a16:creationId xmlns="" xmlns:a16="http://schemas.microsoft.com/office/drawing/2014/main" id="{46DEBA47-3BAE-AF9B-3153-39DD37CCA8CA}"/>
+                <a16:creationId xmlns:a16="http://schemas.microsoft.com/office/drawing/2014/main" xmlns="" id="{46DEBA47-3BAE-AF9B-3153-39DD37CCA8CA}"/>
               </a:ext>
             </a:extLst>
           </p:cNvPr>
@@ -7078,7 +7167,7 @@
           <p:cNvPr id="12" name="Content Placeholder 11" descr="A diagram of a patient condition&#10;&#10;AI-generated content may be incorrect.">
             <a:extLst>
               <a:ext uri="{FF2B5EF4-FFF2-40B4-BE49-F238E27FC236}">
-                <a16:creationId xmlns="" xmlns:a16="http://schemas.microsoft.com/office/drawing/2014/main" id="{06D8CF7D-A933-7AC3-F4C7-CB856E975786}"/>
+                <a16:creationId xmlns:a16="http://schemas.microsoft.com/office/drawing/2014/main" xmlns="" id="{06D8CF7D-A933-7AC3-F4C7-CB856E975786}"/>
               </a:ext>
             </a:extLst>
           </p:cNvPr>
